--- a/Agentic_AI_Presentation.pptx
+++ b/Agentic_AI_Presentation.pptx
@@ -19,6 +19,14 @@
     <p:sldId id="267" r:id="rId18"/>
     <p:sldId id="268" r:id="rId19"/>
     <p:sldId id="269" r:id="rId20"/>
+    <p:sldId id="270" r:id="rId21"/>
+    <p:sldId id="271" r:id="rId22"/>
+    <p:sldId id="272" r:id="rId23"/>
+    <p:sldId id="273" r:id="rId24"/>
+    <p:sldId id="274" r:id="rId25"/>
+    <p:sldId id="275" r:id="rId26"/>
+    <p:sldId id="276" r:id="rId27"/>
+    <p:sldId id="277" r:id="rId28"/>
   </p:sldIdLst>
   <p:sldSz cx="12191695" cy="6858000" type="screen4x3"/>
   <p:notesSz cx="6858000" cy="9144000"/>
@@ -3116,7 +3124,7 @@
             <a:avLst/>
           </a:prstGeom>
           <a:solidFill>
-            <a:srgbClr val="F7F4EF"/>
+            <a:srgbClr val="DACEBE"/>
           </a:solidFill>
           <a:ln>
             <a:noFill/>
@@ -3159,7 +3167,7 @@
             <a:avLst/>
           </a:prstGeom>
           <a:solidFill>
-            <a:srgbClr val="D97757"/>
+            <a:srgbClr val="DB8F2A"/>
           </a:solidFill>
           <a:ln>
             <a:noFill/>
@@ -3195,14 +3203,14 @@
         </p:nvSpPr>
         <p:spPr>
           <a:xfrm>
-            <a:off x="777240" y="1554480"/>
-            <a:ext cx="640080" cy="640080"/>
+            <a:off x="777240" y="1234440"/>
+            <a:ext cx="566928" cy="566928"/>
           </a:xfrm>
           <a:prstGeom prst="star4">
             <a:avLst/>
           </a:prstGeom>
           <a:solidFill>
-            <a:srgbClr val="D97757"/>
+            <a:srgbClr val="DB8F2A"/>
           </a:solidFill>
           <a:ln>
             <a:noFill/>
@@ -3238,8 +3246,8 @@
         </p:nvSpPr>
         <p:spPr>
           <a:xfrm>
-            <a:off x="777240" y="2331720"/>
-            <a:ext cx="10058400" cy="1005840"/>
+            <a:off x="777240" y="1920240"/>
+            <a:ext cx="10972800" cy="365760"/>
           </a:xfrm>
           <a:prstGeom prst="rect">
             <a:avLst/>
@@ -3254,9 +3262,44 @@
           <a:p>
             <a:pPr algn="l"/>
             <a:r>
+              <a:rPr sz="1400" b="1">
+                <a:solidFill>
+                  <a:srgbClr val="B8741C"/>
+                </a:solidFill>
+                <a:latin typeface="Calibri"/>
+              </a:rPr>
+              <a:t>PROJECT BRIEFING</a:t>
+            </a:r>
+          </a:p>
+        </p:txBody>
+      </p:sp>
+      <p:sp>
+        <p:nvSpPr>
+          <p:cNvPr id="6" name="TextBox 5"/>
+          <p:cNvSpPr txBox="1"/>
+          <p:nvPr/>
+        </p:nvSpPr>
+        <p:spPr>
+          <a:xfrm>
+            <a:off x="777240" y="2286000"/>
+            <a:ext cx="10972800" cy="914400"/>
+          </a:xfrm>
+          <a:prstGeom prst="rect">
+            <a:avLst/>
+          </a:prstGeom>
+          <a:noFill/>
+        </p:spPr>
+        <p:txBody>
+          <a:bodyPr wrap="square">
+            <a:spAutoFit/>
+          </a:bodyPr>
+          <a:lstStyle/>
+          <a:p>
+            <a:pPr algn="l"/>
+            <a:r>
               <a:rPr sz="5400" b="1">
                 <a:solidFill>
-                  <a:srgbClr val="14120B"/>
+                  <a:srgbClr val="1A1612"/>
                 </a:solidFill>
                 <a:latin typeface="Georgia"/>
               </a:rPr>
@@ -3267,14 +3310,14 @@
       </p:sp>
       <p:sp>
         <p:nvSpPr>
-          <p:cNvPr id="6" name="TextBox 5"/>
-          <p:cNvSpPr txBox="1"/>
-          <p:nvPr/>
-        </p:nvSpPr>
-        <p:spPr>
-          <a:xfrm>
-            <a:off x="777240" y="3337560"/>
-            <a:ext cx="10058400" cy="822960"/>
+          <p:cNvPr id="7" name="TextBox 6"/>
+          <p:cNvSpPr txBox="1"/>
+          <p:nvPr/>
+        </p:nvSpPr>
+        <p:spPr>
+          <a:xfrm>
+            <a:off x="777240" y="3246120"/>
+            <a:ext cx="10241280" cy="914400"/>
           </a:xfrm>
           <a:prstGeom prst="rect">
             <a:avLst/>
@@ -3289,27 +3332,27 @@
           <a:p>
             <a:pPr algn="l"/>
             <a:r>
-              <a:rPr sz="2400" b="0">
-                <a:solidFill>
-                  <a:srgbClr val="6F6B63"/>
-                </a:solidFill>
-                <a:latin typeface="Calibri"/>
-              </a:rPr>
-              <a:t>A local ReAct agent that thinks, uses tools, speaks, and answers like a teammate.</a:t>
-            </a:r>
-          </a:p>
-        </p:txBody>
-      </p:sp>
-      <p:sp>
-        <p:nvSpPr>
-          <p:cNvPr id="7" name="TextBox 6"/>
-          <p:cNvSpPr txBox="1"/>
-          <p:nvPr/>
-        </p:nvSpPr>
-        <p:spPr>
-          <a:xfrm>
-            <a:off x="777240" y="5029200"/>
-            <a:ext cx="10058400" cy="365760"/>
+              <a:rPr sz="2200" b="0">
+                <a:solidFill>
+                  <a:srgbClr val="5E574E"/>
+                </a:solidFill>
+                <a:latin typeface="Calibri"/>
+              </a:rPr>
+              <a:t>A local ReAct assistant that thinks, uses tools, reads files, runs code, and answers like a teammate.</a:t>
+            </a:r>
+          </a:p>
+        </p:txBody>
+      </p:sp>
+      <p:sp>
+        <p:nvSpPr>
+          <p:cNvPr id="8" name="TextBox 7"/>
+          <p:cNvSpPr txBox="1"/>
+          <p:nvPr/>
+        </p:nvSpPr>
+        <p:spPr>
+          <a:xfrm>
+            <a:off x="777240" y="4754880"/>
+            <a:ext cx="10058400" cy="320040"/>
           </a:xfrm>
           <a:prstGeom prst="rect">
             <a:avLst/>
@@ -3326,24 +3369,24 @@
             <a:r>
               <a:rPr sz="1600" b="1">
                 <a:solidFill>
-                  <a:srgbClr val="8A331C"/>
-                </a:solidFill>
-                <a:latin typeface="Calibri"/>
-              </a:rPr>
-              <a:t>Python  ·  FastAPI  ·  Next.js  ·  Groq</a:t>
-            </a:r>
-          </a:p>
-        </p:txBody>
-      </p:sp>
-      <p:sp>
-        <p:nvSpPr>
-          <p:cNvPr id="8" name="TextBox 7"/>
-          <p:cNvSpPr txBox="1"/>
-          <p:nvPr/>
-        </p:nvSpPr>
-        <p:spPr>
-          <a:xfrm>
-            <a:off x="777240" y="5486400"/>
+                  <a:srgbClr val="B8741C"/>
+                </a:solidFill>
+                <a:latin typeface="Calibri"/>
+              </a:rPr>
+              <a:t>Features  ·  How it works  ·  Benefits  ·  Full project knowledge</a:t>
+            </a:r>
+          </a:p>
+        </p:txBody>
+      </p:sp>
+      <p:sp>
+        <p:nvSpPr>
+          <p:cNvPr id="9" name="TextBox 8"/>
+          <p:cNvSpPr txBox="1"/>
+          <p:nvPr/>
+        </p:nvSpPr>
+        <p:spPr>
+          <a:xfrm>
+            <a:off x="777240" y="5212080"/>
             <a:ext cx="10058400" cy="320040"/>
           </a:xfrm>
           <a:prstGeom prst="rect">
@@ -3359,13 +3402,48 @@
           <a:p>
             <a:pPr algn="l"/>
             <a:r>
+              <a:rPr sz="1600" b="0">
+                <a:solidFill>
+                  <a:srgbClr val="1A1612"/>
+                </a:solidFill>
+                <a:latin typeface="Calibri"/>
+              </a:rPr>
+              <a:t>Python  ·  FastAPI  ·  Next.js  ·  Groq    |    Built by Abhishek Mishra</a:t>
+            </a:r>
+          </a:p>
+        </p:txBody>
+      </p:sp>
+      <p:sp>
+        <p:nvSpPr>
+          <p:cNvPr id="10" name="TextBox 9"/>
+          <p:cNvSpPr txBox="1"/>
+          <p:nvPr/>
+        </p:nvSpPr>
+        <p:spPr>
+          <a:xfrm>
+            <a:off x="777240" y="5623560"/>
+            <a:ext cx="10058400" cy="320040"/>
+          </a:xfrm>
+          <a:prstGeom prst="rect">
+            <a:avLst/>
+          </a:prstGeom>
+          <a:noFill/>
+        </p:spPr>
+        <p:txBody>
+          <a:bodyPr wrap="square">
+            <a:spAutoFit/>
+          </a:bodyPr>
+          <a:lstStyle/>
+          <a:p>
+            <a:pPr algn="l"/>
+            <a:r>
               <a:rPr sz="1400" b="0">
                 <a:solidFill>
-                  <a:srgbClr val="6F6B63"/>
-                </a:solidFill>
-                <a:latin typeface="Calibri"/>
-              </a:rPr>
-              <a:t>Version 1.4.0  ·  Local app on http://127.0.0.1:3000</a:t>
+                  <a:srgbClr val="5E574E"/>
+                </a:solidFill>
+                <a:latin typeface="Calibri"/>
+              </a:rPr>
+              <a:t>v1.6.0  ·  http://127.0.0.1:3000  ·  Live on Render</a:t>
             </a:r>
           </a:p>
         </p:txBody>
@@ -3403,7 +3481,7 @@
             <a:avLst/>
           </a:prstGeom>
           <a:solidFill>
-            <a:srgbClr val="F7F4EF"/>
+            <a:srgbClr val="F1F1F1"/>
           </a:solidFill>
           <a:ln>
             <a:noFill/>
@@ -3446,7 +3524,7 @@
             <a:avLst/>
           </a:prstGeom>
           <a:solidFill>
-            <a:srgbClr val="D97757"/>
+            <a:srgbClr val="DB8F2A"/>
           </a:solidFill>
           <a:ln>
             <a:noFill/>
@@ -3482,8 +3560,8 @@
         </p:nvSpPr>
         <p:spPr>
           <a:xfrm>
-            <a:off x="640080" y="365760"/>
-            <a:ext cx="10972800" cy="640080"/>
+            <a:off x="640080" y="320040"/>
+            <a:ext cx="10972800" cy="548640"/>
           </a:xfrm>
           <a:prstGeom prst="rect">
             <a:avLst/>
@@ -3498,117 +3576,61 @@
           <a:p>
             <a:pPr algn="l"/>
             <a:r>
-              <a:rPr sz="3200" b="1">
-                <a:solidFill>
-                  <a:srgbClr val="14120B"/>
+              <a:rPr sz="3000" b="1">
+                <a:solidFill>
+                  <a:srgbClr val="1A1612"/>
                 </a:solidFill>
                 <a:latin typeface="Georgia"/>
               </a:rPr>
-              <a:t>How the agent thinks</a:t>
-            </a:r>
-          </a:p>
-        </p:txBody>
-      </p:sp>
-      <p:sp>
-        <p:nvSpPr>
-          <p:cNvPr id="5" name="TextBox 4"/>
-          <p:cNvSpPr txBox="1"/>
-          <p:nvPr/>
-        </p:nvSpPr>
-        <p:spPr>
-          <a:xfrm>
-            <a:off x="731520" y="1280160"/>
-            <a:ext cx="10515600" cy="4846320"/>
-          </a:xfrm>
-          <a:prstGeom prst="rect">
-            <a:avLst/>
-          </a:prstGeom>
-          <a:noFill/>
-        </p:spPr>
-        <p:txBody>
-          <a:bodyPr wrap="square">
-            <a:spAutoFit/>
-          </a:bodyPr>
-          <a:lstStyle/>
-          <a:p>
-            <a:pPr>
-              <a:spcAft>
-                <a:spcPts val="600"/>
-              </a:spcAft>
-            </a:pPr>
-            <a:r>
-              <a:rPr sz="2200" b="0">
-                <a:solidFill>
-                  <a:srgbClr val="14120B"/>
-                </a:solidFill>
-                <a:latin typeface="Calibri"/>
-              </a:rPr>
-              <a:t>•  Think — the LLM decides whether it needs a tool.</a:t>
-            </a:r>
-          </a:p>
-          <a:p>
-            <a:pPr>
-              <a:spcAft>
-                <a:spcPts val="600"/>
-              </a:spcAft>
-            </a:pPr>
-            <a:r>
-              <a:rPr sz="2200" b="0">
-                <a:solidFill>
-                  <a:srgbClr val="14120B"/>
-                </a:solidFill>
-                <a:latin typeface="Calibri"/>
-              </a:rPr>
-              <a:t>•  Act — it calls a tool with a clean JSON argument, e.g. {"query": "..."}.</a:t>
-            </a:r>
-          </a:p>
-          <a:p>
-            <a:pPr>
-              <a:spcAft>
-                <a:spcPts val="600"/>
-              </a:spcAft>
-            </a:pPr>
-            <a:r>
-              <a:rPr sz="2200" b="0">
-                <a:solidFill>
-                  <a:srgbClr val="14120B"/>
-                </a:solidFill>
-                <a:latin typeface="Calibri"/>
-              </a:rPr>
-              <a:t>•  Observe — the tool result is added to memory.</a:t>
-            </a:r>
-          </a:p>
-          <a:p>
-            <a:pPr>
-              <a:spcAft>
-                <a:spcPts val="600"/>
-              </a:spcAft>
-            </a:pPr>
-            <a:r>
-              <a:rPr sz="2200" b="0">
-                <a:solidFill>
-                  <a:srgbClr val="14120B"/>
-                </a:solidFill>
-                <a:latin typeface="Calibri"/>
-              </a:rPr>
-              <a:t>•  Repeat — up to max steps (default 8), then write a human answer.</a:t>
-            </a:r>
-          </a:p>
-          <a:p>
-            <a:pPr>
-              <a:spcAft>
-                <a:spcPts val="600"/>
-              </a:spcAft>
-            </a:pPr>
-            <a:r>
-              <a:rPr sz="2200" b="0">
-                <a:solidFill>
-                  <a:srgbClr val="14120B"/>
-                </a:solidFill>
-                <a:latin typeface="Calibri"/>
-              </a:rPr>
-              <a:t>•  Guardrails: no JSON dumps as final answers, repair bad Groq tool calls, cite sources.</a:t>
-            </a:r>
+              <a:t>Chat experience</a:t>
+            </a:r>
+          </a:p>
+        </p:txBody>
+      </p:sp>
+      <p:sp>
+        <p:nvSpPr>
+          <p:cNvPr id="5" name="Rounded Rectangle 4"/>
+          <p:cNvSpPr/>
+          <p:nvPr/>
+        </p:nvSpPr>
+        <p:spPr>
+          <a:xfrm>
+            <a:off x="640080" y="1051560"/>
+            <a:ext cx="10881360" cy="914400"/>
+          </a:xfrm>
+          <a:prstGeom prst="roundRect">
+            <a:avLst>
+              <a:gd name="adj" fmla="val 8000"/>
+            </a:avLst>
+          </a:prstGeom>
+          <a:solidFill>
+            <a:srgbClr val="FFFFFF"/>
+          </a:solidFill>
+          <a:ln>
+            <a:solidFill>
+              <a:srgbClr val="D4C8B8"/>
+            </a:solidFill>
+          </a:ln>
+        </p:spPr>
+        <p:style>
+          <a:lnRef idx="1">
+            <a:schemeClr val="accent1"/>
+          </a:lnRef>
+          <a:fillRef idx="3">
+            <a:schemeClr val="accent1"/>
+          </a:fillRef>
+          <a:effectRef idx="2">
+            <a:schemeClr val="accent1"/>
+          </a:effectRef>
+          <a:fontRef idx="minor">
+            <a:schemeClr val="lt1"/>
+          </a:fontRef>
+        </p:style>
+        <p:txBody>
+          <a:bodyPr rtlCol="0" anchor="ctr"/>
+          <a:lstStyle/>
+          <a:p>
+            <a:pPr algn="ctr"/>
           </a:p>
         </p:txBody>
       </p:sp>
@@ -3620,8 +3642,546 @@
         </p:nvSpPr>
         <p:spPr>
           <a:xfrm>
+            <a:off x="868680" y="1161288"/>
+            <a:ext cx="10424160" cy="292608"/>
+          </a:xfrm>
+          <a:prstGeom prst="rect">
+            <a:avLst/>
+          </a:prstGeom>
+          <a:noFill/>
+        </p:spPr>
+        <p:txBody>
+          <a:bodyPr wrap="square">
+            <a:spAutoFit/>
+          </a:bodyPr>
+          <a:lstStyle/>
+          <a:p>
+            <a:pPr algn="l"/>
+            <a:r>
+              <a:rPr sz="1600" b="1">
+                <a:solidFill>
+                  <a:srgbClr val="B8741C"/>
+                </a:solidFill>
+                <a:latin typeface="Calibri"/>
+              </a:rPr>
+              <a:t>Login &amp; greeting</a:t>
+            </a:r>
+          </a:p>
+        </p:txBody>
+      </p:sp>
+      <p:sp>
+        <p:nvSpPr>
+          <p:cNvPr id="7" name="TextBox 6"/>
+          <p:cNvSpPr txBox="1"/>
+          <p:nvPr/>
+        </p:nvSpPr>
+        <p:spPr>
+          <a:xfrm>
+            <a:off x="868680" y="1472184"/>
+            <a:ext cx="10424160" cy="384048"/>
+          </a:xfrm>
+          <a:prstGeom prst="rect">
+            <a:avLst/>
+          </a:prstGeom>
+          <a:noFill/>
+        </p:spPr>
+        <p:txBody>
+          <a:bodyPr wrap="square">
+            <a:spAutoFit/>
+          </a:bodyPr>
+          <a:lstStyle/>
+          <a:p>
+            <a:pPr algn="l"/>
+            <a:r>
+              <a:rPr sz="1500" b="0">
+                <a:solidFill>
+                  <a:srgbClr val="1A1612"/>
+                </a:solidFill>
+                <a:latin typeface="Calibri"/>
+              </a:rPr>
+              <a:t>Name + email, or Google / GitHub. Empty state: “Ready to leap, {name}?”</a:t>
+            </a:r>
+          </a:p>
+        </p:txBody>
+      </p:sp>
+      <p:sp>
+        <p:nvSpPr>
+          <p:cNvPr id="8" name="Rounded Rectangle 7"/>
+          <p:cNvSpPr/>
+          <p:nvPr/>
+        </p:nvSpPr>
+        <p:spPr>
+          <a:xfrm>
+            <a:off x="640080" y="2075688"/>
+            <a:ext cx="10881360" cy="914400"/>
+          </a:xfrm>
+          <a:prstGeom prst="roundRect">
+            <a:avLst>
+              <a:gd name="adj" fmla="val 8000"/>
+            </a:avLst>
+          </a:prstGeom>
+          <a:solidFill>
+            <a:srgbClr val="FFFFFF"/>
+          </a:solidFill>
+          <a:ln>
+            <a:solidFill>
+              <a:srgbClr val="D4C8B8"/>
+            </a:solidFill>
+          </a:ln>
+        </p:spPr>
+        <p:style>
+          <a:lnRef idx="1">
+            <a:schemeClr val="accent1"/>
+          </a:lnRef>
+          <a:fillRef idx="3">
+            <a:schemeClr val="accent1"/>
+          </a:fillRef>
+          <a:effectRef idx="2">
+            <a:schemeClr val="accent1"/>
+          </a:effectRef>
+          <a:fontRef idx="minor">
+            <a:schemeClr val="lt1"/>
+          </a:fontRef>
+        </p:style>
+        <p:txBody>
+          <a:bodyPr rtlCol="0" anchor="ctr"/>
+          <a:lstStyle/>
+          <a:p>
+            <a:pPr algn="ctr"/>
+          </a:p>
+        </p:txBody>
+      </p:sp>
+      <p:sp>
+        <p:nvSpPr>
+          <p:cNvPr id="9" name="TextBox 8"/>
+          <p:cNvSpPr txBox="1"/>
+          <p:nvPr/>
+        </p:nvSpPr>
+        <p:spPr>
+          <a:xfrm>
+            <a:off x="868680" y="2185416"/>
+            <a:ext cx="10424160" cy="292608"/>
+          </a:xfrm>
+          <a:prstGeom prst="rect">
+            <a:avLst/>
+          </a:prstGeom>
+          <a:noFill/>
+        </p:spPr>
+        <p:txBody>
+          <a:bodyPr wrap="square">
+            <a:spAutoFit/>
+          </a:bodyPr>
+          <a:lstStyle/>
+          <a:p>
+            <a:pPr algn="l"/>
+            <a:r>
+              <a:rPr sz="1600" b="1">
+                <a:solidFill>
+                  <a:srgbClr val="B8741C"/>
+                </a:solidFill>
+                <a:latin typeface="Calibri"/>
+              </a:rPr>
+              <a:t>Sidebar</a:t>
+            </a:r>
+          </a:p>
+        </p:txBody>
+      </p:sp>
+      <p:sp>
+        <p:nvSpPr>
+          <p:cNvPr id="10" name="TextBox 9"/>
+          <p:cNvSpPr txBox="1"/>
+          <p:nvPr/>
+        </p:nvSpPr>
+        <p:spPr>
+          <a:xfrm>
+            <a:off x="868680" y="2496312"/>
+            <a:ext cx="10424160" cy="384048"/>
+          </a:xfrm>
+          <a:prstGeom prst="rect">
+            <a:avLst/>
+          </a:prstGeom>
+          <a:noFill/>
+        </p:spPr>
+        <p:txBody>
+          <a:bodyPr wrap="square">
+            <a:spAutoFit/>
+          </a:bodyPr>
+          <a:lstStyle/>
+          <a:p>
+            <a:pPr algn="l"/>
+            <a:r>
+              <a:rPr sz="1500" b="0">
+                <a:solidFill>
+                  <a:srgbClr val="1A1612"/>
+                </a:solidFill>
+                <a:latin typeface="Calibri"/>
+              </a:rPr>
+              <a:t>New leap, project picker, Single agent vs Researcher + Writer, Recents search, profile menu</a:t>
+            </a:r>
+          </a:p>
+        </p:txBody>
+      </p:sp>
+      <p:sp>
+        <p:nvSpPr>
+          <p:cNvPr id="11" name="Rounded Rectangle 10"/>
+          <p:cNvSpPr/>
+          <p:nvPr/>
+        </p:nvSpPr>
+        <p:spPr>
+          <a:xfrm>
+            <a:off x="640080" y="3099816"/>
+            <a:ext cx="10881360" cy="914400"/>
+          </a:xfrm>
+          <a:prstGeom prst="roundRect">
+            <a:avLst>
+              <a:gd name="adj" fmla="val 8000"/>
+            </a:avLst>
+          </a:prstGeom>
+          <a:solidFill>
+            <a:srgbClr val="FFFFFF"/>
+          </a:solidFill>
+          <a:ln>
+            <a:solidFill>
+              <a:srgbClr val="D4C8B8"/>
+            </a:solidFill>
+          </a:ln>
+        </p:spPr>
+        <p:style>
+          <a:lnRef idx="1">
+            <a:schemeClr val="accent1"/>
+          </a:lnRef>
+          <a:fillRef idx="3">
+            <a:schemeClr val="accent1"/>
+          </a:fillRef>
+          <a:effectRef idx="2">
+            <a:schemeClr val="accent1"/>
+          </a:effectRef>
+          <a:fontRef idx="minor">
+            <a:schemeClr val="lt1"/>
+          </a:fontRef>
+        </p:style>
+        <p:txBody>
+          <a:bodyPr rtlCol="0" anchor="ctr"/>
+          <a:lstStyle/>
+          <a:p>
+            <a:pPr algn="ctr"/>
+          </a:p>
+        </p:txBody>
+      </p:sp>
+      <p:sp>
+        <p:nvSpPr>
+          <p:cNvPr id="12" name="TextBox 11"/>
+          <p:cNvSpPr txBox="1"/>
+          <p:nvPr/>
+        </p:nvSpPr>
+        <p:spPr>
+          <a:xfrm>
+            <a:off x="868680" y="3209544"/>
+            <a:ext cx="10424160" cy="292608"/>
+          </a:xfrm>
+          <a:prstGeom prst="rect">
+            <a:avLst/>
+          </a:prstGeom>
+          <a:noFill/>
+        </p:spPr>
+        <p:txBody>
+          <a:bodyPr wrap="square">
+            <a:spAutoFit/>
+          </a:bodyPr>
+          <a:lstStyle/>
+          <a:p>
+            <a:pPr algn="l"/>
+            <a:r>
+              <a:rPr sz="1600" b="1">
+                <a:solidFill>
+                  <a:srgbClr val="B8741C"/>
+                </a:solidFill>
+                <a:latin typeface="Calibri"/>
+              </a:rPr>
+              <a:t>Composer</a:t>
+            </a:r>
+          </a:p>
+        </p:txBody>
+      </p:sp>
+      <p:sp>
+        <p:nvSpPr>
+          <p:cNvPr id="13" name="TextBox 12"/>
+          <p:cNvSpPr txBox="1"/>
+          <p:nvPr/>
+        </p:nvSpPr>
+        <p:spPr>
+          <a:xfrm>
+            <a:off x="868680" y="3520440"/>
+            <a:ext cx="10424160" cy="384048"/>
+          </a:xfrm>
+          <a:prstGeom prst="rect">
+            <a:avLst/>
+          </a:prstGeom>
+          <a:noFill/>
+        </p:spPr>
+        <p:txBody>
+          <a:bodyPr wrap="square">
+            <a:spAutoFit/>
+          </a:bodyPr>
+          <a:lstStyle/>
+          <a:p>
+            <a:pPr algn="l"/>
+            <a:r>
+              <a:rPr sz="1500" b="0">
+                <a:solidFill>
+                  <a:srgbClr val="1A1612"/>
+                </a:solidFill>
+                <a:latin typeface="Calibri"/>
+              </a:rPr>
+              <a:t>+ attach (photo, camera, file), microphone, Enter to send (optional in Settings)</a:t>
+            </a:r>
+          </a:p>
+        </p:txBody>
+      </p:sp>
+      <p:sp>
+        <p:nvSpPr>
+          <p:cNvPr id="14" name="Rounded Rectangle 13"/>
+          <p:cNvSpPr/>
+          <p:nvPr/>
+        </p:nvSpPr>
+        <p:spPr>
+          <a:xfrm>
+            <a:off x="640080" y="4123944"/>
+            <a:ext cx="10881360" cy="914400"/>
+          </a:xfrm>
+          <a:prstGeom prst="roundRect">
+            <a:avLst>
+              <a:gd name="adj" fmla="val 8000"/>
+            </a:avLst>
+          </a:prstGeom>
+          <a:solidFill>
+            <a:srgbClr val="FFFFFF"/>
+          </a:solidFill>
+          <a:ln>
+            <a:solidFill>
+              <a:srgbClr val="D4C8B8"/>
+            </a:solidFill>
+          </a:ln>
+        </p:spPr>
+        <p:style>
+          <a:lnRef idx="1">
+            <a:schemeClr val="accent1"/>
+          </a:lnRef>
+          <a:fillRef idx="3">
+            <a:schemeClr val="accent1"/>
+          </a:fillRef>
+          <a:effectRef idx="2">
+            <a:schemeClr val="accent1"/>
+          </a:effectRef>
+          <a:fontRef idx="minor">
+            <a:schemeClr val="lt1"/>
+          </a:fontRef>
+        </p:style>
+        <p:txBody>
+          <a:bodyPr rtlCol="0" anchor="ctr"/>
+          <a:lstStyle/>
+          <a:p>
+            <a:pPr algn="ctr"/>
+          </a:p>
+        </p:txBody>
+      </p:sp>
+      <p:sp>
+        <p:nvSpPr>
+          <p:cNvPr id="15" name="TextBox 14"/>
+          <p:cNvSpPr txBox="1"/>
+          <p:nvPr/>
+        </p:nvSpPr>
+        <p:spPr>
+          <a:xfrm>
+            <a:off x="868680" y="4233672"/>
+            <a:ext cx="10424160" cy="292608"/>
+          </a:xfrm>
+          <a:prstGeom prst="rect">
+            <a:avLst/>
+          </a:prstGeom>
+          <a:noFill/>
+        </p:spPr>
+        <p:txBody>
+          <a:bodyPr wrap="square">
+            <a:spAutoFit/>
+          </a:bodyPr>
+          <a:lstStyle/>
+          <a:p>
+            <a:pPr algn="l"/>
+            <a:r>
+              <a:rPr sz="1600" b="1">
+                <a:solidFill>
+                  <a:srgbClr val="B8741C"/>
+                </a:solidFill>
+                <a:latin typeface="Calibri"/>
+              </a:rPr>
+              <a:t>After a reply</a:t>
+            </a:r>
+          </a:p>
+        </p:txBody>
+      </p:sp>
+      <p:sp>
+        <p:nvSpPr>
+          <p:cNvPr id="16" name="TextBox 15"/>
+          <p:cNvSpPr txBox="1"/>
+          <p:nvPr/>
+        </p:nvSpPr>
+        <p:spPr>
+          <a:xfrm>
+            <a:off x="868680" y="4544568"/>
+            <a:ext cx="10424160" cy="384048"/>
+          </a:xfrm>
+          <a:prstGeom prst="rect">
+            <a:avLst/>
+          </a:prstGeom>
+          <a:noFill/>
+        </p:spPr>
+        <p:txBody>
+          <a:bodyPr wrap="square">
+            <a:spAutoFit/>
+          </a:bodyPr>
+          <a:lstStyle/>
+          <a:p>
+            <a:pPr algn="l"/>
+            <a:r>
+              <a:rPr sz="1500" b="0">
+                <a:solidFill>
+                  <a:srgbClr val="1A1612"/>
+                </a:solidFill>
+                <a:latin typeface="Calibri"/>
+              </a:rPr>
+              <a:t>Copy, speak, Retry last answer, or edit your bubble and Save &amp; retry</a:t>
+            </a:r>
+          </a:p>
+        </p:txBody>
+      </p:sp>
+      <p:sp>
+        <p:nvSpPr>
+          <p:cNvPr id="17" name="Rounded Rectangle 16"/>
+          <p:cNvSpPr/>
+          <p:nvPr/>
+        </p:nvSpPr>
+        <p:spPr>
+          <a:xfrm>
+            <a:off x="640080" y="5148072"/>
+            <a:ext cx="10881360" cy="914400"/>
+          </a:xfrm>
+          <a:prstGeom prst="roundRect">
+            <a:avLst>
+              <a:gd name="adj" fmla="val 8000"/>
+            </a:avLst>
+          </a:prstGeom>
+          <a:solidFill>
+            <a:srgbClr val="FFFFFF"/>
+          </a:solidFill>
+          <a:ln>
+            <a:solidFill>
+              <a:srgbClr val="D4C8B8"/>
+            </a:solidFill>
+          </a:ln>
+        </p:spPr>
+        <p:style>
+          <a:lnRef idx="1">
+            <a:schemeClr val="accent1"/>
+          </a:lnRef>
+          <a:fillRef idx="3">
+            <a:schemeClr val="accent1"/>
+          </a:fillRef>
+          <a:effectRef idx="2">
+            <a:schemeClr val="accent1"/>
+          </a:effectRef>
+          <a:fontRef idx="minor">
+            <a:schemeClr val="lt1"/>
+          </a:fontRef>
+        </p:style>
+        <p:txBody>
+          <a:bodyPr rtlCol="0" anchor="ctr"/>
+          <a:lstStyle/>
+          <a:p>
+            <a:pPr algn="ctr"/>
+          </a:p>
+        </p:txBody>
+      </p:sp>
+      <p:sp>
+        <p:nvSpPr>
+          <p:cNvPr id="18" name="TextBox 17"/>
+          <p:cNvSpPr txBox="1"/>
+          <p:nvPr/>
+        </p:nvSpPr>
+        <p:spPr>
+          <a:xfrm>
+            <a:off x="868680" y="5257800"/>
+            <a:ext cx="10424160" cy="292608"/>
+          </a:xfrm>
+          <a:prstGeom prst="rect">
+            <a:avLst/>
+          </a:prstGeom>
+          <a:noFill/>
+        </p:spPr>
+        <p:txBody>
+          <a:bodyPr wrap="square">
+            <a:spAutoFit/>
+          </a:bodyPr>
+          <a:lstStyle/>
+          <a:p>
+            <a:pPr algn="l"/>
+            <a:r>
+              <a:rPr sz="1600" b="1">
+                <a:solidFill>
+                  <a:srgbClr val="B8741C"/>
+                </a:solidFill>
+                <a:latin typeface="Calibri"/>
+              </a:rPr>
+              <a:t>Language</a:t>
+            </a:r>
+          </a:p>
+        </p:txBody>
+      </p:sp>
+      <p:sp>
+        <p:nvSpPr>
+          <p:cNvPr id="19" name="TextBox 18"/>
+          <p:cNvSpPr txBox="1"/>
+          <p:nvPr/>
+        </p:nvSpPr>
+        <p:spPr>
+          <a:xfrm>
+            <a:off x="868680" y="5568696"/>
+            <a:ext cx="10424160" cy="384048"/>
+          </a:xfrm>
+          <a:prstGeom prst="rect">
+            <a:avLst/>
+          </a:prstGeom>
+          <a:noFill/>
+        </p:spPr>
+        <p:txBody>
+          <a:bodyPr wrap="square">
+            <a:spAutoFit/>
+          </a:bodyPr>
+          <a:lstStyle/>
+          <a:p>
+            <a:pPr algn="l"/>
+            <a:r>
+              <a:rPr sz="1500" b="0">
+                <a:solidFill>
+                  <a:srgbClr val="1A1612"/>
+                </a:solidFill>
+                <a:latin typeface="Calibri"/>
+              </a:rPr>
+              <a:t>English, Hindi, or Bhojpuri — the agent is told to reply in that language</a:t>
+            </a:r>
+          </a:p>
+        </p:txBody>
+      </p:sp>
+      <p:sp>
+        <p:nvSpPr>
+          <p:cNvPr id="20" name="TextBox 19"/>
+          <p:cNvSpPr txBox="1"/>
+          <p:nvPr/>
+        </p:nvSpPr>
+        <p:spPr>
+          <a:xfrm>
             <a:off x="548640" y="6510528"/>
-            <a:ext cx="7315200" cy="274320"/>
+            <a:ext cx="8229600" cy="274320"/>
           </a:xfrm>
           <a:prstGeom prst="rect">
             <a:avLst/>
@@ -3638,18 +4198,18 @@
             <a:r>
               <a:rPr sz="1200" b="0">
                 <a:solidFill>
-                  <a:srgbClr val="6F6B63"/>
-                </a:solidFill>
-                <a:latin typeface="Calibri"/>
-              </a:rPr>
-              <a:t>Agentic AI  ·  v1.4.0</a:t>
-            </a:r>
-          </a:p>
-        </p:txBody>
-      </p:sp>
-      <p:sp>
-        <p:nvSpPr>
-          <p:cNvPr id="7" name="TextBox 6"/>
+                  <a:srgbClr val="5E574E"/>
+                </a:solidFill>
+                <a:latin typeface="Calibri"/>
+              </a:rPr>
+              <a:t>Agentic AI  ·  v1.6.0  ·  Abhishek Mishra</a:t>
+            </a:r>
+          </a:p>
+        </p:txBody>
+      </p:sp>
+      <p:sp>
+        <p:nvSpPr>
+          <p:cNvPr id="21" name="TextBox 20"/>
           <p:cNvSpPr txBox="1"/>
           <p:nvPr/>
         </p:nvSpPr>
@@ -3673,11 +4233,11 @@
             <a:r>
               <a:rPr sz="1200" b="0">
                 <a:solidFill>
-                  <a:srgbClr val="6F6B63"/>
-                </a:solidFill>
-                <a:latin typeface="Calibri"/>
-              </a:rPr>
-              <a:t>10 / 14</a:t>
+                  <a:srgbClr val="5E574E"/>
+                </a:solidFill>
+                <a:latin typeface="Calibri"/>
+              </a:rPr>
+              <a:t>10 / 22</a:t>
             </a:r>
           </a:p>
         </p:txBody>
@@ -3715,7 +4275,7 @@
             <a:avLst/>
           </a:prstGeom>
           <a:solidFill>
-            <a:srgbClr val="F7F4EF"/>
+            <a:srgbClr val="F1F1F1"/>
           </a:solidFill>
           <a:ln>
             <a:noFill/>
@@ -3758,7 +4318,7 @@
             <a:avLst/>
           </a:prstGeom>
           <a:solidFill>
-            <a:srgbClr val="D97757"/>
+            <a:srgbClr val="DB8F2A"/>
           </a:solidFill>
           <a:ln>
             <a:noFill/>
@@ -3812,115 +4372,59 @@
             <a:r>
               <a:rPr sz="3200" b="1">
                 <a:solidFill>
-                  <a:srgbClr val="14120B"/>
+                  <a:srgbClr val="1A1612"/>
                 </a:solidFill>
                 <a:latin typeface="Georgia"/>
               </a:rPr>
-              <a:t>Login and security</a:t>
-            </a:r>
-          </a:p>
-        </p:txBody>
-      </p:sp>
-      <p:sp>
-        <p:nvSpPr>
-          <p:cNvPr id="5" name="TextBox 4"/>
-          <p:cNvSpPr txBox="1"/>
-          <p:nvPr/>
-        </p:nvSpPr>
-        <p:spPr>
-          <a:xfrm>
-            <a:off x="731520" y="1280160"/>
-            <a:ext cx="10515600" cy="4846320"/>
-          </a:xfrm>
-          <a:prstGeom prst="rect">
-            <a:avLst/>
-          </a:prstGeom>
-          <a:noFill/>
-        </p:spPr>
-        <p:txBody>
-          <a:bodyPr wrap="square">
-            <a:spAutoFit/>
-          </a:bodyPr>
-          <a:lstStyle/>
-          <a:p>
-            <a:pPr>
-              <a:spcAft>
-                <a:spcPts val="600"/>
-              </a:spcAft>
-            </a:pPr>
-            <a:r>
-              <a:rPr sz="2200" b="0">
-                <a:solidFill>
-                  <a:srgbClr val="14120B"/>
-                </a:solidFill>
-                <a:latin typeface="Calibri"/>
-              </a:rPr>
-              <a:t>•  Local login: name + email, stored in a signed httpOnly cookie.</a:t>
-            </a:r>
-          </a:p>
-          <a:p>
-            <a:pPr>
-              <a:spcAft>
-                <a:spcPts val="600"/>
-              </a:spcAft>
-            </a:pPr>
-            <a:r>
-              <a:rPr sz="2200" b="0">
-                <a:solidFill>
-                  <a:srgbClr val="14120B"/>
-                </a:solidFill>
-                <a:latin typeface="Calibri"/>
-              </a:rPr>
-              <a:t>•  Google and GitHub OAuth, with callback http://127.0.0.1:3000/auth/.../callback</a:t>
-            </a:r>
-          </a:p>
-          <a:p>
-            <a:pPr>
-              <a:spcAft>
-                <a:spcPts val="600"/>
-              </a:spcAft>
-            </a:pPr>
-            <a:r>
-              <a:rPr sz="2200" b="0">
-                <a:solidFill>
-                  <a:srgbClr val="14120B"/>
-                </a:solidFill>
-                <a:latin typeface="Calibri"/>
-              </a:rPr>
-              <a:t>•  Chat, tools, and settings APIs require a logged-in session.</a:t>
-            </a:r>
-          </a:p>
-          <a:p>
-            <a:pPr>
-              <a:spcAft>
-                <a:spcPts val="600"/>
-              </a:spcAft>
-            </a:pPr>
-            <a:r>
-              <a:rPr sz="2200" b="0">
-                <a:solidFill>
-                  <a:srgbClr val="14120B"/>
-                </a:solidFill>
-                <a:latin typeface="Calibri"/>
-              </a:rPr>
-              <a:t>•  Groq API key stays in .env on the machine — it is never shown back in the UI.</a:t>
-            </a:r>
-          </a:p>
-          <a:p>
-            <a:pPr>
-              <a:spcAft>
-                <a:spcPts val="600"/>
-              </a:spcAft>
-            </a:pPr>
-            <a:r>
-              <a:rPr sz="2200" b="0">
-                <a:solidFill>
-                  <a:srgbClr val="14120B"/>
-                </a:solidFill>
-                <a:latin typeface="Calibri"/>
-              </a:rPr>
-              <a:t>•  OAuth Client ID / Secret come from Google Cloud or GitHub Developer settings.</a:t>
-            </a:r>
+              <a:t>Files, photos, Teach</a:t>
+            </a:r>
+          </a:p>
+        </p:txBody>
+      </p:sp>
+      <p:sp>
+        <p:nvSpPr>
+          <p:cNvPr id="5" name="Rounded Rectangle 4"/>
+          <p:cNvSpPr/>
+          <p:nvPr/>
+        </p:nvSpPr>
+        <p:spPr>
+          <a:xfrm>
+            <a:off x="640080" y="1280160"/>
+            <a:ext cx="3456432" cy="4572000"/>
+          </a:xfrm>
+          <a:prstGeom prst="roundRect">
+            <a:avLst>
+              <a:gd name="adj" fmla="val 8000"/>
+            </a:avLst>
+          </a:prstGeom>
+          <a:solidFill>
+            <a:srgbClr val="FFFFFF"/>
+          </a:solidFill>
+          <a:ln>
+            <a:solidFill>
+              <a:srgbClr val="D4C8B8"/>
+            </a:solidFill>
+          </a:ln>
+        </p:spPr>
+        <p:style>
+          <a:lnRef idx="1">
+            <a:schemeClr val="accent1"/>
+          </a:lnRef>
+          <a:fillRef idx="3">
+            <a:schemeClr val="accent1"/>
+          </a:fillRef>
+          <a:effectRef idx="2">
+            <a:schemeClr val="accent1"/>
+          </a:effectRef>
+          <a:fontRef idx="minor">
+            <a:schemeClr val="lt1"/>
+          </a:fontRef>
+        </p:style>
+        <p:txBody>
+          <a:bodyPr rtlCol="0" anchor="ctr"/>
+          <a:lstStyle/>
+          <a:p>
+            <a:pPr algn="ctr"/>
           </a:p>
         </p:txBody>
       </p:sp>
@@ -3932,8 +4436,312 @@
         </p:nvSpPr>
         <p:spPr>
           <a:xfrm>
+            <a:off x="896112" y="1508760"/>
+            <a:ext cx="2999232" cy="822960"/>
+          </a:xfrm>
+          <a:prstGeom prst="rect">
+            <a:avLst/>
+          </a:prstGeom>
+          <a:noFill/>
+        </p:spPr>
+        <p:txBody>
+          <a:bodyPr wrap="square">
+            <a:spAutoFit/>
+          </a:bodyPr>
+          <a:lstStyle/>
+          <a:p>
+            <a:pPr algn="l"/>
+            <a:r>
+              <a:rPr sz="1800" b="1">
+                <a:solidFill>
+                  <a:srgbClr val="B8741C"/>
+                </a:solidFill>
+                <a:latin typeface="Calibri"/>
+              </a:rPr>
+              <a:t>Drop a file</a:t>
+            </a:r>
+          </a:p>
+        </p:txBody>
+      </p:sp>
+      <p:sp>
+        <p:nvSpPr>
+          <p:cNvPr id="7" name="TextBox 6"/>
+          <p:cNvSpPr txBox="1"/>
+          <p:nvPr/>
+        </p:nvSpPr>
+        <p:spPr>
+          <a:xfrm>
+            <a:off x="896112" y="2331720"/>
+            <a:ext cx="2999232" cy="3200400"/>
+          </a:xfrm>
+          <a:prstGeom prst="rect">
+            <a:avLst/>
+          </a:prstGeom>
+          <a:noFill/>
+        </p:spPr>
+        <p:txBody>
+          <a:bodyPr wrap="square">
+            <a:spAutoFit/>
+          </a:bodyPr>
+          <a:lstStyle/>
+          <a:p>
+            <a:pPr algn="l"/>
+            <a:r>
+              <a:rPr sz="1500" b="0">
+                <a:solidFill>
+                  <a:srgbClr val="1A1612"/>
+                </a:solidFill>
+                <a:latin typeface="Calibri"/>
+              </a:rPr>
+              <a:t>PDF, .docx, txt, md, csv, json. Text is extracted and wrapped as ---file:name--- so the agent quotes the real document.</a:t>
+            </a:r>
+          </a:p>
+        </p:txBody>
+      </p:sp>
+      <p:sp>
+        <p:nvSpPr>
+          <p:cNvPr id="8" name="Rounded Rectangle 7"/>
+          <p:cNvSpPr/>
+          <p:nvPr/>
+        </p:nvSpPr>
+        <p:spPr>
+          <a:xfrm>
+            <a:off x="4352544" y="1280160"/>
+            <a:ext cx="3456432" cy="4572000"/>
+          </a:xfrm>
+          <a:prstGeom prst="roundRect">
+            <a:avLst>
+              <a:gd name="adj" fmla="val 8000"/>
+            </a:avLst>
+          </a:prstGeom>
+          <a:solidFill>
+            <a:srgbClr val="FFFFFF"/>
+          </a:solidFill>
+          <a:ln>
+            <a:solidFill>
+              <a:srgbClr val="D4C8B8"/>
+            </a:solidFill>
+          </a:ln>
+        </p:spPr>
+        <p:style>
+          <a:lnRef idx="1">
+            <a:schemeClr val="accent1"/>
+          </a:lnRef>
+          <a:fillRef idx="3">
+            <a:schemeClr val="accent1"/>
+          </a:fillRef>
+          <a:effectRef idx="2">
+            <a:schemeClr val="accent1"/>
+          </a:effectRef>
+          <a:fontRef idx="minor">
+            <a:schemeClr val="lt1"/>
+          </a:fontRef>
+        </p:style>
+        <p:txBody>
+          <a:bodyPr rtlCol="0" anchor="ctr"/>
+          <a:lstStyle/>
+          <a:p>
+            <a:pPr algn="ctr"/>
+          </a:p>
+        </p:txBody>
+      </p:sp>
+      <p:sp>
+        <p:nvSpPr>
+          <p:cNvPr id="9" name="TextBox 8"/>
+          <p:cNvSpPr txBox="1"/>
+          <p:nvPr/>
+        </p:nvSpPr>
+        <p:spPr>
+          <a:xfrm>
+            <a:off x="4608576" y="1508760"/>
+            <a:ext cx="2999232" cy="822960"/>
+          </a:xfrm>
+          <a:prstGeom prst="rect">
+            <a:avLst/>
+          </a:prstGeom>
+          <a:noFill/>
+        </p:spPr>
+        <p:txBody>
+          <a:bodyPr wrap="square">
+            <a:spAutoFit/>
+          </a:bodyPr>
+          <a:lstStyle/>
+          <a:p>
+            <a:pPr algn="l"/>
+            <a:r>
+              <a:rPr sz="1800" b="1">
+                <a:solidFill>
+                  <a:srgbClr val="B8741C"/>
+                </a:solidFill>
+                <a:latin typeface="Calibri"/>
+              </a:rPr>
+              <a:t>Photos</a:t>
+            </a:r>
+          </a:p>
+        </p:txBody>
+      </p:sp>
+      <p:sp>
+        <p:nvSpPr>
+          <p:cNvPr id="10" name="TextBox 9"/>
+          <p:cNvSpPr txBox="1"/>
+          <p:nvPr/>
+        </p:nvSpPr>
+        <p:spPr>
+          <a:xfrm>
+            <a:off x="4608576" y="2331720"/>
+            <a:ext cx="2999232" cy="3200400"/>
+          </a:xfrm>
+          <a:prstGeom prst="rect">
+            <a:avLst/>
+          </a:prstGeom>
+          <a:noFill/>
+        </p:spPr>
+        <p:txBody>
+          <a:bodyPr wrap="square">
+            <a:spAutoFit/>
+          </a:bodyPr>
+          <a:lstStyle/>
+          <a:p>
+            <a:pPr algn="l"/>
+            <a:r>
+              <a:rPr sz="1500" b="0">
+                <a:solidFill>
+                  <a:srgbClr val="1A1612"/>
+                </a:solidFill>
+                <a:latin typeface="Calibri"/>
+              </a:rPr>
+              <a:t>Up to 4 images, gallery or camera. Vision model answers from what is in the picture — it should not invent details.</a:t>
+            </a:r>
+          </a:p>
+        </p:txBody>
+      </p:sp>
+      <p:sp>
+        <p:nvSpPr>
+          <p:cNvPr id="11" name="Rounded Rectangle 10"/>
+          <p:cNvSpPr/>
+          <p:nvPr/>
+        </p:nvSpPr>
+        <p:spPr>
+          <a:xfrm>
+            <a:off x="8065008" y="1280160"/>
+            <a:ext cx="3456432" cy="4572000"/>
+          </a:xfrm>
+          <a:prstGeom prst="roundRect">
+            <a:avLst>
+              <a:gd name="adj" fmla="val 8000"/>
+            </a:avLst>
+          </a:prstGeom>
+          <a:solidFill>
+            <a:srgbClr val="FFFFFF"/>
+          </a:solidFill>
+          <a:ln>
+            <a:solidFill>
+              <a:srgbClr val="D4C8B8"/>
+            </a:solidFill>
+          </a:ln>
+        </p:spPr>
+        <p:style>
+          <a:lnRef idx="1">
+            <a:schemeClr val="accent1"/>
+          </a:lnRef>
+          <a:fillRef idx="3">
+            <a:schemeClr val="accent1"/>
+          </a:fillRef>
+          <a:effectRef idx="2">
+            <a:schemeClr val="accent1"/>
+          </a:effectRef>
+          <a:fontRef idx="minor">
+            <a:schemeClr val="lt1"/>
+          </a:fontRef>
+        </p:style>
+        <p:txBody>
+          <a:bodyPr rtlCol="0" anchor="ctr"/>
+          <a:lstStyle/>
+          <a:p>
+            <a:pPr algn="ctr"/>
+          </a:p>
+        </p:txBody>
+      </p:sp>
+      <p:sp>
+        <p:nvSpPr>
+          <p:cNvPr id="12" name="TextBox 11"/>
+          <p:cNvSpPr txBox="1"/>
+          <p:nvPr/>
+        </p:nvSpPr>
+        <p:spPr>
+          <a:xfrm>
+            <a:off x="8321040" y="1508760"/>
+            <a:ext cx="2999232" cy="822960"/>
+          </a:xfrm>
+          <a:prstGeom prst="rect">
+            <a:avLst/>
+          </a:prstGeom>
+          <a:noFill/>
+        </p:spPr>
+        <p:txBody>
+          <a:bodyPr wrap="square">
+            <a:spAutoFit/>
+          </a:bodyPr>
+          <a:lstStyle/>
+          <a:p>
+            <a:pPr algn="l"/>
+            <a:r>
+              <a:rPr sz="1800" b="1">
+                <a:solidFill>
+                  <a:srgbClr val="B8741C"/>
+                </a:solidFill>
+                <a:latin typeface="Calibri"/>
+              </a:rPr>
+              <a:t>Teach (Settings)</a:t>
+            </a:r>
+          </a:p>
+        </p:txBody>
+      </p:sp>
+      <p:sp>
+        <p:nvSpPr>
+          <p:cNvPr id="13" name="TextBox 12"/>
+          <p:cNvSpPr txBox="1"/>
+          <p:nvPr/>
+        </p:nvSpPr>
+        <p:spPr>
+          <a:xfrm>
+            <a:off x="8321040" y="2331720"/>
+            <a:ext cx="2999232" cy="3200400"/>
+          </a:xfrm>
+          <a:prstGeom prst="rect">
+            <a:avLst/>
+          </a:prstGeom>
+          <a:noFill/>
+        </p:spPr>
+        <p:txBody>
+          <a:bodyPr wrap="square">
+            <a:spAutoFit/>
+          </a:bodyPr>
+          <a:lstStyle/>
+          <a:p>
+            <a:pPr algn="l"/>
+            <a:r>
+              <a:rPr sz="1500" b="0">
+                <a:solidFill>
+                  <a:srgbClr val="1A1612"/>
+                </a:solidFill>
+                <a:latin typeface="Calibri"/>
+              </a:rPr>
+              <a:t>How it should behave + facts to remember + training files (max 5). Injected on every chat. This is memory, not a new neural net.</a:t>
+            </a:r>
+          </a:p>
+        </p:txBody>
+      </p:sp>
+      <p:sp>
+        <p:nvSpPr>
+          <p:cNvPr id="14" name="TextBox 13"/>
+          <p:cNvSpPr txBox="1"/>
+          <p:nvPr/>
+        </p:nvSpPr>
+        <p:spPr>
+          <a:xfrm>
             <a:off x="548640" y="6510528"/>
-            <a:ext cx="7315200" cy="274320"/>
+            <a:ext cx="8229600" cy="274320"/>
           </a:xfrm>
           <a:prstGeom prst="rect">
             <a:avLst/>
@@ -3950,18 +4758,18 @@
             <a:r>
               <a:rPr sz="1200" b="0">
                 <a:solidFill>
-                  <a:srgbClr val="6F6B63"/>
-                </a:solidFill>
-                <a:latin typeface="Calibri"/>
-              </a:rPr>
-              <a:t>Agentic AI  ·  v1.4.0</a:t>
-            </a:r>
-          </a:p>
-        </p:txBody>
-      </p:sp>
-      <p:sp>
-        <p:nvSpPr>
-          <p:cNvPr id="7" name="TextBox 6"/>
+                  <a:srgbClr val="5E574E"/>
+                </a:solidFill>
+                <a:latin typeface="Calibri"/>
+              </a:rPr>
+              <a:t>Agentic AI  ·  v1.6.0  ·  Abhishek Mishra</a:t>
+            </a:r>
+          </a:p>
+        </p:txBody>
+      </p:sp>
+      <p:sp>
+        <p:nvSpPr>
+          <p:cNvPr id="15" name="TextBox 14"/>
           <p:cNvSpPr txBox="1"/>
           <p:nvPr/>
         </p:nvSpPr>
@@ -3985,11 +4793,11 @@
             <a:r>
               <a:rPr sz="1200" b="0">
                 <a:solidFill>
-                  <a:srgbClr val="6F6B63"/>
-                </a:solidFill>
-                <a:latin typeface="Calibri"/>
-              </a:rPr>
-              <a:t>11 / 14</a:t>
+                  <a:srgbClr val="5E574E"/>
+                </a:solidFill>
+                <a:latin typeface="Calibri"/>
+              </a:rPr>
+              <a:t>11 / 22</a:t>
             </a:r>
           </a:p>
         </p:txBody>
@@ -4027,7 +4835,7 @@
             <a:avLst/>
           </a:prstGeom>
           <a:solidFill>
-            <a:srgbClr val="F7F4EF"/>
+            <a:srgbClr val="F1F1F1"/>
           </a:solidFill>
           <a:ln>
             <a:noFill/>
@@ -4070,7 +4878,7 @@
             <a:avLst/>
           </a:prstGeom>
           <a:solidFill>
-            <a:srgbClr val="D97757"/>
+            <a:srgbClr val="DB8F2A"/>
           </a:solidFill>
           <a:ln>
             <a:noFill/>
@@ -4124,115 +4932,59 @@
             <a:r>
               <a:rPr sz="3200" b="1">
                 <a:solidFill>
-                  <a:srgbClr val="14120B"/>
+                  <a:srgbClr val="1A1612"/>
                 </a:solidFill>
                 <a:latin typeface="Georgia"/>
               </a:rPr>
-              <a:t>Tech stack</a:t>
-            </a:r>
-          </a:p>
-        </p:txBody>
-      </p:sp>
-      <p:sp>
-        <p:nvSpPr>
-          <p:cNvPr id="5" name="TextBox 4"/>
-          <p:cNvSpPr txBox="1"/>
-          <p:nvPr/>
-        </p:nvSpPr>
-        <p:spPr>
-          <a:xfrm>
-            <a:off x="731520" y="1280160"/>
-            <a:ext cx="10515600" cy="4846320"/>
-          </a:xfrm>
-          <a:prstGeom prst="rect">
-            <a:avLst/>
-          </a:prstGeom>
-          <a:noFill/>
-        </p:spPr>
-        <p:txBody>
-          <a:bodyPr wrap="square">
-            <a:spAutoFit/>
-          </a:bodyPr>
-          <a:lstStyle/>
-          <a:p>
-            <a:pPr>
-              <a:spcAft>
-                <a:spcPts val="600"/>
-              </a:spcAft>
-            </a:pPr>
-            <a:r>
-              <a:rPr sz="2200" b="0">
-                <a:solidFill>
-                  <a:srgbClr val="14120B"/>
-                </a:solidFill>
-                <a:latin typeface="Calibri"/>
-              </a:rPr>
-              <a:t>•  LLM: Groq, default model openai/gpt-oss-120b (OpenAI-compatible API).</a:t>
-            </a:r>
-          </a:p>
-          <a:p>
-            <a:pPr>
-              <a:spcAft>
-                <a:spcPts val="600"/>
-              </a:spcAft>
-            </a:pPr>
-            <a:r>
-              <a:rPr sz="2200" b="0">
-                <a:solidFill>
-                  <a:srgbClr val="14120B"/>
-                </a:solidFill>
-                <a:latin typeface="Calibri"/>
-              </a:rPr>
-              <a:t>•  Python 3.12  ·  FastAPI  ·  Uvicorn  ·  httpx  ·  itsdangerous</a:t>
-            </a:r>
-          </a:p>
-          <a:p>
-            <a:pPr>
-              <a:spcAft>
-                <a:spcPts val="600"/>
-              </a:spcAft>
-            </a:pPr>
-            <a:r>
-              <a:rPr sz="2200" b="0">
-                <a:solidFill>
-                  <a:srgbClr val="14120B"/>
-                </a:solidFill>
-                <a:latin typeface="Calibri"/>
-              </a:rPr>
-              <a:t>•  Next.js 15  ·  React 19  ·  TypeScript  ·  marked for chat markdown</a:t>
-            </a:r>
-          </a:p>
-          <a:p>
-            <a:pPr>
-              <a:spcAft>
-                <a:spcPts val="600"/>
-              </a:spcAft>
-            </a:pPr>
-            <a:r>
-              <a:rPr sz="2200" b="0">
-                <a:solidFill>
-                  <a:srgbClr val="14120B"/>
-                </a:solidFill>
-                <a:latin typeface="Calibri"/>
-              </a:rPr>
-              <a:t>•  Web search via DuckDuckGo (ddgs). Weather via wttr.in.</a:t>
-            </a:r>
-          </a:p>
-          <a:p>
-            <a:pPr>
-              <a:spcAft>
-                <a:spcPts val="600"/>
-              </a:spcAft>
-            </a:pPr>
-            <a:r>
-              <a:rPr sz="2200" b="0">
-                <a:solidFill>
-                  <a:srgbClr val="14120B"/>
-                </a:solidFill>
-                <a:latin typeface="Calibri"/>
-              </a:rPr>
-              <a:t>•  Frontend proxies /api to the Python backend so cookies and chat streaming work.</a:t>
-            </a:r>
+              <a:t>Projects, Notes, Artifacts</a:t>
+            </a:r>
+          </a:p>
+        </p:txBody>
+      </p:sp>
+      <p:sp>
+        <p:nvSpPr>
+          <p:cNvPr id="5" name="Rounded Rectangle 4"/>
+          <p:cNvSpPr/>
+          <p:nvPr/>
+        </p:nvSpPr>
+        <p:spPr>
+          <a:xfrm>
+            <a:off x="640080" y="1280160"/>
+            <a:ext cx="3456432" cy="4572000"/>
+          </a:xfrm>
+          <a:prstGeom prst="roundRect">
+            <a:avLst>
+              <a:gd name="adj" fmla="val 8000"/>
+            </a:avLst>
+          </a:prstGeom>
+          <a:solidFill>
+            <a:srgbClr val="FFFFFF"/>
+          </a:solidFill>
+          <a:ln>
+            <a:solidFill>
+              <a:srgbClr val="D4C8B8"/>
+            </a:solidFill>
+          </a:ln>
+        </p:spPr>
+        <p:style>
+          <a:lnRef idx="1">
+            <a:schemeClr val="accent1"/>
+          </a:lnRef>
+          <a:fillRef idx="3">
+            <a:schemeClr val="accent1"/>
+          </a:fillRef>
+          <a:effectRef idx="2">
+            <a:schemeClr val="accent1"/>
+          </a:effectRef>
+          <a:fontRef idx="minor">
+            <a:schemeClr val="lt1"/>
+          </a:fontRef>
+        </p:style>
+        <p:txBody>
+          <a:bodyPr rtlCol="0" anchor="ctr"/>
+          <a:lstStyle/>
+          <a:p>
+            <a:pPr algn="ctr"/>
           </a:p>
         </p:txBody>
       </p:sp>
@@ -4244,8 +4996,312 @@
         </p:nvSpPr>
         <p:spPr>
           <a:xfrm>
+            <a:off x="896112" y="1508760"/>
+            <a:ext cx="2999232" cy="822960"/>
+          </a:xfrm>
+          <a:prstGeom prst="rect">
+            <a:avLst/>
+          </a:prstGeom>
+          <a:noFill/>
+        </p:spPr>
+        <p:txBody>
+          <a:bodyPr wrap="square">
+            <a:spAutoFit/>
+          </a:bodyPr>
+          <a:lstStyle/>
+          <a:p>
+            <a:pPr algn="l"/>
+            <a:r>
+              <a:rPr sz="1800" b="1">
+                <a:solidFill>
+                  <a:srgbClr val="B8741C"/>
+                </a:solidFill>
+                <a:latin typeface="Calibri"/>
+              </a:rPr>
+              <a:t>Projects</a:t>
+            </a:r>
+          </a:p>
+        </p:txBody>
+      </p:sp>
+      <p:sp>
+        <p:nvSpPr>
+          <p:cNvPr id="7" name="TextBox 6"/>
+          <p:cNvSpPr txBox="1"/>
+          <p:nvPr/>
+        </p:nvSpPr>
+        <p:spPr>
+          <a:xfrm>
+            <a:off x="896112" y="2331720"/>
+            <a:ext cx="2999232" cy="3200400"/>
+          </a:xfrm>
+          <a:prstGeom prst="rect">
+            <a:avLst/>
+          </a:prstGeom>
+          <a:noFill/>
+        </p:spPr>
+        <p:txBody>
+          <a:bodyPr wrap="square">
+            <a:spAutoFit/>
+          </a:bodyPr>
+          <a:lstStyle/>
+          <a:p>
+            <a:pPr algn="l"/>
+            <a:r>
+              <a:rPr sz="1500" b="0">
+                <a:solidFill>
+                  <a:srgbClr val="1A1612"/>
+                </a:solidFill>
+                <a:latin typeface="Calibri"/>
+              </a:rPr>
+              <a:t>Like a folder: name, standing instructions, up to 8 files. Recents filter to that project. Context is sent with every message.</a:t>
+            </a:r>
+          </a:p>
+        </p:txBody>
+      </p:sp>
+      <p:sp>
+        <p:nvSpPr>
+          <p:cNvPr id="8" name="Rounded Rectangle 7"/>
+          <p:cNvSpPr/>
+          <p:nvPr/>
+        </p:nvSpPr>
+        <p:spPr>
+          <a:xfrm>
+            <a:off x="4352544" y="1280160"/>
+            <a:ext cx="3456432" cy="4572000"/>
+          </a:xfrm>
+          <a:prstGeom prst="roundRect">
+            <a:avLst>
+              <a:gd name="adj" fmla="val 8000"/>
+            </a:avLst>
+          </a:prstGeom>
+          <a:solidFill>
+            <a:srgbClr val="FFFFFF"/>
+          </a:solidFill>
+          <a:ln>
+            <a:solidFill>
+              <a:srgbClr val="D4C8B8"/>
+            </a:solidFill>
+          </a:ln>
+        </p:spPr>
+        <p:style>
+          <a:lnRef idx="1">
+            <a:schemeClr val="accent1"/>
+          </a:lnRef>
+          <a:fillRef idx="3">
+            <a:schemeClr val="accent1"/>
+          </a:fillRef>
+          <a:effectRef idx="2">
+            <a:schemeClr val="accent1"/>
+          </a:effectRef>
+          <a:fontRef idx="minor">
+            <a:schemeClr val="lt1"/>
+          </a:fontRef>
+        </p:style>
+        <p:txBody>
+          <a:bodyPr rtlCol="0" anchor="ctr"/>
+          <a:lstStyle/>
+          <a:p>
+            <a:pPr algn="ctr"/>
+          </a:p>
+        </p:txBody>
+      </p:sp>
+      <p:sp>
+        <p:nvSpPr>
+          <p:cNvPr id="9" name="TextBox 8"/>
+          <p:cNvSpPr txBox="1"/>
+          <p:nvPr/>
+        </p:nvSpPr>
+        <p:spPr>
+          <a:xfrm>
+            <a:off x="4608576" y="1508760"/>
+            <a:ext cx="2999232" cy="822960"/>
+          </a:xfrm>
+          <a:prstGeom prst="rect">
+            <a:avLst/>
+          </a:prstGeom>
+          <a:noFill/>
+        </p:spPr>
+        <p:txBody>
+          <a:bodyPr wrap="square">
+            <a:spAutoFit/>
+          </a:bodyPr>
+          <a:lstStyle/>
+          <a:p>
+            <a:pPr algn="l"/>
+            <a:r>
+              <a:rPr sz="1800" b="1">
+                <a:solidFill>
+                  <a:srgbClr val="B8741C"/>
+                </a:solidFill>
+                <a:latin typeface="Calibri"/>
+              </a:rPr>
+              <a:t>Notes</a:t>
+            </a:r>
+          </a:p>
+        </p:txBody>
+      </p:sp>
+      <p:sp>
+        <p:nvSpPr>
+          <p:cNvPr id="10" name="TextBox 9"/>
+          <p:cNvSpPr txBox="1"/>
+          <p:nvPr/>
+        </p:nvSpPr>
+        <p:spPr>
+          <a:xfrm>
+            <a:off x="4608576" y="2331720"/>
+            <a:ext cx="2999232" cy="3200400"/>
+          </a:xfrm>
+          <a:prstGeom prst="rect">
+            <a:avLst/>
+          </a:prstGeom>
+          <a:noFill/>
+        </p:spPr>
+        <p:txBody>
+          <a:bodyPr wrap="square">
+            <a:spAutoFit/>
+          </a:bodyPr>
+          <a:lstStyle/>
+          <a:p>
+            <a:pPr algn="l"/>
+            <a:r>
+              <a:rPr sz="1500" b="0">
+                <a:solidFill>
+                  <a:srgbClr val="1A1612"/>
+                </a:solidFill>
+                <a:latin typeface="Calibri"/>
+              </a:rPr>
+              <a:t>Ask it to save a markdown note. Open Notes from the profile menu to read, download, or delete workspace_notes/*.md.</a:t>
+            </a:r>
+          </a:p>
+        </p:txBody>
+      </p:sp>
+      <p:sp>
+        <p:nvSpPr>
+          <p:cNvPr id="11" name="Rounded Rectangle 10"/>
+          <p:cNvSpPr/>
+          <p:nvPr/>
+        </p:nvSpPr>
+        <p:spPr>
+          <a:xfrm>
+            <a:off x="8065008" y="1280160"/>
+            <a:ext cx="3456432" cy="4572000"/>
+          </a:xfrm>
+          <a:prstGeom prst="roundRect">
+            <a:avLst>
+              <a:gd name="adj" fmla="val 8000"/>
+            </a:avLst>
+          </a:prstGeom>
+          <a:solidFill>
+            <a:srgbClr val="FFFFFF"/>
+          </a:solidFill>
+          <a:ln>
+            <a:solidFill>
+              <a:srgbClr val="D4C8B8"/>
+            </a:solidFill>
+          </a:ln>
+        </p:spPr>
+        <p:style>
+          <a:lnRef idx="1">
+            <a:schemeClr val="accent1"/>
+          </a:lnRef>
+          <a:fillRef idx="3">
+            <a:schemeClr val="accent1"/>
+          </a:fillRef>
+          <a:effectRef idx="2">
+            <a:schemeClr val="accent1"/>
+          </a:effectRef>
+          <a:fontRef idx="minor">
+            <a:schemeClr val="lt1"/>
+          </a:fontRef>
+        </p:style>
+        <p:txBody>
+          <a:bodyPr rtlCol="0" anchor="ctr"/>
+          <a:lstStyle/>
+          <a:p>
+            <a:pPr algn="ctr"/>
+          </a:p>
+        </p:txBody>
+      </p:sp>
+      <p:sp>
+        <p:nvSpPr>
+          <p:cNvPr id="12" name="TextBox 11"/>
+          <p:cNvSpPr txBox="1"/>
+          <p:nvPr/>
+        </p:nvSpPr>
+        <p:spPr>
+          <a:xfrm>
+            <a:off x="8321040" y="1508760"/>
+            <a:ext cx="2999232" cy="822960"/>
+          </a:xfrm>
+          <a:prstGeom prst="rect">
+            <a:avLst/>
+          </a:prstGeom>
+          <a:noFill/>
+        </p:spPr>
+        <p:txBody>
+          <a:bodyPr wrap="square">
+            <a:spAutoFit/>
+          </a:bodyPr>
+          <a:lstStyle/>
+          <a:p>
+            <a:pPr algn="l"/>
+            <a:r>
+              <a:rPr sz="1800" b="1">
+                <a:solidFill>
+                  <a:srgbClr val="B8741C"/>
+                </a:solidFill>
+                <a:latin typeface="Calibri"/>
+              </a:rPr>
+              <a:t>Artifacts</a:t>
+            </a:r>
+          </a:p>
+        </p:txBody>
+      </p:sp>
+      <p:sp>
+        <p:nvSpPr>
+          <p:cNvPr id="13" name="TextBox 12"/>
+          <p:cNvSpPr txBox="1"/>
+          <p:nvPr/>
+        </p:nvSpPr>
+        <p:spPr>
+          <a:xfrm>
+            <a:off x="8321040" y="2331720"/>
+            <a:ext cx="2999232" cy="3200400"/>
+          </a:xfrm>
+          <a:prstGeom prst="rect">
+            <a:avLst/>
+          </a:prstGeom>
+          <a:noFill/>
+        </p:spPr>
+        <p:txBody>
+          <a:bodyPr wrap="square">
+            <a:spAutoFit/>
+          </a:bodyPr>
+          <a:lstStyle/>
+          <a:p>
+            <a:pPr algn="l"/>
+            <a:r>
+              <a:rPr sz="1500" b="0">
+                <a:solidFill>
+                  <a:srgbClr val="1A1612"/>
+                </a:solidFill>
+                <a:latin typeface="Calibri"/>
+              </a:rPr>
+              <a:t>Ask for a webpage, poster, or SVG. The agent emits an artifact tag. A pane on the right previews the file.</a:t>
+            </a:r>
+          </a:p>
+        </p:txBody>
+      </p:sp>
+      <p:sp>
+        <p:nvSpPr>
+          <p:cNvPr id="14" name="TextBox 13"/>
+          <p:cNvSpPr txBox="1"/>
+          <p:nvPr/>
+        </p:nvSpPr>
+        <p:spPr>
+          <a:xfrm>
             <a:off x="548640" y="6510528"/>
-            <a:ext cx="7315200" cy="274320"/>
+            <a:ext cx="8229600" cy="274320"/>
           </a:xfrm>
           <a:prstGeom prst="rect">
             <a:avLst/>
@@ -4262,18 +5318,18 @@
             <a:r>
               <a:rPr sz="1200" b="0">
                 <a:solidFill>
-                  <a:srgbClr val="6F6B63"/>
-                </a:solidFill>
-                <a:latin typeface="Calibri"/>
-              </a:rPr>
-              <a:t>Agentic AI  ·  v1.4.0</a:t>
-            </a:r>
-          </a:p>
-        </p:txBody>
-      </p:sp>
-      <p:sp>
-        <p:nvSpPr>
-          <p:cNvPr id="7" name="TextBox 6"/>
+                  <a:srgbClr val="5E574E"/>
+                </a:solidFill>
+                <a:latin typeface="Calibri"/>
+              </a:rPr>
+              <a:t>Agentic AI  ·  v1.6.0  ·  Abhishek Mishra</a:t>
+            </a:r>
+          </a:p>
+        </p:txBody>
+      </p:sp>
+      <p:sp>
+        <p:nvSpPr>
+          <p:cNvPr id="15" name="TextBox 14"/>
           <p:cNvSpPr txBox="1"/>
           <p:nvPr/>
         </p:nvSpPr>
@@ -4297,11 +5353,11 @@
             <a:r>
               <a:rPr sz="1200" b="0">
                 <a:solidFill>
-                  <a:srgbClr val="6F6B63"/>
-                </a:solidFill>
-                <a:latin typeface="Calibri"/>
-              </a:rPr>
-              <a:t>12 / 14</a:t>
+                  <a:srgbClr val="5E574E"/>
+                </a:solidFill>
+                <a:latin typeface="Calibri"/>
+              </a:rPr>
+              <a:t>12 / 22</a:t>
             </a:r>
           </a:p>
         </p:txBody>
@@ -4339,7 +5395,7 @@
             <a:avLst/>
           </a:prstGeom>
           <a:solidFill>
-            <a:srgbClr val="F7F4EF"/>
+            <a:srgbClr val="F1F1F1"/>
           </a:solidFill>
           <a:ln>
             <a:noFill/>
@@ -4382,7 +5438,7 @@
             <a:avLst/>
           </a:prstGeom>
           <a:solidFill>
-            <a:srgbClr val="D97757"/>
+            <a:srgbClr val="DB8F2A"/>
           </a:solidFill>
           <a:ln>
             <a:noFill/>
@@ -4436,11 +5492,11 @@
             <a:r>
               <a:rPr sz="3200" b="1">
                 <a:solidFill>
-                  <a:srgbClr val="14120B"/>
+                  <a:srgbClr val="1A1612"/>
                 </a:solidFill>
                 <a:latin typeface="Georgia"/>
               </a:rPr>
-              <a:t>How to run</a:t>
+              <a:t>Code sandbox</a:t>
             </a:r>
           </a:p>
         </p:txBody>
@@ -4453,8 +5509,8 @@
         </p:nvSpPr>
         <p:spPr>
           <a:xfrm>
-            <a:off x="731520" y="1280160"/>
-            <a:ext cx="10515600" cy="4846320"/>
+            <a:off x="731520" y="1234440"/>
+            <a:ext cx="10607040" cy="5029200"/>
           </a:xfrm>
           <a:prstGeom prst="rect">
             <a:avLst/>
@@ -4469,97 +5525,81 @@
           <a:p>
             <a:pPr>
               <a:spcAft>
-                <a:spcPts val="600"/>
+                <a:spcPts val="800"/>
               </a:spcAft>
             </a:pPr>
             <a:r>
-              <a:rPr sz="2200" b="0">
-                <a:solidFill>
-                  <a:srgbClr val="14120B"/>
-                </a:solidFill>
-                <a:latin typeface="Calibri"/>
-              </a:rPr>
-              <a:t>•  Terminal 1:  .\.venv\Scripts\python.exe app.py     → API on port 7860</a:t>
+              <a:rPr sz="2000" b="0">
+                <a:solidFill>
+                  <a:srgbClr val="1A1612"/>
+                </a:solidFill>
+                <a:latin typeface="Calibri"/>
+              </a:rPr>
+              <a:t>•  Tool: code_run — core utility, always installed.</a:t>
             </a:r>
           </a:p>
           <a:p>
             <a:pPr>
               <a:spcAft>
-                <a:spcPts val="600"/>
+                <a:spcPts val="800"/>
               </a:spcAft>
             </a:pPr>
             <a:r>
-              <a:rPr sz="2200" b="0">
-                <a:solidFill>
-                  <a:srgbClr val="14120B"/>
-                </a:solidFill>
-                <a:latin typeface="Calibri"/>
-              </a:rPr>
-              <a:t>•  Terminal 2:  cd frontend   then   npm run dev      → UI on port 3000</a:t>
+              <a:rPr sz="2000" b="0">
+                <a:solidFill>
+                  <a:srgbClr val="1A1612"/>
+                </a:solidFill>
+                <a:latin typeface="Calibri"/>
+              </a:rPr>
+              <a:t>•  Runs short Python in a child process (isolated interpreter, 6 second timeout).</a:t>
             </a:r>
           </a:p>
           <a:p>
             <a:pPr>
               <a:spcAft>
-                <a:spcPts val="600"/>
+                <a:spcPts val="800"/>
               </a:spcAft>
             </a:pPr>
             <a:r>
-              <a:rPr sz="2200" b="0">
-                <a:solidFill>
-                  <a:srgbClr val="14120B"/>
-                </a:solidFill>
-                <a:latin typeface="Calibri"/>
-              </a:rPr>
-              <a:t>•  Open http://127.0.0.1:3000  (use 127.0.0.1, not localhost, for Google login)</a:t>
+              <a:rPr sz="2000" b="0">
+                <a:solidFill>
+                  <a:srgbClr val="1A1612"/>
+                </a:solidFill>
+                <a:latin typeface="Calibri"/>
+              </a:rPr>
+              <a:t>•  Allowed: math, json, re, datetime, statistics, random, and similar stdlib. print() is required for output.</a:t>
             </a:r>
           </a:p>
           <a:p>
             <a:pPr>
               <a:spcAft>
-                <a:spcPts val="600"/>
+                <a:spcPts val="800"/>
               </a:spcAft>
             </a:pPr>
             <a:r>
-              <a:rPr sz="2200" b="0">
-                <a:solidFill>
-                  <a:srgbClr val="14120B"/>
-                </a:solidFill>
-                <a:latin typeface="Calibri"/>
-              </a:rPr>
-              <a:t>•  Sign in, paste a Groq key if asked, then chat.</a:t>
+              <a:rPr sz="2000" b="0">
+                <a:solidFill>
+                  <a:srgbClr val="1A1612"/>
+                </a:solidFill>
+                <a:latin typeface="Calibri"/>
+              </a:rPr>
+              <a:t>•  Blocked: os, subprocess, open(), eval/exec, network, installs, arbitrary files.</a:t>
             </a:r>
           </a:p>
           <a:p>
             <a:pPr>
               <a:spcAft>
-                <a:spcPts val="600"/>
+                <a:spcPts val="800"/>
               </a:spcAft>
             </a:pPr>
             <a:r>
-              <a:rPr sz="2200" b="0">
-                <a:solidFill>
-                  <a:srgbClr val="14120B"/>
-                </a:solidFill>
-                <a:latin typeface="Calibri"/>
-              </a:rPr>
-              <a:t>•  Demo: “hello”, Delhi weather, gold price, then edit the city and Save &amp; retry.</a:t>
-            </a:r>
-          </a:p>
-          <a:p>
-            <a:pPr>
-              <a:spcAft>
-                <a:spcPts val="600"/>
-              </a:spcAft>
-            </a:pPr>
-            <a:r>
-              <a:rPr sz="2200" b="0">
-                <a:solidFill>
-                  <a:srgbClr val="14120B"/>
-                </a:solidFill>
-                <a:latin typeface="Calibri"/>
-              </a:rPr>
-              <a:t>•  Also demo: tap the mic to speak, tap the speaker to hear the answer.</a:t>
+              <a:rPr sz="2000" b="0">
+                <a:solidFill>
+                  <a:srgbClr val="1A1612"/>
+                </a:solidFill>
+                <a:latin typeface="Calibri"/>
+              </a:rPr>
+              <a:t>•  Use it for exact numbers, small scripts, and checks — not as a full IDE or Claude Code clone.</a:t>
             </a:r>
           </a:p>
         </p:txBody>
@@ -4573,7 +5613,7 @@
         <p:spPr>
           <a:xfrm>
             <a:off x="548640" y="6510528"/>
-            <a:ext cx="7315200" cy="274320"/>
+            <a:ext cx="8229600" cy="274320"/>
           </a:xfrm>
           <a:prstGeom prst="rect">
             <a:avLst/>
@@ -4590,11 +5630,11 @@
             <a:r>
               <a:rPr sz="1200" b="0">
                 <a:solidFill>
-                  <a:srgbClr val="6F6B63"/>
-                </a:solidFill>
-                <a:latin typeface="Calibri"/>
-              </a:rPr>
-              <a:t>Agentic AI  ·  v1.4.0</a:t>
+                  <a:srgbClr val="5E574E"/>
+                </a:solidFill>
+                <a:latin typeface="Calibri"/>
+              </a:rPr>
+              <a:t>Agentic AI  ·  v1.6.0  ·  Abhishek Mishra</a:t>
             </a:r>
           </a:p>
         </p:txBody>
@@ -4625,11 +5665,11 @@
             <a:r>
               <a:rPr sz="1200" b="0">
                 <a:solidFill>
-                  <a:srgbClr val="6F6B63"/>
-                </a:solidFill>
-                <a:latin typeface="Calibri"/>
-              </a:rPr>
-              <a:t>13 / 14</a:t>
+                  <a:srgbClr val="5E574E"/>
+                </a:solidFill>
+                <a:latin typeface="Calibri"/>
+              </a:rPr>
+              <a:t>13 / 22</a:t>
             </a:r>
           </a:p>
         </p:txBody>
@@ -4667,7 +5707,7 @@
             <a:avLst/>
           </a:prstGeom>
           <a:solidFill>
-            <a:srgbClr val="F7F4EF"/>
+            <a:srgbClr val="F1F1F1"/>
           </a:solidFill>
           <a:ln>
             <a:noFill/>
@@ -4704,13 +5744,13 @@
         <p:spPr>
           <a:xfrm>
             <a:off x="0" y="0"/>
-            <a:ext cx="256032" cy="6858000"/>
+            <a:ext cx="12191695" cy="109728"/>
           </a:xfrm>
           <a:prstGeom prst="rect">
             <a:avLst/>
           </a:prstGeom>
           <a:solidFill>
-            <a:srgbClr val="D97757"/>
+            <a:srgbClr val="DB8F2A"/>
           </a:solidFill>
           <a:ln>
             <a:noFill/>
@@ -4740,23 +5780,62 @@
       </p:sp>
       <p:sp>
         <p:nvSpPr>
-          <p:cNvPr id="4" name="4-Point Star 3"/>
+          <p:cNvPr id="4" name="TextBox 3"/>
+          <p:cNvSpPr txBox="1"/>
+          <p:nvPr/>
+        </p:nvSpPr>
+        <p:spPr>
+          <a:xfrm>
+            <a:off x="640080" y="320040"/>
+            <a:ext cx="10972800" cy="548640"/>
+          </a:xfrm>
+          <a:prstGeom prst="rect">
+            <a:avLst/>
+          </a:prstGeom>
+          <a:noFill/>
+        </p:spPr>
+        <p:txBody>
+          <a:bodyPr wrap="square">
+            <a:spAutoFit/>
+          </a:bodyPr>
+          <a:lstStyle/>
+          <a:p>
+            <a:pPr algn="l"/>
+            <a:r>
+              <a:rPr sz="3200" b="1">
+                <a:solidFill>
+                  <a:srgbClr val="1A1612"/>
+                </a:solidFill>
+                <a:latin typeface="Georgia"/>
+              </a:rPr>
+              <a:t>Tools</a:t>
+            </a:r>
+          </a:p>
+        </p:txBody>
+      </p:sp>
+      <p:sp>
+        <p:nvSpPr>
+          <p:cNvPr id="5" name="Rounded Rectangle 4"/>
           <p:cNvSpPr/>
           <p:nvPr/>
         </p:nvSpPr>
         <p:spPr>
           <a:xfrm>
-            <a:off x="777240" y="1965960"/>
-            <a:ext cx="566928" cy="566928"/>
-          </a:xfrm>
-          <a:prstGeom prst="star4">
-            <a:avLst/>
+            <a:off x="640080" y="1143000"/>
+            <a:ext cx="10881360" cy="1371600"/>
+          </a:xfrm>
+          <a:prstGeom prst="roundRect">
+            <a:avLst>
+              <a:gd name="adj" fmla="val 8000"/>
+            </a:avLst>
           </a:prstGeom>
           <a:solidFill>
-            <a:srgbClr val="D97757"/>
+            <a:srgbClr val="FFFFFF"/>
           </a:solidFill>
           <a:ln>
-            <a:noFill/>
+            <a:solidFill>
+              <a:srgbClr val="D4C8B8"/>
+            </a:solidFill>
           </a:ln>
         </p:spPr>
         <p:style>
@@ -4783,14 +5862,630 @@
       </p:sp>
       <p:sp>
         <p:nvSpPr>
+          <p:cNvPr id="6" name="TextBox 5"/>
+          <p:cNvSpPr txBox="1"/>
+          <p:nvPr/>
+        </p:nvSpPr>
+        <p:spPr>
+          <a:xfrm>
+            <a:off x="914400" y="1344168"/>
+            <a:ext cx="10332720" cy="411480"/>
+          </a:xfrm>
+          <a:prstGeom prst="rect">
+            <a:avLst/>
+          </a:prstGeom>
+          <a:noFill/>
+        </p:spPr>
+        <p:txBody>
+          <a:bodyPr wrap="square">
+            <a:spAutoFit/>
+          </a:bodyPr>
+          <a:lstStyle/>
+          <a:p>
+            <a:pPr algn="l"/>
+            <a:r>
+              <a:rPr sz="2000" b="1">
+                <a:solidFill>
+                  <a:srgbClr val="B8741C"/>
+                </a:solidFill>
+                <a:latin typeface="Calibri"/>
+              </a:rPr>
+              <a:t>Core (ready by default)</a:t>
+            </a:r>
+          </a:p>
+        </p:txBody>
+      </p:sp>
+      <p:sp>
+        <p:nvSpPr>
+          <p:cNvPr id="7" name="TextBox 6"/>
+          <p:cNvSpPr txBox="1"/>
+          <p:nvPr/>
+        </p:nvSpPr>
+        <p:spPr>
+          <a:xfrm>
+            <a:off x="914400" y="1783080"/>
+            <a:ext cx="10332720" cy="548640"/>
+          </a:xfrm>
+          <a:prstGeom prst="rect">
+            <a:avLst/>
+          </a:prstGeom>
+          <a:noFill/>
+        </p:spPr>
+        <p:txBody>
+          <a:bodyPr wrap="square">
+            <a:spAutoFit/>
+          </a:bodyPr>
+          <a:lstStyle/>
+          <a:p>
+            <a:pPr algn="l"/>
+            <a:r>
+              <a:rPr sz="1800" b="0">
+                <a:solidFill>
+                  <a:srgbClr val="1A1612"/>
+                </a:solidFill>
+                <a:latin typeface="Calibri"/>
+              </a:rPr>
+              <a:t>Web Search  ·  Wikipedia  ·  Weather  ·  Calculator  ·  Clock  ·  Notes  ·  Code sandbox</a:t>
+            </a:r>
+          </a:p>
+        </p:txBody>
+      </p:sp>
+      <p:sp>
+        <p:nvSpPr>
+          <p:cNvPr id="8" name="Rounded Rectangle 7"/>
+          <p:cNvSpPr/>
+          <p:nvPr/>
+        </p:nvSpPr>
+        <p:spPr>
+          <a:xfrm>
+            <a:off x="640080" y="2697480"/>
+            <a:ext cx="10881360" cy="1371600"/>
+          </a:xfrm>
+          <a:prstGeom prst="roundRect">
+            <a:avLst>
+              <a:gd name="adj" fmla="val 8000"/>
+            </a:avLst>
+          </a:prstGeom>
+          <a:solidFill>
+            <a:srgbClr val="FFFFFF"/>
+          </a:solidFill>
+          <a:ln>
+            <a:solidFill>
+              <a:srgbClr val="D4C8B8"/>
+            </a:solidFill>
+          </a:ln>
+        </p:spPr>
+        <p:style>
+          <a:lnRef idx="1">
+            <a:schemeClr val="accent1"/>
+          </a:lnRef>
+          <a:fillRef idx="3">
+            <a:schemeClr val="accent1"/>
+          </a:fillRef>
+          <a:effectRef idx="2">
+            <a:schemeClr val="accent1"/>
+          </a:effectRef>
+          <a:fontRef idx="minor">
+            <a:schemeClr val="lt1"/>
+          </a:fontRef>
+        </p:style>
+        <p:txBody>
+          <a:bodyPr rtlCol="0" anchor="ctr"/>
+          <a:lstStyle/>
+          <a:p>
+            <a:pPr algn="ctr"/>
+          </a:p>
+        </p:txBody>
+      </p:sp>
+      <p:sp>
+        <p:nvSpPr>
+          <p:cNvPr id="9" name="TextBox 8"/>
+          <p:cNvSpPr txBox="1"/>
+          <p:nvPr/>
+        </p:nvSpPr>
+        <p:spPr>
+          <a:xfrm>
+            <a:off x="914400" y="2898648"/>
+            <a:ext cx="10332720" cy="411480"/>
+          </a:xfrm>
+          <a:prstGeom prst="rect">
+            <a:avLst/>
+          </a:prstGeom>
+          <a:noFill/>
+        </p:spPr>
+        <p:txBody>
+          <a:bodyPr wrap="square">
+            <a:spAutoFit/>
+          </a:bodyPr>
+          <a:lstStyle/>
+          <a:p>
+            <a:pPr algn="l"/>
+            <a:r>
+              <a:rPr sz="2000" b="1">
+                <a:solidFill>
+                  <a:srgbClr val="B8741C"/>
+                </a:solidFill>
+                <a:latin typeface="Calibri"/>
+              </a:rPr>
+              <a:t>Install when you need them</a:t>
+            </a:r>
+          </a:p>
+        </p:txBody>
+      </p:sp>
+      <p:sp>
+        <p:nvSpPr>
+          <p:cNvPr id="10" name="TextBox 9"/>
+          <p:cNvSpPr txBox="1"/>
+          <p:nvPr/>
+        </p:nvSpPr>
+        <p:spPr>
+          <a:xfrm>
+            <a:off x="914400" y="3337560"/>
+            <a:ext cx="10332720" cy="548640"/>
+          </a:xfrm>
+          <a:prstGeom prst="rect">
+            <a:avLst/>
+          </a:prstGeom>
+          <a:noFill/>
+        </p:spPr>
+        <p:txBody>
+          <a:bodyPr wrap="square">
+            <a:spAutoFit/>
+          </a:bodyPr>
+          <a:lstStyle/>
+          <a:p>
+            <a:pPr algn="l"/>
+            <a:r>
+              <a:rPr sz="1800" b="0">
+                <a:solidFill>
+                  <a:srgbClr val="1A1612"/>
+                </a:solidFill>
+                <a:latin typeface="Calibri"/>
+              </a:rPr>
+              <a:t>GitHub lookup  ·  Dice  ·  Unit Convert  ·  Text Stats  ·  UUID  ·  Random Pick</a:t>
+            </a:r>
+          </a:p>
+        </p:txBody>
+      </p:sp>
+      <p:sp>
+        <p:nvSpPr>
+          <p:cNvPr id="11" name="Rounded Rectangle 10"/>
+          <p:cNvSpPr/>
+          <p:nvPr/>
+        </p:nvSpPr>
+        <p:spPr>
+          <a:xfrm>
+            <a:off x="640080" y="4251960"/>
+            <a:ext cx="10881360" cy="1371600"/>
+          </a:xfrm>
+          <a:prstGeom prst="roundRect">
+            <a:avLst>
+              <a:gd name="adj" fmla="val 8000"/>
+            </a:avLst>
+          </a:prstGeom>
+          <a:solidFill>
+            <a:srgbClr val="FFFFFF"/>
+          </a:solidFill>
+          <a:ln>
+            <a:solidFill>
+              <a:srgbClr val="D4C8B8"/>
+            </a:solidFill>
+          </a:ln>
+        </p:spPr>
+        <p:style>
+          <a:lnRef idx="1">
+            <a:schemeClr val="accent1"/>
+          </a:lnRef>
+          <a:fillRef idx="3">
+            <a:schemeClr val="accent1"/>
+          </a:fillRef>
+          <a:effectRef idx="2">
+            <a:schemeClr val="accent1"/>
+          </a:effectRef>
+          <a:fontRef idx="minor">
+            <a:schemeClr val="lt1"/>
+          </a:fontRef>
+        </p:style>
+        <p:txBody>
+          <a:bodyPr rtlCol="0" anchor="ctr"/>
+          <a:lstStyle/>
+          <a:p>
+            <a:pPr algn="ctr"/>
+          </a:p>
+        </p:txBody>
+      </p:sp>
+      <p:sp>
+        <p:nvSpPr>
+          <p:cNvPr id="12" name="TextBox 11"/>
+          <p:cNvSpPr txBox="1"/>
+          <p:nvPr/>
+        </p:nvSpPr>
+        <p:spPr>
+          <a:xfrm>
+            <a:off x="914400" y="4453128"/>
+            <a:ext cx="10332720" cy="411480"/>
+          </a:xfrm>
+          <a:prstGeom prst="rect">
+            <a:avLst/>
+          </a:prstGeom>
+          <a:noFill/>
+        </p:spPr>
+        <p:txBody>
+          <a:bodyPr wrap="square">
+            <a:spAutoFit/>
+          </a:bodyPr>
+          <a:lstStyle/>
+          <a:p>
+            <a:pPr algn="l"/>
+            <a:r>
+              <a:rPr sz="2000" b="1">
+                <a:solidFill>
+                  <a:srgbClr val="B8741C"/>
+                </a:solidFill>
+                <a:latin typeface="Calibri"/>
+              </a:rPr>
+              <a:t>How they feel</a:t>
+            </a:r>
+          </a:p>
+        </p:txBody>
+      </p:sp>
+      <p:sp>
+        <p:nvSpPr>
+          <p:cNvPr id="13" name="TextBox 12"/>
+          <p:cNvSpPr txBox="1"/>
+          <p:nvPr/>
+        </p:nvSpPr>
+        <p:spPr>
+          <a:xfrm>
+            <a:off x="914400" y="4892040"/>
+            <a:ext cx="10332720" cy="548640"/>
+          </a:xfrm>
+          <a:prstGeom prst="rect">
+            <a:avLst/>
+          </a:prstGeom>
+          <a:noFill/>
+        </p:spPr>
+        <p:txBody>
+          <a:bodyPr wrap="square">
+            <a:spAutoFit/>
+          </a:bodyPr>
+          <a:lstStyle/>
+          <a:p>
+            <a:pPr algn="l"/>
+            <a:r>
+              <a:rPr sz="1800" b="0">
+                <a:solidFill>
+                  <a:srgbClr val="1A1612"/>
+                </a:solidFill>
+                <a:latin typeface="Calibri"/>
+              </a:rPr>
+              <a:t>Settings → Tools: Install / Uninstall. The agent only calls what is installed. Status shows “Searching the web…”</a:t>
+            </a:r>
+          </a:p>
+        </p:txBody>
+      </p:sp>
+      <p:sp>
+        <p:nvSpPr>
+          <p:cNvPr id="14" name="TextBox 13"/>
+          <p:cNvSpPr txBox="1"/>
+          <p:nvPr/>
+        </p:nvSpPr>
+        <p:spPr>
+          <a:xfrm>
+            <a:off x="548640" y="6510528"/>
+            <a:ext cx="8229600" cy="274320"/>
+          </a:xfrm>
+          <a:prstGeom prst="rect">
+            <a:avLst/>
+          </a:prstGeom>
+          <a:noFill/>
+        </p:spPr>
+        <p:txBody>
+          <a:bodyPr wrap="square">
+            <a:spAutoFit/>
+          </a:bodyPr>
+          <a:lstStyle/>
+          <a:p>
+            <a:pPr algn="l"/>
+            <a:r>
+              <a:rPr sz="1200" b="0">
+                <a:solidFill>
+                  <a:srgbClr val="5E574E"/>
+                </a:solidFill>
+                <a:latin typeface="Calibri"/>
+              </a:rPr>
+              <a:t>Agentic AI  ·  v1.6.0  ·  Abhishek Mishra</a:t>
+            </a:r>
+          </a:p>
+        </p:txBody>
+      </p:sp>
+      <p:sp>
+        <p:nvSpPr>
+          <p:cNvPr id="15" name="TextBox 14"/>
+          <p:cNvSpPr txBox="1"/>
+          <p:nvPr/>
+        </p:nvSpPr>
+        <p:spPr>
+          <a:xfrm>
+            <a:off x="10241280" y="6510528"/>
+            <a:ext cx="1463040" cy="274320"/>
+          </a:xfrm>
+          <a:prstGeom prst="rect">
+            <a:avLst/>
+          </a:prstGeom>
+          <a:noFill/>
+        </p:spPr>
+        <p:txBody>
+          <a:bodyPr wrap="square">
+            <a:spAutoFit/>
+          </a:bodyPr>
+          <a:lstStyle/>
+          <a:p>
+            <a:pPr algn="r"/>
+            <a:r>
+              <a:rPr sz="1200" b="0">
+                <a:solidFill>
+                  <a:srgbClr val="5E574E"/>
+                </a:solidFill>
+                <a:latin typeface="Calibri"/>
+              </a:rPr>
+              <a:t>14 / 22</a:t>
+            </a:r>
+          </a:p>
+        </p:txBody>
+      </p:sp>
+    </p:spTree>
+  </p:cSld>
+  <p:clrMapOvr>
+    <a:masterClrMapping/>
+  </p:clrMapOvr>
+</p:sld>
+</file>
+
+<file path=ppt/slides/slide15.xml><?xml version="1.0" encoding="utf-8"?>
+<p:sld xmlns:a="http://schemas.openxmlformats.org/drawingml/2006/main" xmlns:p="http://schemas.openxmlformats.org/presentationml/2006/main" xmlns:r="http://schemas.openxmlformats.org/officeDocument/2006/relationships">
+  <p:cSld>
+    <p:spTree>
+      <p:nvGrpSpPr>
+        <p:cNvPr id="1" name=""/>
+        <p:cNvGrpSpPr/>
+        <p:nvPr/>
+      </p:nvGrpSpPr>
+      <p:grpSpPr/>
+      <p:sp>
+        <p:nvSpPr>
+          <p:cNvPr id="2" name="Rectangle 1"/>
+          <p:cNvSpPr/>
+          <p:nvPr/>
+        </p:nvSpPr>
+        <p:spPr>
+          <a:xfrm>
+            <a:off x="0" y="0"/>
+            <a:ext cx="12191695" cy="6858000"/>
+          </a:xfrm>
+          <a:prstGeom prst="rect">
+            <a:avLst/>
+          </a:prstGeom>
+          <a:solidFill>
+            <a:srgbClr val="F1F1F1"/>
+          </a:solidFill>
+          <a:ln>
+            <a:noFill/>
+          </a:ln>
+        </p:spPr>
+        <p:style>
+          <a:lnRef idx="1">
+            <a:schemeClr val="accent1"/>
+          </a:lnRef>
+          <a:fillRef idx="3">
+            <a:schemeClr val="accent1"/>
+          </a:fillRef>
+          <a:effectRef idx="2">
+            <a:schemeClr val="accent1"/>
+          </a:effectRef>
+          <a:fontRef idx="minor">
+            <a:schemeClr val="lt1"/>
+          </a:fontRef>
+        </p:style>
+        <p:txBody>
+          <a:bodyPr rtlCol="0" anchor="ctr"/>
+          <a:lstStyle/>
+          <a:p>
+            <a:pPr algn="ctr"/>
+          </a:p>
+        </p:txBody>
+      </p:sp>
+      <p:sp>
+        <p:nvSpPr>
+          <p:cNvPr id="3" name="Rectangle 2"/>
+          <p:cNvSpPr/>
+          <p:nvPr/>
+        </p:nvSpPr>
+        <p:spPr>
+          <a:xfrm>
+            <a:off x="0" y="0"/>
+            <a:ext cx="12191695" cy="109728"/>
+          </a:xfrm>
+          <a:prstGeom prst="rect">
+            <a:avLst/>
+          </a:prstGeom>
+          <a:solidFill>
+            <a:srgbClr val="DB8F2A"/>
+          </a:solidFill>
+          <a:ln>
+            <a:noFill/>
+          </a:ln>
+        </p:spPr>
+        <p:style>
+          <a:lnRef idx="1">
+            <a:schemeClr val="accent1"/>
+          </a:lnRef>
+          <a:fillRef idx="3">
+            <a:schemeClr val="accent1"/>
+          </a:fillRef>
+          <a:effectRef idx="2">
+            <a:schemeClr val="accent1"/>
+          </a:effectRef>
+          <a:fontRef idx="minor">
+            <a:schemeClr val="lt1"/>
+          </a:fontRef>
+        </p:style>
+        <p:txBody>
+          <a:bodyPr rtlCol="0" anchor="ctr"/>
+          <a:lstStyle/>
+          <a:p>
+            <a:pPr algn="ctr"/>
+          </a:p>
+        </p:txBody>
+      </p:sp>
+      <p:sp>
+        <p:nvSpPr>
+          <p:cNvPr id="4" name="TextBox 3"/>
+          <p:cNvSpPr txBox="1"/>
+          <p:nvPr/>
+        </p:nvSpPr>
+        <p:spPr>
+          <a:xfrm>
+            <a:off x="640080" y="365760"/>
+            <a:ext cx="10972800" cy="640080"/>
+          </a:xfrm>
+          <a:prstGeom prst="rect">
+            <a:avLst/>
+          </a:prstGeom>
+          <a:noFill/>
+        </p:spPr>
+        <p:txBody>
+          <a:bodyPr wrap="square">
+            <a:spAutoFit/>
+          </a:bodyPr>
+          <a:lstStyle/>
+          <a:p>
+            <a:pPr algn="l"/>
+            <a:r>
+              <a:rPr sz="3200" b="1">
+                <a:solidFill>
+                  <a:srgbClr val="1A1612"/>
+                </a:solidFill>
+                <a:latin typeface="Georgia"/>
+              </a:rPr>
+              <a:t>Two ways to work</a:t>
+            </a:r>
+          </a:p>
+        </p:txBody>
+      </p:sp>
+      <p:sp>
+        <p:nvSpPr>
           <p:cNvPr id="5" name="TextBox 4"/>
           <p:cNvSpPr txBox="1"/>
           <p:nvPr/>
         </p:nvSpPr>
         <p:spPr>
           <a:xfrm>
-            <a:off x="777240" y="2697480"/>
-            <a:ext cx="10972800" cy="822960"/>
+            <a:off x="731520" y="1234440"/>
+            <a:ext cx="10607040" cy="5029200"/>
+          </a:xfrm>
+          <a:prstGeom prst="rect">
+            <a:avLst/>
+          </a:prstGeom>
+          <a:noFill/>
+        </p:spPr>
+        <p:txBody>
+          <a:bodyPr wrap="square">
+            <a:spAutoFit/>
+          </a:bodyPr>
+          <a:lstStyle/>
+          <a:p>
+            <a:pPr>
+              <a:spcAft>
+                <a:spcPts val="800"/>
+              </a:spcAft>
+            </a:pPr>
+            <a:r>
+              <a:rPr sz="2000" b="0">
+                <a:solidFill>
+                  <a:srgbClr val="1A1612"/>
+                </a:solidFill>
+                <a:latin typeface="Calibri"/>
+              </a:rPr>
+              <a:t>•  Single agent — one assistant for quick questions, weather, prices, files, and code.</a:t>
+            </a:r>
+          </a:p>
+          <a:p>
+            <a:pPr>
+              <a:spcAft>
+                <a:spcPts val="800"/>
+              </a:spcAft>
+            </a:pPr>
+            <a:r>
+              <a:rPr sz="2000" b="0">
+                <a:solidFill>
+                  <a:srgbClr val="1A1612"/>
+                </a:solidFill>
+                <a:latin typeface="Calibri"/>
+              </a:rPr>
+              <a:t>•  Researcher + Writer — first agent gathers facts (search, wiki, weather, GitHub).</a:t>
+            </a:r>
+          </a:p>
+          <a:p>
+            <a:pPr>
+              <a:spcAft>
+                <a:spcPts val="800"/>
+              </a:spcAft>
+            </a:pPr>
+            <a:r>
+              <a:rPr sz="2000" b="0">
+                <a:solidFill>
+                  <a:srgbClr val="1A1612"/>
+                </a:solidFill>
+                <a:latin typeface="Calibri"/>
+              </a:rPr>
+              <a:t>•  Writer turns the brief into a clear answer and may use calculator, clock, notes, or sandbox.</a:t>
+            </a:r>
+          </a:p>
+          <a:p>
+            <a:pPr>
+              <a:spcAft>
+                <a:spcPts val="800"/>
+              </a:spcAft>
+            </a:pPr>
+            <a:r>
+              <a:rPr sz="2000" b="0">
+                <a:solidFill>
+                  <a:srgbClr val="1A1612"/>
+                </a:solidFill>
+                <a:latin typeface="Calibri"/>
+              </a:rPr>
+              <a:t>•  Switch from the sidebar dropdown before you send. Crew is better for long research.</a:t>
+            </a:r>
+          </a:p>
+          <a:p>
+            <a:pPr>
+              <a:spcAft>
+                <a:spcPts val="800"/>
+              </a:spcAft>
+            </a:pPr>
+            <a:r>
+              <a:rPr sz="2000" b="0">
+                <a:solidFill>
+                  <a:srgbClr val="1A1612"/>
+                </a:solidFill>
+                <a:latin typeface="Calibri"/>
+              </a:rPr>
+              <a:t>•  Show thinking: live status while tools run. Max steps default 8. Temperature default 0.2.</a:t>
+            </a:r>
+          </a:p>
+        </p:txBody>
+      </p:sp>
+      <p:sp>
+        <p:nvSpPr>
+          <p:cNvPr id="6" name="TextBox 5"/>
+          <p:cNvSpPr txBox="1"/>
+          <p:nvPr/>
+        </p:nvSpPr>
+        <p:spPr>
+          <a:xfrm>
+            <a:off x="548640" y="6510528"/>
+            <a:ext cx="8229600" cy="274320"/>
           </a:xfrm>
           <a:prstGeom prst="rect">
             <a:avLst/>
@@ -4805,13 +6500,306 @@
           <a:p>
             <a:pPr algn="l"/>
             <a:r>
-              <a:rPr sz="4800" b="1">
-                <a:solidFill>
-                  <a:srgbClr val="14120B"/>
+              <a:rPr sz="1200" b="0">
+                <a:solidFill>
+                  <a:srgbClr val="5E574E"/>
+                </a:solidFill>
+                <a:latin typeface="Calibri"/>
+              </a:rPr>
+              <a:t>Agentic AI  ·  v1.6.0  ·  Abhishek Mishra</a:t>
+            </a:r>
+          </a:p>
+        </p:txBody>
+      </p:sp>
+      <p:sp>
+        <p:nvSpPr>
+          <p:cNvPr id="7" name="TextBox 6"/>
+          <p:cNvSpPr txBox="1"/>
+          <p:nvPr/>
+        </p:nvSpPr>
+        <p:spPr>
+          <a:xfrm>
+            <a:off x="10241280" y="6510528"/>
+            <a:ext cx="1463040" cy="274320"/>
+          </a:xfrm>
+          <a:prstGeom prst="rect">
+            <a:avLst/>
+          </a:prstGeom>
+          <a:noFill/>
+        </p:spPr>
+        <p:txBody>
+          <a:bodyPr wrap="square">
+            <a:spAutoFit/>
+          </a:bodyPr>
+          <a:lstStyle/>
+          <a:p>
+            <a:pPr algn="r"/>
+            <a:r>
+              <a:rPr sz="1200" b="0">
+                <a:solidFill>
+                  <a:srgbClr val="5E574E"/>
+                </a:solidFill>
+                <a:latin typeface="Calibri"/>
+              </a:rPr>
+              <a:t>15 / 22</a:t>
+            </a:r>
+          </a:p>
+        </p:txBody>
+      </p:sp>
+    </p:spTree>
+  </p:cSld>
+  <p:clrMapOvr>
+    <a:masterClrMapping/>
+  </p:clrMapOvr>
+</p:sld>
+</file>
+
+<file path=ppt/slides/slide16.xml><?xml version="1.0" encoding="utf-8"?>
+<p:sld xmlns:a="http://schemas.openxmlformats.org/drawingml/2006/main" xmlns:p="http://schemas.openxmlformats.org/presentationml/2006/main" xmlns:r="http://schemas.openxmlformats.org/officeDocument/2006/relationships">
+  <p:cSld>
+    <p:spTree>
+      <p:nvGrpSpPr>
+        <p:cNvPr id="1" name=""/>
+        <p:cNvGrpSpPr/>
+        <p:nvPr/>
+      </p:nvGrpSpPr>
+      <p:grpSpPr/>
+      <p:sp>
+        <p:nvSpPr>
+          <p:cNvPr id="2" name="Rectangle 1"/>
+          <p:cNvSpPr/>
+          <p:nvPr/>
+        </p:nvSpPr>
+        <p:spPr>
+          <a:xfrm>
+            <a:off x="0" y="0"/>
+            <a:ext cx="12191695" cy="6858000"/>
+          </a:xfrm>
+          <a:prstGeom prst="rect">
+            <a:avLst/>
+          </a:prstGeom>
+          <a:solidFill>
+            <a:srgbClr val="F1F1F1"/>
+          </a:solidFill>
+          <a:ln>
+            <a:noFill/>
+          </a:ln>
+        </p:spPr>
+        <p:style>
+          <a:lnRef idx="1">
+            <a:schemeClr val="accent1"/>
+          </a:lnRef>
+          <a:fillRef idx="3">
+            <a:schemeClr val="accent1"/>
+          </a:fillRef>
+          <a:effectRef idx="2">
+            <a:schemeClr val="accent1"/>
+          </a:effectRef>
+          <a:fontRef idx="minor">
+            <a:schemeClr val="lt1"/>
+          </a:fontRef>
+        </p:style>
+        <p:txBody>
+          <a:bodyPr rtlCol="0" anchor="ctr"/>
+          <a:lstStyle/>
+          <a:p>
+            <a:pPr algn="ctr"/>
+          </a:p>
+        </p:txBody>
+      </p:sp>
+      <p:sp>
+        <p:nvSpPr>
+          <p:cNvPr id="3" name="Rectangle 2"/>
+          <p:cNvSpPr/>
+          <p:nvPr/>
+        </p:nvSpPr>
+        <p:spPr>
+          <a:xfrm>
+            <a:off x="0" y="0"/>
+            <a:ext cx="12191695" cy="109728"/>
+          </a:xfrm>
+          <a:prstGeom prst="rect">
+            <a:avLst/>
+          </a:prstGeom>
+          <a:solidFill>
+            <a:srgbClr val="DB8F2A"/>
+          </a:solidFill>
+          <a:ln>
+            <a:noFill/>
+          </a:ln>
+        </p:spPr>
+        <p:style>
+          <a:lnRef idx="1">
+            <a:schemeClr val="accent1"/>
+          </a:lnRef>
+          <a:fillRef idx="3">
+            <a:schemeClr val="accent1"/>
+          </a:fillRef>
+          <a:effectRef idx="2">
+            <a:schemeClr val="accent1"/>
+          </a:effectRef>
+          <a:fontRef idx="minor">
+            <a:schemeClr val="lt1"/>
+          </a:fontRef>
+        </p:style>
+        <p:txBody>
+          <a:bodyPr rtlCol="0" anchor="ctr"/>
+          <a:lstStyle/>
+          <a:p>
+            <a:pPr algn="ctr"/>
+          </a:p>
+        </p:txBody>
+      </p:sp>
+      <p:sp>
+        <p:nvSpPr>
+          <p:cNvPr id="4" name="TextBox 3"/>
+          <p:cNvSpPr txBox="1"/>
+          <p:nvPr/>
+        </p:nvSpPr>
+        <p:spPr>
+          <a:xfrm>
+            <a:off x="640080" y="365760"/>
+            <a:ext cx="10972800" cy="640080"/>
+          </a:xfrm>
+          <a:prstGeom prst="rect">
+            <a:avLst/>
+          </a:prstGeom>
+          <a:noFill/>
+        </p:spPr>
+        <p:txBody>
+          <a:bodyPr wrap="square">
+            <a:spAutoFit/>
+          </a:bodyPr>
+          <a:lstStyle/>
+          <a:p>
+            <a:pPr algn="l"/>
+            <a:r>
+              <a:rPr sz="3200" b="1">
+                <a:solidFill>
+                  <a:srgbClr val="1A1612"/>
                 </a:solidFill>
                 <a:latin typeface="Georgia"/>
               </a:rPr>
-              <a:t>Thank you</a:t>
+              <a:t>How the agent thinks (ReAct)</a:t>
+            </a:r>
+          </a:p>
+        </p:txBody>
+      </p:sp>
+      <p:sp>
+        <p:nvSpPr>
+          <p:cNvPr id="5" name="TextBox 4"/>
+          <p:cNvSpPr txBox="1"/>
+          <p:nvPr/>
+        </p:nvSpPr>
+        <p:spPr>
+          <a:xfrm>
+            <a:off x="731520" y="1234440"/>
+            <a:ext cx="10607040" cy="5029200"/>
+          </a:xfrm>
+          <a:prstGeom prst="rect">
+            <a:avLst/>
+          </a:prstGeom>
+          <a:noFill/>
+        </p:spPr>
+        <p:txBody>
+          <a:bodyPr wrap="square">
+            <a:spAutoFit/>
+          </a:bodyPr>
+          <a:lstStyle/>
+          <a:p>
+            <a:pPr>
+              <a:spcAft>
+                <a:spcPts val="800"/>
+              </a:spcAft>
+            </a:pPr>
+            <a:r>
+              <a:rPr sz="2000" b="0">
+                <a:solidFill>
+                  <a:srgbClr val="1A1612"/>
+                </a:solidFill>
+                <a:latin typeface="Calibri"/>
+              </a:rPr>
+              <a:t>•  Think — the LLM decides: greet, answer, or call a tool.</a:t>
+            </a:r>
+          </a:p>
+          <a:p>
+            <a:pPr>
+              <a:spcAft>
+                <a:spcPts val="800"/>
+              </a:spcAft>
+            </a:pPr>
+            <a:r>
+              <a:rPr sz="2000" b="0">
+                <a:solidFill>
+                  <a:srgbClr val="1A1612"/>
+                </a:solidFill>
+                <a:latin typeface="Calibri"/>
+              </a:rPr>
+              <a:t>•  Act — it calls a tool with clean JSON, e.g. {"query": "today gold price India"}.</a:t>
+            </a:r>
+          </a:p>
+          <a:p>
+            <a:pPr>
+              <a:spcAft>
+                <a:spcPts val="800"/>
+              </a:spcAft>
+            </a:pPr>
+            <a:r>
+              <a:rPr sz="2000" b="0">
+                <a:solidFill>
+                  <a:srgbClr val="1A1612"/>
+                </a:solidFill>
+                <a:latin typeface="Calibri"/>
+              </a:rPr>
+              <a:t>•  Observe — the tool result is added to memory for the next step.</a:t>
+            </a:r>
+          </a:p>
+          <a:p>
+            <a:pPr>
+              <a:spcAft>
+                <a:spcPts val="800"/>
+              </a:spcAft>
+            </a:pPr>
+            <a:r>
+              <a:rPr sz="2000" b="0">
+                <a:solidFill>
+                  <a:srgbClr val="1A1612"/>
+                </a:solidFill>
+                <a:latin typeface="Calibri"/>
+              </a:rPr>
+              <a:t>•  Repeat — up to max steps, then write a human answer (not JSON, not a raw dump).</a:t>
+            </a:r>
+          </a:p>
+          <a:p>
+            <a:pPr>
+              <a:spcAft>
+                <a:spcPts val="800"/>
+              </a:spcAft>
+            </a:pPr>
+            <a:r>
+              <a:rPr sz="2000" b="0">
+                <a:solidFill>
+                  <a:srgbClr val="1A1612"/>
+                </a:solidFill>
+                <a:latin typeface="Calibri"/>
+              </a:rPr>
+              <a:t>•  Guardrails: repair bad Groq tool calls, cite sources, do not invent URLs or numbers.</a:t>
+            </a:r>
+          </a:p>
+          <a:p>
+            <a:pPr>
+              <a:spcAft>
+                <a:spcPts val="800"/>
+              </a:spcAft>
+            </a:pPr>
+            <a:r>
+              <a:rPr sz="2000" b="0">
+                <a:solidFill>
+                  <a:srgbClr val="1A1612"/>
+                </a:solidFill>
+                <a:latin typeface="Calibri"/>
+              </a:rPr>
+              <a:t>•  Extras in the prompt: language, Teach block, project files, attached file text, photos.</a:t>
             </a:r>
           </a:p>
         </p:txBody>
@@ -4824,8 +6812,8 @@
         </p:nvSpPr>
         <p:spPr>
           <a:xfrm>
-            <a:off x="777240" y="3611880"/>
-            <a:ext cx="10515600" cy="731520"/>
+            <a:off x="548640" y="6510528"/>
+            <a:ext cx="8229600" cy="274320"/>
           </a:xfrm>
           <a:prstGeom prst="rect">
             <a:avLst/>
@@ -4840,13 +6828,13 @@
           <a:p>
             <a:pPr algn="l"/>
             <a:r>
-              <a:rPr sz="2200" b="0">
-                <a:solidFill>
-                  <a:srgbClr val="6F6B63"/>
-                </a:solidFill>
-                <a:latin typeface="Calibri"/>
-              </a:rPr>
-              <a:t>Questions, ideas, or a live demo — let’s try it in the browser.</a:t>
+              <a:rPr sz="1200" b="0">
+                <a:solidFill>
+                  <a:srgbClr val="5E574E"/>
+                </a:solidFill>
+                <a:latin typeface="Calibri"/>
+              </a:rPr>
+              <a:t>Agentic AI  ·  v1.6.0  ·  Abhishek Mishra</a:t>
             </a:r>
           </a:p>
         </p:txBody>
@@ -4859,8 +6847,147 @@
         </p:nvSpPr>
         <p:spPr>
           <a:xfrm>
-            <a:off x="777240" y="4937760"/>
-            <a:ext cx="10058400" cy="365760"/>
+            <a:off x="10241280" y="6510528"/>
+            <a:ext cx="1463040" cy="274320"/>
+          </a:xfrm>
+          <a:prstGeom prst="rect">
+            <a:avLst/>
+          </a:prstGeom>
+          <a:noFill/>
+        </p:spPr>
+        <p:txBody>
+          <a:bodyPr wrap="square">
+            <a:spAutoFit/>
+          </a:bodyPr>
+          <a:lstStyle/>
+          <a:p>
+            <a:pPr algn="r"/>
+            <a:r>
+              <a:rPr sz="1200" b="0">
+                <a:solidFill>
+                  <a:srgbClr val="5E574E"/>
+                </a:solidFill>
+                <a:latin typeface="Calibri"/>
+              </a:rPr>
+              <a:t>16 / 22</a:t>
+            </a:r>
+          </a:p>
+        </p:txBody>
+      </p:sp>
+    </p:spTree>
+  </p:cSld>
+  <p:clrMapOvr>
+    <a:masterClrMapping/>
+  </p:clrMapOvr>
+</p:sld>
+</file>
+
+<file path=ppt/slides/slide17.xml><?xml version="1.0" encoding="utf-8"?>
+<p:sld xmlns:a="http://schemas.openxmlformats.org/drawingml/2006/main" xmlns:p="http://schemas.openxmlformats.org/presentationml/2006/main" xmlns:r="http://schemas.openxmlformats.org/officeDocument/2006/relationships">
+  <p:cSld>
+    <p:spTree>
+      <p:nvGrpSpPr>
+        <p:cNvPr id="1" name=""/>
+        <p:cNvGrpSpPr/>
+        <p:nvPr/>
+      </p:nvGrpSpPr>
+      <p:grpSpPr/>
+      <p:sp>
+        <p:nvSpPr>
+          <p:cNvPr id="2" name="Rectangle 1"/>
+          <p:cNvSpPr/>
+          <p:nvPr/>
+        </p:nvSpPr>
+        <p:spPr>
+          <a:xfrm>
+            <a:off x="0" y="0"/>
+            <a:ext cx="12191695" cy="6858000"/>
+          </a:xfrm>
+          <a:prstGeom prst="rect">
+            <a:avLst/>
+          </a:prstGeom>
+          <a:solidFill>
+            <a:srgbClr val="F1F1F1"/>
+          </a:solidFill>
+          <a:ln>
+            <a:noFill/>
+          </a:ln>
+        </p:spPr>
+        <p:style>
+          <a:lnRef idx="1">
+            <a:schemeClr val="accent1"/>
+          </a:lnRef>
+          <a:fillRef idx="3">
+            <a:schemeClr val="accent1"/>
+          </a:fillRef>
+          <a:effectRef idx="2">
+            <a:schemeClr val="accent1"/>
+          </a:effectRef>
+          <a:fontRef idx="minor">
+            <a:schemeClr val="lt1"/>
+          </a:fontRef>
+        </p:style>
+        <p:txBody>
+          <a:bodyPr rtlCol="0" anchor="ctr"/>
+          <a:lstStyle/>
+          <a:p>
+            <a:pPr algn="ctr"/>
+          </a:p>
+        </p:txBody>
+      </p:sp>
+      <p:sp>
+        <p:nvSpPr>
+          <p:cNvPr id="3" name="Rectangle 2"/>
+          <p:cNvSpPr/>
+          <p:nvPr/>
+        </p:nvSpPr>
+        <p:spPr>
+          <a:xfrm>
+            <a:off x="0" y="0"/>
+            <a:ext cx="12191695" cy="109728"/>
+          </a:xfrm>
+          <a:prstGeom prst="rect">
+            <a:avLst/>
+          </a:prstGeom>
+          <a:solidFill>
+            <a:srgbClr val="DB8F2A"/>
+          </a:solidFill>
+          <a:ln>
+            <a:noFill/>
+          </a:ln>
+        </p:spPr>
+        <p:style>
+          <a:lnRef idx="1">
+            <a:schemeClr val="accent1"/>
+          </a:lnRef>
+          <a:fillRef idx="3">
+            <a:schemeClr val="accent1"/>
+          </a:fillRef>
+          <a:effectRef idx="2">
+            <a:schemeClr val="accent1"/>
+          </a:effectRef>
+          <a:fontRef idx="minor">
+            <a:schemeClr val="lt1"/>
+          </a:fontRef>
+        </p:style>
+        <p:txBody>
+          <a:bodyPr rtlCol="0" anchor="ctr"/>
+          <a:lstStyle/>
+          <a:p>
+            <a:pPr algn="ctr"/>
+          </a:p>
+        </p:txBody>
+      </p:sp>
+      <p:sp>
+        <p:nvSpPr>
+          <p:cNvPr id="4" name="TextBox 3"/>
+          <p:cNvSpPr txBox="1"/>
+          <p:nvPr/>
+        </p:nvSpPr>
+        <p:spPr>
+          <a:xfrm>
+            <a:off x="640080" y="365760"/>
+            <a:ext cx="10972800" cy="640080"/>
           </a:xfrm>
           <a:prstGeom prst="rect">
             <a:avLst/>
@@ -4875,13 +7002,890 @@
           <a:p>
             <a:pPr algn="l"/>
             <a:r>
-              <a:rPr sz="1800" b="1">
-                <a:solidFill>
-                  <a:srgbClr val="8A331C"/>
-                </a:solidFill>
-                <a:latin typeface="Calibri"/>
-              </a:rPr>
-              <a:t>http://127.0.0.1:3000</a:t>
+              <a:rPr sz="3200" b="1">
+                <a:solidFill>
+                  <a:srgbClr val="1A1612"/>
+                </a:solidFill>
+                <a:latin typeface="Georgia"/>
+              </a:rPr>
+              <a:t>Login and security</a:t>
+            </a:r>
+          </a:p>
+        </p:txBody>
+      </p:sp>
+      <p:sp>
+        <p:nvSpPr>
+          <p:cNvPr id="5" name="TextBox 4"/>
+          <p:cNvSpPr txBox="1"/>
+          <p:nvPr/>
+        </p:nvSpPr>
+        <p:spPr>
+          <a:xfrm>
+            <a:off x="731520" y="1234440"/>
+            <a:ext cx="10607040" cy="5029200"/>
+          </a:xfrm>
+          <a:prstGeom prst="rect">
+            <a:avLst/>
+          </a:prstGeom>
+          <a:noFill/>
+        </p:spPr>
+        <p:txBody>
+          <a:bodyPr wrap="square">
+            <a:spAutoFit/>
+          </a:bodyPr>
+          <a:lstStyle/>
+          <a:p>
+            <a:pPr>
+              <a:spcAft>
+                <a:spcPts val="800"/>
+              </a:spcAft>
+            </a:pPr>
+            <a:r>
+              <a:rPr sz="2000" b="0">
+                <a:solidFill>
+                  <a:srgbClr val="1A1612"/>
+                </a:solidFill>
+                <a:latin typeface="Calibri"/>
+              </a:rPr>
+              <a:t>•  Local login: name + email, signed httpOnly cookie session.</a:t>
+            </a:r>
+          </a:p>
+          <a:p>
+            <a:pPr>
+              <a:spcAft>
+                <a:spcPts val="800"/>
+              </a:spcAft>
+            </a:pPr>
+            <a:r>
+              <a:rPr sz="2000" b="0">
+                <a:solidFill>
+                  <a:srgbClr val="1A1612"/>
+                </a:solidFill>
+                <a:latin typeface="Calibri"/>
+              </a:rPr>
+              <a:t>•  Google and GitHub OAuth. Callback must use http://127.0.0.1:3000 (not localhost) for Google.</a:t>
+            </a:r>
+          </a:p>
+          <a:p>
+            <a:pPr>
+              <a:spcAft>
+                <a:spcPts val="800"/>
+              </a:spcAft>
+            </a:pPr>
+            <a:r>
+              <a:rPr sz="2000" b="0">
+                <a:solidFill>
+                  <a:srgbClr val="1A1612"/>
+                </a:solidFill>
+                <a:latin typeface="Calibri"/>
+              </a:rPr>
+              <a:t>•  Chat, tools, notes, extract, and settings APIs require a logged-in session.</a:t>
+            </a:r>
+          </a:p>
+          <a:p>
+            <a:pPr>
+              <a:spcAft>
+                <a:spcPts val="800"/>
+              </a:spcAft>
+            </a:pPr>
+            <a:r>
+              <a:rPr sz="2000" b="0">
+                <a:solidFill>
+                  <a:srgbClr val="1A1612"/>
+                </a:solidFill>
+                <a:latin typeface="Calibri"/>
+              </a:rPr>
+              <a:t>•  Groq API key lives in .env / server env. The UI never prints it back.</a:t>
+            </a:r>
+          </a:p>
+          <a:p>
+            <a:pPr>
+              <a:spcAft>
+                <a:spcPts val="800"/>
+              </a:spcAft>
+            </a:pPr>
+            <a:r>
+              <a:rPr sz="2000" b="0">
+                <a:solidFill>
+                  <a:srgbClr val="1A1612"/>
+                </a:solidFill>
+                <a:latin typeface="Calibri"/>
+              </a:rPr>
+              <a:t>•  Sandbox has no network and a short timeout. Teach is instruction memory, not model weights.</a:t>
+            </a:r>
+          </a:p>
+          <a:p>
+            <a:pPr>
+              <a:spcAft>
+                <a:spcPts val="800"/>
+              </a:spcAft>
+            </a:pPr>
+            <a:r>
+              <a:rPr sz="2000" b="0">
+                <a:solidFill>
+                  <a:srgbClr val="1A1612"/>
+                </a:solidFill>
+                <a:latin typeface="Calibri"/>
+              </a:rPr>
+              <a:t>•  Do not commit .env. Notes folder workspace_notes/ is gitignored.</a:t>
+            </a:r>
+          </a:p>
+        </p:txBody>
+      </p:sp>
+      <p:sp>
+        <p:nvSpPr>
+          <p:cNvPr id="6" name="TextBox 5"/>
+          <p:cNvSpPr txBox="1"/>
+          <p:nvPr/>
+        </p:nvSpPr>
+        <p:spPr>
+          <a:xfrm>
+            <a:off x="548640" y="6510528"/>
+            <a:ext cx="8229600" cy="274320"/>
+          </a:xfrm>
+          <a:prstGeom prst="rect">
+            <a:avLst/>
+          </a:prstGeom>
+          <a:noFill/>
+        </p:spPr>
+        <p:txBody>
+          <a:bodyPr wrap="square">
+            <a:spAutoFit/>
+          </a:bodyPr>
+          <a:lstStyle/>
+          <a:p>
+            <a:pPr algn="l"/>
+            <a:r>
+              <a:rPr sz="1200" b="0">
+                <a:solidFill>
+                  <a:srgbClr val="5E574E"/>
+                </a:solidFill>
+                <a:latin typeface="Calibri"/>
+              </a:rPr>
+              <a:t>Agentic AI  ·  v1.6.0  ·  Abhishek Mishra</a:t>
+            </a:r>
+          </a:p>
+        </p:txBody>
+      </p:sp>
+      <p:sp>
+        <p:nvSpPr>
+          <p:cNvPr id="7" name="TextBox 6"/>
+          <p:cNvSpPr txBox="1"/>
+          <p:nvPr/>
+        </p:nvSpPr>
+        <p:spPr>
+          <a:xfrm>
+            <a:off x="10241280" y="6510528"/>
+            <a:ext cx="1463040" cy="274320"/>
+          </a:xfrm>
+          <a:prstGeom prst="rect">
+            <a:avLst/>
+          </a:prstGeom>
+          <a:noFill/>
+        </p:spPr>
+        <p:txBody>
+          <a:bodyPr wrap="square">
+            <a:spAutoFit/>
+          </a:bodyPr>
+          <a:lstStyle/>
+          <a:p>
+            <a:pPr algn="r"/>
+            <a:r>
+              <a:rPr sz="1200" b="0">
+                <a:solidFill>
+                  <a:srgbClr val="5E574E"/>
+                </a:solidFill>
+                <a:latin typeface="Calibri"/>
+              </a:rPr>
+              <a:t>17 / 22</a:t>
+            </a:r>
+          </a:p>
+        </p:txBody>
+      </p:sp>
+    </p:spTree>
+  </p:cSld>
+  <p:clrMapOvr>
+    <a:masterClrMapping/>
+  </p:clrMapOvr>
+</p:sld>
+</file>
+
+<file path=ppt/slides/slide18.xml><?xml version="1.0" encoding="utf-8"?>
+<p:sld xmlns:a="http://schemas.openxmlformats.org/drawingml/2006/main" xmlns:p="http://schemas.openxmlformats.org/presentationml/2006/main" xmlns:r="http://schemas.openxmlformats.org/officeDocument/2006/relationships">
+  <p:cSld>
+    <p:spTree>
+      <p:nvGrpSpPr>
+        <p:cNvPr id="1" name=""/>
+        <p:cNvGrpSpPr/>
+        <p:nvPr/>
+      </p:nvGrpSpPr>
+      <p:grpSpPr/>
+      <p:sp>
+        <p:nvSpPr>
+          <p:cNvPr id="2" name="Rectangle 1"/>
+          <p:cNvSpPr/>
+          <p:nvPr/>
+        </p:nvSpPr>
+        <p:spPr>
+          <a:xfrm>
+            <a:off x="0" y="0"/>
+            <a:ext cx="12191695" cy="6858000"/>
+          </a:xfrm>
+          <a:prstGeom prst="rect">
+            <a:avLst/>
+          </a:prstGeom>
+          <a:solidFill>
+            <a:srgbClr val="F1F1F1"/>
+          </a:solidFill>
+          <a:ln>
+            <a:noFill/>
+          </a:ln>
+        </p:spPr>
+        <p:style>
+          <a:lnRef idx="1">
+            <a:schemeClr val="accent1"/>
+          </a:lnRef>
+          <a:fillRef idx="3">
+            <a:schemeClr val="accent1"/>
+          </a:fillRef>
+          <a:effectRef idx="2">
+            <a:schemeClr val="accent1"/>
+          </a:effectRef>
+          <a:fontRef idx="minor">
+            <a:schemeClr val="lt1"/>
+          </a:fontRef>
+        </p:style>
+        <p:txBody>
+          <a:bodyPr rtlCol="0" anchor="ctr"/>
+          <a:lstStyle/>
+          <a:p>
+            <a:pPr algn="ctr"/>
+          </a:p>
+        </p:txBody>
+      </p:sp>
+      <p:sp>
+        <p:nvSpPr>
+          <p:cNvPr id="3" name="Rectangle 2"/>
+          <p:cNvSpPr/>
+          <p:nvPr/>
+        </p:nvSpPr>
+        <p:spPr>
+          <a:xfrm>
+            <a:off x="0" y="0"/>
+            <a:ext cx="12191695" cy="109728"/>
+          </a:xfrm>
+          <a:prstGeom prst="rect">
+            <a:avLst/>
+          </a:prstGeom>
+          <a:solidFill>
+            <a:srgbClr val="DB8F2A"/>
+          </a:solidFill>
+          <a:ln>
+            <a:noFill/>
+          </a:ln>
+        </p:spPr>
+        <p:style>
+          <a:lnRef idx="1">
+            <a:schemeClr val="accent1"/>
+          </a:lnRef>
+          <a:fillRef idx="3">
+            <a:schemeClr val="accent1"/>
+          </a:fillRef>
+          <a:effectRef idx="2">
+            <a:schemeClr val="accent1"/>
+          </a:effectRef>
+          <a:fontRef idx="minor">
+            <a:schemeClr val="lt1"/>
+          </a:fontRef>
+        </p:style>
+        <p:txBody>
+          <a:bodyPr rtlCol="0" anchor="ctr"/>
+          <a:lstStyle/>
+          <a:p>
+            <a:pPr algn="ctr"/>
+          </a:p>
+        </p:txBody>
+      </p:sp>
+      <p:sp>
+        <p:nvSpPr>
+          <p:cNvPr id="4" name="TextBox 3"/>
+          <p:cNvSpPr txBox="1"/>
+          <p:nvPr/>
+        </p:nvSpPr>
+        <p:spPr>
+          <a:xfrm>
+            <a:off x="640080" y="365760"/>
+            <a:ext cx="10972800" cy="640080"/>
+          </a:xfrm>
+          <a:prstGeom prst="rect">
+            <a:avLst/>
+          </a:prstGeom>
+          <a:noFill/>
+        </p:spPr>
+        <p:txBody>
+          <a:bodyPr wrap="square">
+            <a:spAutoFit/>
+          </a:bodyPr>
+          <a:lstStyle/>
+          <a:p>
+            <a:pPr algn="l"/>
+            <a:r>
+              <a:rPr sz="3200" b="1">
+                <a:solidFill>
+                  <a:srgbClr val="1A1612"/>
+                </a:solidFill>
+                <a:latin typeface="Georgia"/>
+              </a:rPr>
+              <a:t>How to run (Windows)</a:t>
+            </a:r>
+          </a:p>
+        </p:txBody>
+      </p:sp>
+      <p:sp>
+        <p:nvSpPr>
+          <p:cNvPr id="5" name="TextBox 4"/>
+          <p:cNvSpPr txBox="1"/>
+          <p:nvPr/>
+        </p:nvSpPr>
+        <p:spPr>
+          <a:xfrm>
+            <a:off x="731520" y="1234440"/>
+            <a:ext cx="10607040" cy="5029200"/>
+          </a:xfrm>
+          <a:prstGeom prst="rect">
+            <a:avLst/>
+          </a:prstGeom>
+          <a:noFill/>
+        </p:spPr>
+        <p:txBody>
+          <a:bodyPr wrap="square">
+            <a:spAutoFit/>
+          </a:bodyPr>
+          <a:lstStyle/>
+          <a:p>
+            <a:pPr>
+              <a:spcAft>
+                <a:spcPts val="800"/>
+              </a:spcAft>
+            </a:pPr>
+            <a:r>
+              <a:rPr sz="1800" b="0">
+                <a:solidFill>
+                  <a:srgbClr val="1A1612"/>
+                </a:solidFill>
+                <a:latin typeface="Calibri"/>
+              </a:rPr>
+              <a:t>•  Terminal 1:  .\.venv\Scripts\python.exe app.py     → API on port 7860</a:t>
+            </a:r>
+          </a:p>
+          <a:p>
+            <a:pPr>
+              <a:spcAft>
+                <a:spcPts val="800"/>
+              </a:spcAft>
+            </a:pPr>
+            <a:r>
+              <a:rPr sz="1800" b="0">
+                <a:solidFill>
+                  <a:srgbClr val="1A1612"/>
+                </a:solidFill>
+                <a:latin typeface="Calibri"/>
+              </a:rPr>
+              <a:t>•  Terminal 2:  cd frontend   then   npm run dev      → UI on port 3000</a:t>
+            </a:r>
+          </a:p>
+          <a:p>
+            <a:pPr>
+              <a:spcAft>
+                <a:spcPts val="800"/>
+              </a:spcAft>
+            </a:pPr>
+            <a:r>
+              <a:rPr sz="1800" b="0">
+                <a:solidFill>
+                  <a:srgbClr val="1A1612"/>
+                </a:solidFill>
+                <a:latin typeface="Calibri"/>
+              </a:rPr>
+              <a:t>•  Open http://127.0.0.1:3000  — if you see Connection Failed, these two processes are not running.</a:t>
+            </a:r>
+          </a:p>
+          <a:p>
+            <a:pPr>
+              <a:spcAft>
+                <a:spcPts val="800"/>
+              </a:spcAft>
+            </a:pPr>
+            <a:r>
+              <a:rPr sz="1800" b="0">
+                <a:solidFill>
+                  <a:srgbClr val="1A1612"/>
+                </a:solidFill>
+                <a:latin typeface="Calibri"/>
+              </a:rPr>
+              <a:t>•  Sign in, paste a Groq key if asked (console.groq.com/keys), then chat.</a:t>
+            </a:r>
+          </a:p>
+          <a:p>
+            <a:pPr>
+              <a:spcAft>
+                <a:spcPts val="800"/>
+              </a:spcAft>
+            </a:pPr>
+            <a:r>
+              <a:rPr sz="1800" b="0">
+                <a:solidFill>
+                  <a:srgbClr val="1A1612"/>
+                </a:solidFill>
+                <a:latin typeface="Calibri"/>
+              </a:rPr>
+              <a:t>•  CLI also works: python main.py  or  python main.py --crew -q "..."</a:t>
+            </a:r>
+          </a:p>
+          <a:p>
+            <a:pPr>
+              <a:spcAft>
+                <a:spcPts val="800"/>
+              </a:spcAft>
+            </a:pPr>
+            <a:r>
+              <a:rPr sz="1800" b="0">
+                <a:solidFill>
+                  <a:srgbClr val="1A1612"/>
+                </a:solidFill>
+                <a:latin typeface="Calibri"/>
+              </a:rPr>
+              <a:t>•  Live: Docker on Render (agentic-ai-d0cx.onrender.com) or Hugging Face Spaces.</a:t>
+            </a:r>
+          </a:p>
+        </p:txBody>
+      </p:sp>
+      <p:sp>
+        <p:nvSpPr>
+          <p:cNvPr id="6" name="TextBox 5"/>
+          <p:cNvSpPr txBox="1"/>
+          <p:nvPr/>
+        </p:nvSpPr>
+        <p:spPr>
+          <a:xfrm>
+            <a:off x="548640" y="6510528"/>
+            <a:ext cx="8229600" cy="274320"/>
+          </a:xfrm>
+          <a:prstGeom prst="rect">
+            <a:avLst/>
+          </a:prstGeom>
+          <a:noFill/>
+        </p:spPr>
+        <p:txBody>
+          <a:bodyPr wrap="square">
+            <a:spAutoFit/>
+          </a:bodyPr>
+          <a:lstStyle/>
+          <a:p>
+            <a:pPr algn="l"/>
+            <a:r>
+              <a:rPr sz="1200" b="0">
+                <a:solidFill>
+                  <a:srgbClr val="5E574E"/>
+                </a:solidFill>
+                <a:latin typeface="Calibri"/>
+              </a:rPr>
+              <a:t>Agentic AI  ·  v1.6.0  ·  Abhishek Mishra</a:t>
+            </a:r>
+          </a:p>
+        </p:txBody>
+      </p:sp>
+      <p:sp>
+        <p:nvSpPr>
+          <p:cNvPr id="7" name="TextBox 6"/>
+          <p:cNvSpPr txBox="1"/>
+          <p:nvPr/>
+        </p:nvSpPr>
+        <p:spPr>
+          <a:xfrm>
+            <a:off x="10241280" y="6510528"/>
+            <a:ext cx="1463040" cy="274320"/>
+          </a:xfrm>
+          <a:prstGeom prst="rect">
+            <a:avLst/>
+          </a:prstGeom>
+          <a:noFill/>
+        </p:spPr>
+        <p:txBody>
+          <a:bodyPr wrap="square">
+            <a:spAutoFit/>
+          </a:bodyPr>
+          <a:lstStyle/>
+          <a:p>
+            <a:pPr algn="r"/>
+            <a:r>
+              <a:rPr sz="1200" b="0">
+                <a:solidFill>
+                  <a:srgbClr val="5E574E"/>
+                </a:solidFill>
+                <a:latin typeface="Calibri"/>
+              </a:rPr>
+              <a:t>18 / 22</a:t>
+            </a:r>
+          </a:p>
+        </p:txBody>
+      </p:sp>
+    </p:spTree>
+  </p:cSld>
+  <p:clrMapOvr>
+    <a:masterClrMapping/>
+  </p:clrMapOvr>
+</p:sld>
+</file>
+
+<file path=ppt/slides/slide19.xml><?xml version="1.0" encoding="utf-8"?>
+<p:sld xmlns:a="http://schemas.openxmlformats.org/drawingml/2006/main" xmlns:p="http://schemas.openxmlformats.org/presentationml/2006/main" xmlns:r="http://schemas.openxmlformats.org/officeDocument/2006/relationships">
+  <p:cSld>
+    <p:spTree>
+      <p:nvGrpSpPr>
+        <p:cNvPr id="1" name=""/>
+        <p:cNvGrpSpPr/>
+        <p:nvPr/>
+      </p:nvGrpSpPr>
+      <p:grpSpPr/>
+      <p:sp>
+        <p:nvSpPr>
+          <p:cNvPr id="2" name="Rectangle 1"/>
+          <p:cNvSpPr/>
+          <p:nvPr/>
+        </p:nvSpPr>
+        <p:spPr>
+          <a:xfrm>
+            <a:off x="0" y="0"/>
+            <a:ext cx="12191695" cy="6858000"/>
+          </a:xfrm>
+          <a:prstGeom prst="rect">
+            <a:avLst/>
+          </a:prstGeom>
+          <a:solidFill>
+            <a:srgbClr val="F1F1F1"/>
+          </a:solidFill>
+          <a:ln>
+            <a:noFill/>
+          </a:ln>
+        </p:spPr>
+        <p:style>
+          <a:lnRef idx="1">
+            <a:schemeClr val="accent1"/>
+          </a:lnRef>
+          <a:fillRef idx="3">
+            <a:schemeClr val="accent1"/>
+          </a:fillRef>
+          <a:effectRef idx="2">
+            <a:schemeClr val="accent1"/>
+          </a:effectRef>
+          <a:fontRef idx="minor">
+            <a:schemeClr val="lt1"/>
+          </a:fontRef>
+        </p:style>
+        <p:txBody>
+          <a:bodyPr rtlCol="0" anchor="ctr"/>
+          <a:lstStyle/>
+          <a:p>
+            <a:pPr algn="ctr"/>
+          </a:p>
+        </p:txBody>
+      </p:sp>
+      <p:sp>
+        <p:nvSpPr>
+          <p:cNvPr id="3" name="Rectangle 2"/>
+          <p:cNvSpPr/>
+          <p:nvPr/>
+        </p:nvSpPr>
+        <p:spPr>
+          <a:xfrm>
+            <a:off x="0" y="0"/>
+            <a:ext cx="12191695" cy="109728"/>
+          </a:xfrm>
+          <a:prstGeom prst="rect">
+            <a:avLst/>
+          </a:prstGeom>
+          <a:solidFill>
+            <a:srgbClr val="DB8F2A"/>
+          </a:solidFill>
+          <a:ln>
+            <a:noFill/>
+          </a:ln>
+        </p:spPr>
+        <p:style>
+          <a:lnRef idx="1">
+            <a:schemeClr val="accent1"/>
+          </a:lnRef>
+          <a:fillRef idx="3">
+            <a:schemeClr val="accent1"/>
+          </a:fillRef>
+          <a:effectRef idx="2">
+            <a:schemeClr val="accent1"/>
+          </a:effectRef>
+          <a:fontRef idx="minor">
+            <a:schemeClr val="lt1"/>
+          </a:fontRef>
+        </p:style>
+        <p:txBody>
+          <a:bodyPr rtlCol="0" anchor="ctr"/>
+          <a:lstStyle/>
+          <a:p>
+            <a:pPr algn="ctr"/>
+          </a:p>
+        </p:txBody>
+      </p:sp>
+      <p:sp>
+        <p:nvSpPr>
+          <p:cNvPr id="4" name="TextBox 3"/>
+          <p:cNvSpPr txBox="1"/>
+          <p:nvPr/>
+        </p:nvSpPr>
+        <p:spPr>
+          <a:xfrm>
+            <a:off x="640080" y="365760"/>
+            <a:ext cx="10972800" cy="640080"/>
+          </a:xfrm>
+          <a:prstGeom prst="rect">
+            <a:avLst/>
+          </a:prstGeom>
+          <a:noFill/>
+        </p:spPr>
+        <p:txBody>
+          <a:bodyPr wrap="square">
+            <a:spAutoFit/>
+          </a:bodyPr>
+          <a:lstStyle/>
+          <a:p>
+            <a:pPr algn="l"/>
+            <a:r>
+              <a:rPr sz="3200" b="1">
+                <a:solidFill>
+                  <a:srgbClr val="1A1612"/>
+                </a:solidFill>
+                <a:latin typeface="Georgia"/>
+              </a:rPr>
+              <a:t>Demo script</a:t>
+            </a:r>
+          </a:p>
+        </p:txBody>
+      </p:sp>
+      <p:sp>
+        <p:nvSpPr>
+          <p:cNvPr id="5" name="TextBox 4"/>
+          <p:cNvSpPr txBox="1"/>
+          <p:nvPr/>
+        </p:nvSpPr>
+        <p:spPr>
+          <a:xfrm>
+            <a:off x="731520" y="1234440"/>
+            <a:ext cx="10607040" cy="5029200"/>
+          </a:xfrm>
+          <a:prstGeom prst="rect">
+            <a:avLst/>
+          </a:prstGeom>
+          <a:noFill/>
+        </p:spPr>
+        <p:txBody>
+          <a:bodyPr wrap="square">
+            <a:spAutoFit/>
+          </a:bodyPr>
+          <a:lstStyle/>
+          <a:p>
+            <a:pPr>
+              <a:spcAft>
+                <a:spcPts val="800"/>
+              </a:spcAft>
+            </a:pPr>
+            <a:r>
+              <a:rPr sz="1800" b="0">
+                <a:solidFill>
+                  <a:srgbClr val="1A1612"/>
+                </a:solidFill>
+                <a:latin typeface="Calibri"/>
+              </a:rPr>
+              <a:t>•  1. “Hello” — personal greeting, no tools.</a:t>
+            </a:r>
+          </a:p>
+          <a:p>
+            <a:pPr>
+              <a:spcAft>
+                <a:spcPts val="800"/>
+              </a:spcAft>
+            </a:pPr>
+            <a:r>
+              <a:rPr sz="1800" b="0">
+                <a:solidFill>
+                  <a:srgbClr val="1A1612"/>
+                </a:solidFill>
+                <a:latin typeface="Calibri"/>
+              </a:rPr>
+              <a:t>•  2. “Delhi weather” then “today gold price in India”.</a:t>
+            </a:r>
+          </a:p>
+          <a:p>
+            <a:pPr>
+              <a:spcAft>
+                <a:spcPts val="800"/>
+              </a:spcAft>
+            </a:pPr>
+            <a:r>
+              <a:rPr sz="1800" b="0">
+                <a:solidFill>
+                  <a:srgbClr val="1A1612"/>
+                </a:solidFill>
+                <a:latin typeface="Calibri"/>
+              </a:rPr>
+              <a:t>•  3. Attach a PDF: “summarize this file”.</a:t>
+            </a:r>
+          </a:p>
+          <a:p>
+            <a:pPr>
+              <a:spcAft>
+                <a:spcPts val="800"/>
+              </a:spcAft>
+            </a:pPr>
+            <a:r>
+              <a:rPr sz="1800" b="0">
+                <a:solidFill>
+                  <a:srgbClr val="1A1612"/>
+                </a:solidFill>
+                <a:latin typeface="Calibri"/>
+              </a:rPr>
+              <a:t>•  4. Settings → Teach: add your name and shop facts, Save training, new chat, ask “what do you know about me?”</a:t>
+            </a:r>
+          </a:p>
+          <a:p>
+            <a:pPr>
+              <a:spcAft>
+                <a:spcPts val="800"/>
+              </a:spcAft>
+            </a:pPr>
+            <a:r>
+              <a:rPr sz="1800" b="0">
+                <a:solidFill>
+                  <a:srgbClr val="1A1612"/>
+                </a:solidFill>
+                <a:latin typeface="Calibri"/>
+              </a:rPr>
+              <a:t>•  5. + Project, add a file, ask a question that needs that file.</a:t>
+            </a:r>
+          </a:p>
+          <a:p>
+            <a:pPr>
+              <a:spcAft>
+                <a:spcPts val="800"/>
+              </a:spcAft>
+            </a:pPr>
+            <a:r>
+              <a:rPr sz="1800" b="0">
+                <a:solidFill>
+                  <a:srgbClr val="1A1612"/>
+                </a:solidFill>
+                <a:latin typeface="Calibri"/>
+              </a:rPr>
+              <a:t>•  6. “Make a simple landing page for my shop” — Artifacts pane opens.</a:t>
+            </a:r>
+          </a:p>
+          <a:p>
+            <a:pPr>
+              <a:spcAft>
+                <a:spcPts val="800"/>
+              </a:spcAft>
+            </a:pPr>
+            <a:r>
+              <a:rPr sz="1800" b="0">
+                <a:solidFill>
+                  <a:srgbClr val="1A1612"/>
+                </a:solidFill>
+                <a:latin typeface="Calibri"/>
+              </a:rPr>
+              <a:t>•  7. “Run Python: print(sum(range(1, 11)))”. Then “save this as a note” and open Notes.</a:t>
+            </a:r>
+          </a:p>
+          <a:p>
+            <a:pPr>
+              <a:spcAft>
+                <a:spcPts val="800"/>
+              </a:spcAft>
+            </a:pPr>
+            <a:r>
+              <a:rPr sz="1800" b="0">
+                <a:solidFill>
+                  <a:srgbClr val="1A1612"/>
+                </a:solidFill>
+                <a:latin typeface="Calibri"/>
+              </a:rPr>
+              <a:t>•  8. Mic to speak, speaker to hear, Retry, Export chat.</a:t>
+            </a:r>
+          </a:p>
+        </p:txBody>
+      </p:sp>
+      <p:sp>
+        <p:nvSpPr>
+          <p:cNvPr id="6" name="TextBox 5"/>
+          <p:cNvSpPr txBox="1"/>
+          <p:nvPr/>
+        </p:nvSpPr>
+        <p:spPr>
+          <a:xfrm>
+            <a:off x="548640" y="6510528"/>
+            <a:ext cx="8229600" cy="274320"/>
+          </a:xfrm>
+          <a:prstGeom prst="rect">
+            <a:avLst/>
+          </a:prstGeom>
+          <a:noFill/>
+        </p:spPr>
+        <p:txBody>
+          <a:bodyPr wrap="square">
+            <a:spAutoFit/>
+          </a:bodyPr>
+          <a:lstStyle/>
+          <a:p>
+            <a:pPr algn="l"/>
+            <a:r>
+              <a:rPr sz="1200" b="0">
+                <a:solidFill>
+                  <a:srgbClr val="5E574E"/>
+                </a:solidFill>
+                <a:latin typeface="Calibri"/>
+              </a:rPr>
+              <a:t>Agentic AI  ·  v1.6.0  ·  Abhishek Mishra</a:t>
+            </a:r>
+          </a:p>
+        </p:txBody>
+      </p:sp>
+      <p:sp>
+        <p:nvSpPr>
+          <p:cNvPr id="7" name="TextBox 6"/>
+          <p:cNvSpPr txBox="1"/>
+          <p:nvPr/>
+        </p:nvSpPr>
+        <p:spPr>
+          <a:xfrm>
+            <a:off x="10241280" y="6510528"/>
+            <a:ext cx="1463040" cy="274320"/>
+          </a:xfrm>
+          <a:prstGeom prst="rect">
+            <a:avLst/>
+          </a:prstGeom>
+          <a:noFill/>
+        </p:spPr>
+        <p:txBody>
+          <a:bodyPr wrap="square">
+            <a:spAutoFit/>
+          </a:bodyPr>
+          <a:lstStyle/>
+          <a:p>
+            <a:pPr algn="r"/>
+            <a:r>
+              <a:rPr sz="1200" b="0">
+                <a:solidFill>
+                  <a:srgbClr val="5E574E"/>
+                </a:solidFill>
+                <a:latin typeface="Calibri"/>
+              </a:rPr>
+              <a:t>19 / 22</a:t>
             </a:r>
           </a:p>
         </p:txBody>
@@ -4919,7 +7923,7 @@
             <a:avLst/>
           </a:prstGeom>
           <a:solidFill>
-            <a:srgbClr val="F7F4EF"/>
+            <a:srgbClr val="F1F1F1"/>
           </a:solidFill>
           <a:ln>
             <a:noFill/>
@@ -4962,7 +7966,7 @@
             <a:avLst/>
           </a:prstGeom>
           <a:solidFill>
-            <a:srgbClr val="D97757"/>
+            <a:srgbClr val="DB8F2A"/>
           </a:solidFill>
           <a:ln>
             <a:noFill/>
@@ -5016,7 +8020,7 @@
             <a:r>
               <a:rPr sz="3200" b="1">
                 <a:solidFill>
-                  <a:srgbClr val="14120B"/>
+                  <a:srgbClr val="1A1612"/>
                 </a:solidFill>
                 <a:latin typeface="Georgia"/>
               </a:rPr>
@@ -5033,8 +8037,8 @@
         </p:nvSpPr>
         <p:spPr>
           <a:xfrm>
-            <a:off x="731520" y="1280160"/>
-            <a:ext cx="10515600" cy="4846320"/>
+            <a:off x="731520" y="1234440"/>
+            <a:ext cx="10607040" cy="5029200"/>
           </a:xfrm>
           <a:prstGeom prst="rect">
             <a:avLst/>
@@ -5049,77 +8053,77 @@
           <a:p>
             <a:pPr>
               <a:spcAft>
-                <a:spcPts val="600"/>
+                <a:spcPts val="800"/>
               </a:spcAft>
             </a:pPr>
             <a:r>
-              <a:rPr sz="2200" b="0">
-                <a:solidFill>
-                  <a:srgbClr val="14120B"/>
-                </a:solidFill>
-                <a:latin typeface="Calibri"/>
-              </a:rPr>
-              <a:t>•  What Agentic AI is, and why it is different from a chatbot</a:t>
+              <a:rPr sz="2000" b="0">
+                <a:solidFill>
+                  <a:srgbClr val="1A1612"/>
+                </a:solidFill>
+                <a:latin typeface="Calibri"/>
+              </a:rPr>
+              <a:t>•  What Agentic AI is, and how it differs from a normal chatbot</a:t>
             </a:r>
           </a:p>
           <a:p>
             <a:pPr>
               <a:spcAft>
-                <a:spcPts val="600"/>
+                <a:spcPts val="800"/>
               </a:spcAft>
             </a:pPr>
             <a:r>
-              <a:rPr sz="2200" b="0">
-                <a:solidFill>
-                  <a:srgbClr val="14120B"/>
-                </a:solidFill>
-                <a:latin typeface="Calibri"/>
-              </a:rPr>
-              <a:t>•  Architecture: Next.js frontend + FastAPI backend + Groq LLM</a:t>
+              <a:rPr sz="2000" b="0">
+                <a:solidFill>
+                  <a:srgbClr val="1A1612"/>
+                </a:solidFill>
+                <a:latin typeface="Calibri"/>
+              </a:rPr>
+              <a:t>•  The problem it solves and the benefits for a student, shop, or team</a:t>
             </a:r>
           </a:p>
           <a:p>
             <a:pPr>
               <a:spcAft>
-                <a:spcPts val="600"/>
+                <a:spcPts val="800"/>
               </a:spcAft>
             </a:pPr>
             <a:r>
-              <a:rPr sz="2200" b="0">
-                <a:solidFill>
-                  <a:srgbClr val="14120B"/>
-                </a:solidFill>
-                <a:latin typeface="Calibri"/>
-              </a:rPr>
-              <a:t>•  What v1.3.0 already had, and what v1.4.0 added</a:t>
+              <a:rPr sz="2000" b="0">
+                <a:solidFill>
+                  <a:srgbClr val="1A1612"/>
+                </a:solidFill>
+                <a:latin typeface="Calibri"/>
+              </a:rPr>
+              <a:t>•  Architecture: Next.js UI + FastAPI agent + Groq LLM</a:t>
             </a:r>
           </a:p>
           <a:p>
             <a:pPr>
               <a:spcAft>
-                <a:spcPts val="600"/>
+                <a:spcPts val="800"/>
               </a:spcAft>
             </a:pPr>
             <a:r>
-              <a:rPr sz="2200" b="0">
-                <a:solidFill>
-                  <a:srgbClr val="14120B"/>
-                </a:solidFill>
-                <a:latin typeface="Calibri"/>
-              </a:rPr>
-              <a:t>•  Login, chat, edit, voice, tools, and Researcher + Writer crew</a:t>
+              <a:rPr sz="2000" b="0">
+                <a:solidFill>
+                  <a:srgbClr val="1A1612"/>
+                </a:solidFill>
+                <a:latin typeface="Calibri"/>
+              </a:rPr>
+              <a:t>•  Every feature in v1.6.0 — chat, files, Teach, Projects, Notes, sandbox, artifacts</a:t>
             </a:r>
           </a:p>
           <a:p>
             <a:pPr>
               <a:spcAft>
-                <a:spcPts val="600"/>
+                <a:spcPts val="800"/>
               </a:spcAft>
             </a:pPr>
             <a:r>
-              <a:rPr sz="2200" b="0">
-                <a:solidFill>
-                  <a:srgbClr val="14120B"/>
+              <a:rPr sz="2000" b="0">
+                <a:solidFill>
+                  <a:srgbClr val="1A1612"/>
                 </a:solidFill>
                 <a:latin typeface="Calibri"/>
               </a:rPr>
@@ -5129,17 +8133,17 @@
           <a:p>
             <a:pPr>
               <a:spcAft>
-                <a:spcPts val="600"/>
+                <a:spcPts val="800"/>
               </a:spcAft>
             </a:pPr>
             <a:r>
-              <a:rPr sz="2200" b="0">
-                <a:solidFill>
-                  <a:srgbClr val="14120B"/>
-                </a:solidFill>
-                <a:latin typeface="Calibri"/>
-              </a:rPr>
-              <a:t>•  How to run it locally and what to demo in v1.4.0</a:t>
+              <a:rPr sz="2000" b="0">
+                <a:solidFill>
+                  <a:srgbClr val="1A1612"/>
+                </a:solidFill>
+                <a:latin typeface="Calibri"/>
+              </a:rPr>
+              <a:t>•  How to run it locally, demo it, and what this project is not</a:t>
             </a:r>
           </a:p>
         </p:txBody>
@@ -5153,7 +8157,7 @@
         <p:spPr>
           <a:xfrm>
             <a:off x="548640" y="6510528"/>
-            <a:ext cx="7315200" cy="274320"/>
+            <a:ext cx="8229600" cy="274320"/>
           </a:xfrm>
           <a:prstGeom prst="rect">
             <a:avLst/>
@@ -5170,11 +8174,11 @@
             <a:r>
               <a:rPr sz="1200" b="0">
                 <a:solidFill>
-                  <a:srgbClr val="6F6B63"/>
-                </a:solidFill>
-                <a:latin typeface="Calibri"/>
-              </a:rPr>
-              <a:t>Agentic AI  ·  v1.4.0</a:t>
+                  <a:srgbClr val="5E574E"/>
+                </a:solidFill>
+                <a:latin typeface="Calibri"/>
+              </a:rPr>
+              <a:t>Agentic AI  ·  v1.6.0  ·  Abhishek Mishra</a:t>
             </a:r>
           </a:p>
         </p:txBody>
@@ -5205,11 +8209,1315 @@
             <a:r>
               <a:rPr sz="1200" b="0">
                 <a:solidFill>
-                  <a:srgbClr val="6F6B63"/>
-                </a:solidFill>
-                <a:latin typeface="Calibri"/>
-              </a:rPr>
-              <a:t>2 / 14</a:t>
+                  <a:srgbClr val="5E574E"/>
+                </a:solidFill>
+                <a:latin typeface="Calibri"/>
+              </a:rPr>
+              <a:t>2 / 22</a:t>
+            </a:r>
+          </a:p>
+        </p:txBody>
+      </p:sp>
+    </p:spTree>
+  </p:cSld>
+  <p:clrMapOvr>
+    <a:masterClrMapping/>
+  </p:clrMapOvr>
+</p:sld>
+</file>
+
+<file path=ppt/slides/slide20.xml><?xml version="1.0" encoding="utf-8"?>
+<p:sld xmlns:a="http://schemas.openxmlformats.org/drawingml/2006/main" xmlns:p="http://schemas.openxmlformats.org/presentationml/2006/main" xmlns:r="http://schemas.openxmlformats.org/officeDocument/2006/relationships">
+  <p:cSld>
+    <p:spTree>
+      <p:nvGrpSpPr>
+        <p:cNvPr id="1" name=""/>
+        <p:cNvGrpSpPr/>
+        <p:nvPr/>
+      </p:nvGrpSpPr>
+      <p:grpSpPr/>
+      <p:sp>
+        <p:nvSpPr>
+          <p:cNvPr id="2" name="Rectangle 1"/>
+          <p:cNvSpPr/>
+          <p:nvPr/>
+        </p:nvSpPr>
+        <p:spPr>
+          <a:xfrm>
+            <a:off x="0" y="0"/>
+            <a:ext cx="12191695" cy="6858000"/>
+          </a:xfrm>
+          <a:prstGeom prst="rect">
+            <a:avLst/>
+          </a:prstGeom>
+          <a:solidFill>
+            <a:srgbClr val="F1F1F1"/>
+          </a:solidFill>
+          <a:ln>
+            <a:noFill/>
+          </a:ln>
+        </p:spPr>
+        <p:style>
+          <a:lnRef idx="1">
+            <a:schemeClr val="accent1"/>
+          </a:lnRef>
+          <a:fillRef idx="3">
+            <a:schemeClr val="accent1"/>
+          </a:fillRef>
+          <a:effectRef idx="2">
+            <a:schemeClr val="accent1"/>
+          </a:effectRef>
+          <a:fontRef idx="minor">
+            <a:schemeClr val="lt1"/>
+          </a:fontRef>
+        </p:style>
+        <p:txBody>
+          <a:bodyPr rtlCol="0" anchor="ctr"/>
+          <a:lstStyle/>
+          <a:p>
+            <a:pPr algn="ctr"/>
+          </a:p>
+        </p:txBody>
+      </p:sp>
+      <p:sp>
+        <p:nvSpPr>
+          <p:cNvPr id="3" name="Rectangle 2"/>
+          <p:cNvSpPr/>
+          <p:nvPr/>
+        </p:nvSpPr>
+        <p:spPr>
+          <a:xfrm>
+            <a:off x="0" y="0"/>
+            <a:ext cx="12191695" cy="109728"/>
+          </a:xfrm>
+          <a:prstGeom prst="rect">
+            <a:avLst/>
+          </a:prstGeom>
+          <a:solidFill>
+            <a:srgbClr val="DB8F2A"/>
+          </a:solidFill>
+          <a:ln>
+            <a:noFill/>
+          </a:ln>
+        </p:spPr>
+        <p:style>
+          <a:lnRef idx="1">
+            <a:schemeClr val="accent1"/>
+          </a:lnRef>
+          <a:fillRef idx="3">
+            <a:schemeClr val="accent1"/>
+          </a:fillRef>
+          <a:effectRef idx="2">
+            <a:schemeClr val="accent1"/>
+          </a:effectRef>
+          <a:fontRef idx="minor">
+            <a:schemeClr val="lt1"/>
+          </a:fontRef>
+        </p:style>
+        <p:txBody>
+          <a:bodyPr rtlCol="0" anchor="ctr"/>
+          <a:lstStyle/>
+          <a:p>
+            <a:pPr algn="ctr"/>
+          </a:p>
+        </p:txBody>
+      </p:sp>
+      <p:sp>
+        <p:nvSpPr>
+          <p:cNvPr id="4" name="TextBox 3"/>
+          <p:cNvSpPr txBox="1"/>
+          <p:nvPr/>
+        </p:nvSpPr>
+        <p:spPr>
+          <a:xfrm>
+            <a:off x="640080" y="365760"/>
+            <a:ext cx="10972800" cy="640080"/>
+          </a:xfrm>
+          <a:prstGeom prst="rect">
+            <a:avLst/>
+          </a:prstGeom>
+          <a:noFill/>
+        </p:spPr>
+        <p:txBody>
+          <a:bodyPr wrap="square">
+            <a:spAutoFit/>
+          </a:bodyPr>
+          <a:lstStyle/>
+          <a:p>
+            <a:pPr algn="l"/>
+            <a:r>
+              <a:rPr sz="3200" b="1">
+                <a:solidFill>
+                  <a:srgbClr val="1A1612"/>
+                </a:solidFill>
+                <a:latin typeface="Georgia"/>
+              </a:rPr>
+              <a:t>Project structure</a:t>
+            </a:r>
+          </a:p>
+        </p:txBody>
+      </p:sp>
+      <p:sp>
+        <p:nvSpPr>
+          <p:cNvPr id="5" name="TextBox 4"/>
+          <p:cNvSpPr txBox="1"/>
+          <p:nvPr/>
+        </p:nvSpPr>
+        <p:spPr>
+          <a:xfrm>
+            <a:off x="731520" y="1234440"/>
+            <a:ext cx="10607040" cy="5029200"/>
+          </a:xfrm>
+          <a:prstGeom prst="rect">
+            <a:avLst/>
+          </a:prstGeom>
+          <a:noFill/>
+        </p:spPr>
+        <p:txBody>
+          <a:bodyPr wrap="square">
+            <a:spAutoFit/>
+          </a:bodyPr>
+          <a:lstStyle/>
+          <a:p>
+            <a:pPr>
+              <a:spcAft>
+                <a:spcPts val="800"/>
+              </a:spcAft>
+            </a:pPr>
+            <a:r>
+              <a:rPr sz="1700" b="0">
+                <a:solidFill>
+                  <a:srgbClr val="1A1612"/>
+                </a:solidFill>
+                <a:latin typeface="Calibri"/>
+              </a:rPr>
+              <a:t>•  agentic_ai/agent.py — ReAct loop, Teach block, vision, artifacts instruction</a:t>
+            </a:r>
+          </a:p>
+          <a:p>
+            <a:pPr>
+              <a:spcAft>
+                <a:spcPts val="800"/>
+              </a:spcAft>
+            </a:pPr>
+            <a:r>
+              <a:rPr sz="1700" b="0">
+                <a:solidFill>
+                  <a:srgbClr val="1A1612"/>
+                </a:solidFill>
+                <a:latin typeface="Calibri"/>
+              </a:rPr>
+              <a:t>•  agentic_ai/tools.py — catalog + handlers (search, weather, notes, …)</a:t>
+            </a:r>
+          </a:p>
+          <a:p>
+            <a:pPr>
+              <a:spcAft>
+                <a:spcPts val="800"/>
+              </a:spcAft>
+            </a:pPr>
+            <a:r>
+              <a:rPr sz="1700" b="0">
+                <a:solidFill>
+                  <a:srgbClr val="1A1612"/>
+                </a:solidFill>
+                <a:latin typeface="Calibri"/>
+              </a:rPr>
+              <a:t>•  agentic_ai/sandbox.py — locked-down code_run</a:t>
+            </a:r>
+          </a:p>
+          <a:p>
+            <a:pPr>
+              <a:spcAft>
+                <a:spcPts val="800"/>
+              </a:spcAft>
+            </a:pPr>
+            <a:r>
+              <a:rPr sz="1700" b="0">
+                <a:solidFill>
+                  <a:srgbClr val="1A1612"/>
+                </a:solidFill>
+                <a:latin typeface="Calibri"/>
+              </a:rPr>
+              <a:t>•  agentic_ai/files.py — PDF / docx / text extract    prefs.py — settings.json + CORE_TOOLS</a:t>
+            </a:r>
+          </a:p>
+          <a:p>
+            <a:pPr>
+              <a:spcAft>
+                <a:spcPts val="800"/>
+              </a:spcAft>
+            </a:pPr>
+            <a:r>
+              <a:rPr sz="1700" b="0">
+                <a:solidFill>
+                  <a:srgbClr val="1A1612"/>
+                </a:solidFill>
+                <a:latin typeface="Calibri"/>
+              </a:rPr>
+              <a:t>•  agentic_ai/crew.py — Researcher + Writer    auth.py — sessions and OAuth</a:t>
+            </a:r>
+          </a:p>
+          <a:p>
+            <a:pPr>
+              <a:spcAft>
+                <a:spcPts val="800"/>
+              </a:spcAft>
+            </a:pPr>
+            <a:r>
+              <a:rPr sz="1700" b="0">
+                <a:solidFill>
+                  <a:srgbClr val="1A1612"/>
+                </a:solidFill>
+                <a:latin typeface="Calibri"/>
+              </a:rPr>
+              <a:t>•  app.py — FastAPI: /api/chat (SSE), /api/extract, /api/teach/*, /api/notes</a:t>
+            </a:r>
+          </a:p>
+          <a:p>
+            <a:pPr>
+              <a:spcAft>
+                <a:spcPts val="800"/>
+              </a:spcAft>
+            </a:pPr>
+            <a:r>
+              <a:rPr sz="1700" b="0">
+                <a:solidFill>
+                  <a:srgbClr val="1A1612"/>
+                </a:solidFill>
+                <a:latin typeface="Calibri"/>
+              </a:rPr>
+              <a:t>•  frontend/ — Next.js AppClient, ArtifactPane, Projects, Notes overlay</a:t>
+            </a:r>
+          </a:p>
+          <a:p>
+            <a:pPr>
+              <a:spcAft>
+                <a:spcPts val="800"/>
+              </a:spcAft>
+            </a:pPr>
+            <a:r>
+              <a:rPr sz="1700" b="0">
+                <a:solidFill>
+                  <a:srgbClr val="1A1612"/>
+                </a:solidFill>
+                <a:latin typeface="Calibri"/>
+              </a:rPr>
+              <a:t>•  main.py — CLI    Dockerfile — one-container deploy</a:t>
+            </a:r>
+          </a:p>
+        </p:txBody>
+      </p:sp>
+      <p:sp>
+        <p:nvSpPr>
+          <p:cNvPr id="6" name="TextBox 5"/>
+          <p:cNvSpPr txBox="1"/>
+          <p:nvPr/>
+        </p:nvSpPr>
+        <p:spPr>
+          <a:xfrm>
+            <a:off x="548640" y="6510528"/>
+            <a:ext cx="8229600" cy="274320"/>
+          </a:xfrm>
+          <a:prstGeom prst="rect">
+            <a:avLst/>
+          </a:prstGeom>
+          <a:noFill/>
+        </p:spPr>
+        <p:txBody>
+          <a:bodyPr wrap="square">
+            <a:spAutoFit/>
+          </a:bodyPr>
+          <a:lstStyle/>
+          <a:p>
+            <a:pPr algn="l"/>
+            <a:r>
+              <a:rPr sz="1200" b="0">
+                <a:solidFill>
+                  <a:srgbClr val="5E574E"/>
+                </a:solidFill>
+                <a:latin typeface="Calibri"/>
+              </a:rPr>
+              <a:t>Agentic AI  ·  v1.6.0  ·  Abhishek Mishra</a:t>
+            </a:r>
+          </a:p>
+        </p:txBody>
+      </p:sp>
+      <p:sp>
+        <p:nvSpPr>
+          <p:cNvPr id="7" name="TextBox 6"/>
+          <p:cNvSpPr txBox="1"/>
+          <p:nvPr/>
+        </p:nvSpPr>
+        <p:spPr>
+          <a:xfrm>
+            <a:off x="10241280" y="6510528"/>
+            <a:ext cx="1463040" cy="274320"/>
+          </a:xfrm>
+          <a:prstGeom prst="rect">
+            <a:avLst/>
+          </a:prstGeom>
+          <a:noFill/>
+        </p:spPr>
+        <p:txBody>
+          <a:bodyPr wrap="square">
+            <a:spAutoFit/>
+          </a:bodyPr>
+          <a:lstStyle/>
+          <a:p>
+            <a:pPr algn="r"/>
+            <a:r>
+              <a:rPr sz="1200" b="0">
+                <a:solidFill>
+                  <a:srgbClr val="5E574E"/>
+                </a:solidFill>
+                <a:latin typeface="Calibri"/>
+              </a:rPr>
+              <a:t>20 / 22</a:t>
+            </a:r>
+          </a:p>
+        </p:txBody>
+      </p:sp>
+    </p:spTree>
+  </p:cSld>
+  <p:clrMapOvr>
+    <a:masterClrMapping/>
+  </p:clrMapOvr>
+</p:sld>
+</file>
+
+<file path=ppt/slides/slide21.xml><?xml version="1.0" encoding="utf-8"?>
+<p:sld xmlns:a="http://schemas.openxmlformats.org/drawingml/2006/main" xmlns:p="http://schemas.openxmlformats.org/presentationml/2006/main" xmlns:r="http://schemas.openxmlformats.org/officeDocument/2006/relationships">
+  <p:cSld>
+    <p:spTree>
+      <p:nvGrpSpPr>
+        <p:cNvPr id="1" name=""/>
+        <p:cNvGrpSpPr/>
+        <p:nvPr/>
+      </p:nvGrpSpPr>
+      <p:grpSpPr/>
+      <p:sp>
+        <p:nvSpPr>
+          <p:cNvPr id="2" name="Rectangle 1"/>
+          <p:cNvSpPr/>
+          <p:nvPr/>
+        </p:nvSpPr>
+        <p:spPr>
+          <a:xfrm>
+            <a:off x="0" y="0"/>
+            <a:ext cx="12191695" cy="6858000"/>
+          </a:xfrm>
+          <a:prstGeom prst="rect">
+            <a:avLst/>
+          </a:prstGeom>
+          <a:solidFill>
+            <a:srgbClr val="F1F1F1"/>
+          </a:solidFill>
+          <a:ln>
+            <a:noFill/>
+          </a:ln>
+        </p:spPr>
+        <p:style>
+          <a:lnRef idx="1">
+            <a:schemeClr val="accent1"/>
+          </a:lnRef>
+          <a:fillRef idx="3">
+            <a:schemeClr val="accent1"/>
+          </a:fillRef>
+          <a:effectRef idx="2">
+            <a:schemeClr val="accent1"/>
+          </a:effectRef>
+          <a:fontRef idx="minor">
+            <a:schemeClr val="lt1"/>
+          </a:fontRef>
+        </p:style>
+        <p:txBody>
+          <a:bodyPr rtlCol="0" anchor="ctr"/>
+          <a:lstStyle/>
+          <a:p>
+            <a:pPr algn="ctr"/>
+          </a:p>
+        </p:txBody>
+      </p:sp>
+      <p:sp>
+        <p:nvSpPr>
+          <p:cNvPr id="3" name="Rectangle 2"/>
+          <p:cNvSpPr/>
+          <p:nvPr/>
+        </p:nvSpPr>
+        <p:spPr>
+          <a:xfrm>
+            <a:off x="0" y="0"/>
+            <a:ext cx="12191695" cy="109728"/>
+          </a:xfrm>
+          <a:prstGeom prst="rect">
+            <a:avLst/>
+          </a:prstGeom>
+          <a:solidFill>
+            <a:srgbClr val="DB8F2A"/>
+          </a:solidFill>
+          <a:ln>
+            <a:noFill/>
+          </a:ln>
+        </p:spPr>
+        <p:style>
+          <a:lnRef idx="1">
+            <a:schemeClr val="accent1"/>
+          </a:lnRef>
+          <a:fillRef idx="3">
+            <a:schemeClr val="accent1"/>
+          </a:fillRef>
+          <a:effectRef idx="2">
+            <a:schemeClr val="accent1"/>
+          </a:effectRef>
+          <a:fontRef idx="minor">
+            <a:schemeClr val="lt1"/>
+          </a:fontRef>
+        </p:style>
+        <p:txBody>
+          <a:bodyPr rtlCol="0" anchor="ctr"/>
+          <a:lstStyle/>
+          <a:p>
+            <a:pPr algn="ctr"/>
+          </a:p>
+        </p:txBody>
+      </p:sp>
+      <p:sp>
+        <p:nvSpPr>
+          <p:cNvPr id="4" name="TextBox 3"/>
+          <p:cNvSpPr txBox="1"/>
+          <p:nvPr/>
+        </p:nvSpPr>
+        <p:spPr>
+          <a:xfrm>
+            <a:off x="640080" y="292608"/>
+            <a:ext cx="10972800" cy="502920"/>
+          </a:xfrm>
+          <a:prstGeom prst="rect">
+            <a:avLst/>
+          </a:prstGeom>
+          <a:noFill/>
+        </p:spPr>
+        <p:txBody>
+          <a:bodyPr wrap="square">
+            <a:spAutoFit/>
+          </a:bodyPr>
+          <a:lstStyle/>
+          <a:p>
+            <a:pPr algn="l"/>
+            <a:r>
+              <a:rPr sz="2800" b="1">
+                <a:solidFill>
+                  <a:srgbClr val="1A1612"/>
+                </a:solidFill>
+                <a:latin typeface="Georgia"/>
+              </a:rPr>
+              <a:t>Honest scope — what it is not</a:t>
+            </a:r>
+          </a:p>
+        </p:txBody>
+      </p:sp>
+      <p:sp>
+        <p:nvSpPr>
+          <p:cNvPr id="5" name="Rounded Rectangle 4"/>
+          <p:cNvSpPr/>
+          <p:nvPr/>
+        </p:nvSpPr>
+        <p:spPr>
+          <a:xfrm>
+            <a:off x="502920" y="960120"/>
+            <a:ext cx="5394960" cy="5303520"/>
+          </a:xfrm>
+          <a:prstGeom prst="roundRect">
+            <a:avLst>
+              <a:gd name="adj" fmla="val 8000"/>
+            </a:avLst>
+          </a:prstGeom>
+          <a:solidFill>
+            <a:srgbClr val="FFFFFF"/>
+          </a:solidFill>
+          <a:ln>
+            <a:solidFill>
+              <a:srgbClr val="D4C8B8"/>
+            </a:solidFill>
+          </a:ln>
+        </p:spPr>
+        <p:style>
+          <a:lnRef idx="1">
+            <a:schemeClr val="accent1"/>
+          </a:lnRef>
+          <a:fillRef idx="3">
+            <a:schemeClr val="accent1"/>
+          </a:fillRef>
+          <a:effectRef idx="2">
+            <a:schemeClr val="accent1"/>
+          </a:effectRef>
+          <a:fontRef idx="minor">
+            <a:schemeClr val="lt1"/>
+          </a:fontRef>
+        </p:style>
+        <p:txBody>
+          <a:bodyPr rtlCol="0" anchor="ctr"/>
+          <a:lstStyle/>
+          <a:p>
+            <a:pPr algn="ctr"/>
+          </a:p>
+        </p:txBody>
+      </p:sp>
+      <p:sp>
+        <p:nvSpPr>
+          <p:cNvPr id="6" name="Rounded Rectangle 5"/>
+          <p:cNvSpPr/>
+          <p:nvPr/>
+        </p:nvSpPr>
+        <p:spPr>
+          <a:xfrm>
+            <a:off x="6263640" y="960120"/>
+            <a:ext cx="5394960" cy="5303520"/>
+          </a:xfrm>
+          <a:prstGeom prst="roundRect">
+            <a:avLst>
+              <a:gd name="adj" fmla="val 8000"/>
+            </a:avLst>
+          </a:prstGeom>
+          <a:solidFill>
+            <a:srgbClr val="FFFFFF"/>
+          </a:solidFill>
+          <a:ln>
+            <a:solidFill>
+              <a:srgbClr val="D4C8B8"/>
+            </a:solidFill>
+          </a:ln>
+        </p:spPr>
+        <p:style>
+          <a:lnRef idx="1">
+            <a:schemeClr val="accent1"/>
+          </a:lnRef>
+          <a:fillRef idx="3">
+            <a:schemeClr val="accent1"/>
+          </a:fillRef>
+          <a:effectRef idx="2">
+            <a:schemeClr val="accent1"/>
+          </a:effectRef>
+          <a:fontRef idx="minor">
+            <a:schemeClr val="lt1"/>
+          </a:fontRef>
+        </p:style>
+        <p:txBody>
+          <a:bodyPr rtlCol="0" anchor="ctr"/>
+          <a:lstStyle/>
+          <a:p>
+            <a:pPr algn="ctr"/>
+          </a:p>
+        </p:txBody>
+      </p:sp>
+      <p:sp>
+        <p:nvSpPr>
+          <p:cNvPr id="7" name="Rectangle 6"/>
+          <p:cNvSpPr/>
+          <p:nvPr/>
+        </p:nvSpPr>
+        <p:spPr>
+          <a:xfrm>
+            <a:off x="6263640" y="960120"/>
+            <a:ext cx="5394960" cy="91440"/>
+          </a:xfrm>
+          <a:prstGeom prst="rect">
+            <a:avLst/>
+          </a:prstGeom>
+          <a:solidFill>
+            <a:srgbClr val="DB8F2A"/>
+          </a:solidFill>
+          <a:ln>
+            <a:noFill/>
+          </a:ln>
+        </p:spPr>
+        <p:style>
+          <a:lnRef idx="1">
+            <a:schemeClr val="accent1"/>
+          </a:lnRef>
+          <a:fillRef idx="3">
+            <a:schemeClr val="accent1"/>
+          </a:fillRef>
+          <a:effectRef idx="2">
+            <a:schemeClr val="accent1"/>
+          </a:effectRef>
+          <a:fontRef idx="minor">
+            <a:schemeClr val="lt1"/>
+          </a:fontRef>
+        </p:style>
+        <p:txBody>
+          <a:bodyPr rtlCol="0" anchor="ctr"/>
+          <a:lstStyle/>
+          <a:p>
+            <a:pPr algn="ctr"/>
+          </a:p>
+        </p:txBody>
+      </p:sp>
+      <p:sp>
+        <p:nvSpPr>
+          <p:cNvPr id="8" name="TextBox 7"/>
+          <p:cNvSpPr txBox="1"/>
+          <p:nvPr/>
+        </p:nvSpPr>
+        <p:spPr>
+          <a:xfrm>
+            <a:off x="777240" y="1143000"/>
+            <a:ext cx="4937760" cy="457200"/>
+          </a:xfrm>
+          <a:prstGeom prst="rect">
+            <a:avLst/>
+          </a:prstGeom>
+          <a:noFill/>
+        </p:spPr>
+        <p:txBody>
+          <a:bodyPr wrap="square">
+            <a:spAutoFit/>
+          </a:bodyPr>
+          <a:lstStyle/>
+          <a:p>
+            <a:pPr algn="l"/>
+            <a:r>
+              <a:rPr sz="2000" b="1">
+                <a:solidFill>
+                  <a:srgbClr val="5E574E"/>
+                </a:solidFill>
+                <a:latin typeface="Calibri"/>
+              </a:rPr>
+              <a:t>This app does</a:t>
+            </a:r>
+          </a:p>
+        </p:txBody>
+      </p:sp>
+      <p:sp>
+        <p:nvSpPr>
+          <p:cNvPr id="9" name="TextBox 8"/>
+          <p:cNvSpPr txBox="1"/>
+          <p:nvPr/>
+        </p:nvSpPr>
+        <p:spPr>
+          <a:xfrm>
+            <a:off x="6537960" y="1143000"/>
+            <a:ext cx="4937760" cy="457200"/>
+          </a:xfrm>
+          <a:prstGeom prst="rect">
+            <a:avLst/>
+          </a:prstGeom>
+          <a:noFill/>
+        </p:spPr>
+        <p:txBody>
+          <a:bodyPr wrap="square">
+            <a:spAutoFit/>
+          </a:bodyPr>
+          <a:lstStyle/>
+          <a:p>
+            <a:pPr algn="l"/>
+            <a:r>
+              <a:rPr sz="2000" b="1">
+                <a:solidFill>
+                  <a:srgbClr val="B8741C"/>
+                </a:solidFill>
+                <a:latin typeface="Calibri"/>
+              </a:rPr>
+              <a:t>It does not (on purpose)</a:t>
+            </a:r>
+          </a:p>
+        </p:txBody>
+      </p:sp>
+      <p:sp>
+        <p:nvSpPr>
+          <p:cNvPr id="10" name="TextBox 9"/>
+          <p:cNvSpPr txBox="1"/>
+          <p:nvPr/>
+        </p:nvSpPr>
+        <p:spPr>
+          <a:xfrm>
+            <a:off x="777240" y="1691640"/>
+            <a:ext cx="4892040" cy="4297680"/>
+          </a:xfrm>
+          <a:prstGeom prst="rect">
+            <a:avLst/>
+          </a:prstGeom>
+          <a:noFill/>
+        </p:spPr>
+        <p:txBody>
+          <a:bodyPr wrap="square">
+            <a:spAutoFit/>
+          </a:bodyPr>
+          <a:lstStyle/>
+          <a:p>
+            <a:pPr>
+              <a:spcAft>
+                <a:spcPts val="800"/>
+              </a:spcAft>
+            </a:pPr>
+            <a:r>
+              <a:rPr sz="1600" b="0">
+                <a:solidFill>
+                  <a:srgbClr val="1A1612"/>
+                </a:solidFill>
+                <a:latin typeface="Calibri"/>
+              </a:rPr>
+              <a:t>•  ReAct agent with real tools you can read in Python</a:t>
+            </a:r>
+          </a:p>
+          <a:p>
+            <a:pPr>
+              <a:spcAft>
+                <a:spcPts val="800"/>
+              </a:spcAft>
+            </a:pPr>
+            <a:r>
+              <a:rPr sz="1600" b="0">
+                <a:solidFill>
+                  <a:srgbClr val="1A1612"/>
+                </a:solidFill>
+                <a:latin typeface="Calibri"/>
+              </a:rPr>
+              <a:t>•  Chat UI with files, voice, projects, notes, artifacts</a:t>
+            </a:r>
+          </a:p>
+          <a:p>
+            <a:pPr>
+              <a:spcAft>
+                <a:spcPts val="800"/>
+              </a:spcAft>
+            </a:pPr>
+            <a:r>
+              <a:rPr sz="1600" b="0">
+                <a:solidFill>
+                  <a:srgbClr val="1A1612"/>
+                </a:solidFill>
+                <a:latin typeface="Calibri"/>
+              </a:rPr>
+              <a:t>•  Memory via Teach + project files (prompt context)</a:t>
+            </a:r>
+          </a:p>
+          <a:p>
+            <a:pPr>
+              <a:spcAft>
+                <a:spcPts val="800"/>
+              </a:spcAft>
+            </a:pPr>
+            <a:r>
+              <a:rPr sz="1600" b="0">
+                <a:solidFill>
+                  <a:srgbClr val="1A1612"/>
+                </a:solidFill>
+                <a:latin typeface="Calibri"/>
+              </a:rPr>
+              <a:t>•  Short sandboxed Python</a:t>
+            </a:r>
+          </a:p>
+          <a:p>
+            <a:pPr>
+              <a:spcAft>
+                <a:spcPts val="800"/>
+              </a:spcAft>
+            </a:pPr>
+            <a:r>
+              <a:rPr sz="1600" b="0">
+                <a:solidFill>
+                  <a:srgbClr val="1A1612"/>
+                </a:solidFill>
+                <a:latin typeface="Calibri"/>
+              </a:rPr>
+              <a:t>•  Local or one Docker host</a:t>
+            </a:r>
+          </a:p>
+        </p:txBody>
+      </p:sp>
+      <p:sp>
+        <p:nvSpPr>
+          <p:cNvPr id="11" name="TextBox 10"/>
+          <p:cNvSpPr txBox="1"/>
+          <p:nvPr/>
+        </p:nvSpPr>
+        <p:spPr>
+          <a:xfrm>
+            <a:off x="6537960" y="1691640"/>
+            <a:ext cx="4892040" cy="4297680"/>
+          </a:xfrm>
+          <a:prstGeom prst="rect">
+            <a:avLst/>
+          </a:prstGeom>
+          <a:noFill/>
+        </p:spPr>
+        <p:txBody>
+          <a:bodyPr wrap="square">
+            <a:spAutoFit/>
+          </a:bodyPr>
+          <a:lstStyle/>
+          <a:p>
+            <a:pPr>
+              <a:spcAft>
+                <a:spcPts val="800"/>
+              </a:spcAft>
+            </a:pPr>
+            <a:r>
+              <a:rPr sz="1600" b="0">
+                <a:solidFill>
+                  <a:srgbClr val="1A1612"/>
+                </a:solidFill>
+                <a:latin typeface="Calibri"/>
+              </a:rPr>
+              <a:t>•  Clone Claude Code or Computer Use</a:t>
+            </a:r>
+          </a:p>
+          <a:p>
+            <a:pPr>
+              <a:spcAft>
+                <a:spcPts val="800"/>
+              </a:spcAft>
+            </a:pPr>
+            <a:r>
+              <a:rPr sz="1600" b="0">
+                <a:solidFill>
+                  <a:srgbClr val="1A1612"/>
+                </a:solidFill>
+                <a:latin typeface="Calibri"/>
+              </a:rPr>
+              <a:t>•  Fine-tune / train a new neural model on GPU</a:t>
+            </a:r>
+          </a:p>
+          <a:p>
+            <a:pPr>
+              <a:spcAft>
+                <a:spcPts val="800"/>
+              </a:spcAft>
+            </a:pPr>
+            <a:r>
+              <a:rPr sz="1600" b="0">
+                <a:solidFill>
+                  <a:srgbClr val="1A1612"/>
+                </a:solidFill>
+                <a:latin typeface="Calibri"/>
+              </a:rPr>
+              <a:t>•  Give the model your whole OS or browser</a:t>
+            </a:r>
+          </a:p>
+          <a:p>
+            <a:pPr>
+              <a:spcAft>
+                <a:spcPts val="800"/>
+              </a:spcAft>
+            </a:pPr>
+            <a:r>
+              <a:rPr sz="1600" b="0">
+                <a:solidFill>
+                  <a:srgbClr val="1A1612"/>
+                </a:solidFill>
+                <a:latin typeface="Calibri"/>
+              </a:rPr>
+              <a:t>•  Connect Gmail / Drive / Calendar (no extra OAuth yet)</a:t>
+            </a:r>
+          </a:p>
+          <a:p>
+            <a:pPr>
+              <a:spcAft>
+                <a:spcPts val="800"/>
+              </a:spcAft>
+            </a:pPr>
+            <a:r>
+              <a:rPr sz="1600" b="0">
+                <a:solidFill>
+                  <a:srgbClr val="1A1612"/>
+                </a:solidFill>
+                <a:latin typeface="Calibri"/>
+              </a:rPr>
+              <a:t>•  Replace LangGraph for huge production graphs</a:t>
+            </a:r>
+          </a:p>
+        </p:txBody>
+      </p:sp>
+      <p:sp>
+        <p:nvSpPr>
+          <p:cNvPr id="12" name="TextBox 11"/>
+          <p:cNvSpPr txBox="1"/>
+          <p:nvPr/>
+        </p:nvSpPr>
+        <p:spPr>
+          <a:xfrm>
+            <a:off x="548640" y="6510528"/>
+            <a:ext cx="8229600" cy="274320"/>
+          </a:xfrm>
+          <a:prstGeom prst="rect">
+            <a:avLst/>
+          </a:prstGeom>
+          <a:noFill/>
+        </p:spPr>
+        <p:txBody>
+          <a:bodyPr wrap="square">
+            <a:spAutoFit/>
+          </a:bodyPr>
+          <a:lstStyle/>
+          <a:p>
+            <a:pPr algn="l"/>
+            <a:r>
+              <a:rPr sz="1200" b="0">
+                <a:solidFill>
+                  <a:srgbClr val="5E574E"/>
+                </a:solidFill>
+                <a:latin typeface="Calibri"/>
+              </a:rPr>
+              <a:t>Agentic AI  ·  v1.6.0  ·  Abhishek Mishra</a:t>
+            </a:r>
+          </a:p>
+        </p:txBody>
+      </p:sp>
+      <p:sp>
+        <p:nvSpPr>
+          <p:cNvPr id="13" name="TextBox 12"/>
+          <p:cNvSpPr txBox="1"/>
+          <p:nvPr/>
+        </p:nvSpPr>
+        <p:spPr>
+          <a:xfrm>
+            <a:off x="10241280" y="6510528"/>
+            <a:ext cx="1463040" cy="274320"/>
+          </a:xfrm>
+          <a:prstGeom prst="rect">
+            <a:avLst/>
+          </a:prstGeom>
+          <a:noFill/>
+        </p:spPr>
+        <p:txBody>
+          <a:bodyPr wrap="square">
+            <a:spAutoFit/>
+          </a:bodyPr>
+          <a:lstStyle/>
+          <a:p>
+            <a:pPr algn="r"/>
+            <a:r>
+              <a:rPr sz="1200" b="0">
+                <a:solidFill>
+                  <a:srgbClr val="5E574E"/>
+                </a:solidFill>
+                <a:latin typeface="Calibri"/>
+              </a:rPr>
+              <a:t>21 / 22</a:t>
+            </a:r>
+          </a:p>
+        </p:txBody>
+      </p:sp>
+    </p:spTree>
+  </p:cSld>
+  <p:clrMapOvr>
+    <a:masterClrMapping/>
+  </p:clrMapOvr>
+</p:sld>
+</file>
+
+<file path=ppt/slides/slide22.xml><?xml version="1.0" encoding="utf-8"?>
+<p:sld xmlns:a="http://schemas.openxmlformats.org/drawingml/2006/main" xmlns:p="http://schemas.openxmlformats.org/presentationml/2006/main" xmlns:r="http://schemas.openxmlformats.org/officeDocument/2006/relationships">
+  <p:cSld>
+    <p:spTree>
+      <p:nvGrpSpPr>
+        <p:cNvPr id="1" name=""/>
+        <p:cNvGrpSpPr/>
+        <p:nvPr/>
+      </p:nvGrpSpPr>
+      <p:grpSpPr/>
+      <p:sp>
+        <p:nvSpPr>
+          <p:cNvPr id="2" name="Rectangle 1"/>
+          <p:cNvSpPr/>
+          <p:nvPr/>
+        </p:nvSpPr>
+        <p:spPr>
+          <a:xfrm>
+            <a:off x="0" y="0"/>
+            <a:ext cx="12191695" cy="6858000"/>
+          </a:xfrm>
+          <a:prstGeom prst="rect">
+            <a:avLst/>
+          </a:prstGeom>
+          <a:solidFill>
+            <a:srgbClr val="DACEBE"/>
+          </a:solidFill>
+          <a:ln>
+            <a:noFill/>
+          </a:ln>
+        </p:spPr>
+        <p:style>
+          <a:lnRef idx="1">
+            <a:schemeClr val="accent1"/>
+          </a:lnRef>
+          <a:fillRef idx="3">
+            <a:schemeClr val="accent1"/>
+          </a:fillRef>
+          <a:effectRef idx="2">
+            <a:schemeClr val="accent1"/>
+          </a:effectRef>
+          <a:fontRef idx="minor">
+            <a:schemeClr val="lt1"/>
+          </a:fontRef>
+        </p:style>
+        <p:txBody>
+          <a:bodyPr rtlCol="0" anchor="ctr"/>
+          <a:lstStyle/>
+          <a:p>
+            <a:pPr algn="ctr"/>
+          </a:p>
+        </p:txBody>
+      </p:sp>
+      <p:sp>
+        <p:nvSpPr>
+          <p:cNvPr id="3" name="Rectangle 2"/>
+          <p:cNvSpPr/>
+          <p:nvPr/>
+        </p:nvSpPr>
+        <p:spPr>
+          <a:xfrm>
+            <a:off x="0" y="0"/>
+            <a:ext cx="256032" cy="6858000"/>
+          </a:xfrm>
+          <a:prstGeom prst="rect">
+            <a:avLst/>
+          </a:prstGeom>
+          <a:solidFill>
+            <a:srgbClr val="DB8F2A"/>
+          </a:solidFill>
+          <a:ln>
+            <a:noFill/>
+          </a:ln>
+        </p:spPr>
+        <p:style>
+          <a:lnRef idx="1">
+            <a:schemeClr val="accent1"/>
+          </a:lnRef>
+          <a:fillRef idx="3">
+            <a:schemeClr val="accent1"/>
+          </a:fillRef>
+          <a:effectRef idx="2">
+            <a:schemeClr val="accent1"/>
+          </a:effectRef>
+          <a:fontRef idx="minor">
+            <a:schemeClr val="lt1"/>
+          </a:fontRef>
+        </p:style>
+        <p:txBody>
+          <a:bodyPr rtlCol="0" anchor="ctr"/>
+          <a:lstStyle/>
+          <a:p>
+            <a:pPr algn="ctr"/>
+          </a:p>
+        </p:txBody>
+      </p:sp>
+      <p:sp>
+        <p:nvSpPr>
+          <p:cNvPr id="4" name="4-Point Star 3"/>
+          <p:cNvSpPr/>
+          <p:nvPr/>
+        </p:nvSpPr>
+        <p:spPr>
+          <a:xfrm>
+            <a:off x="777240" y="1554480"/>
+            <a:ext cx="566928" cy="566928"/>
+          </a:xfrm>
+          <a:prstGeom prst="star4">
+            <a:avLst/>
+          </a:prstGeom>
+          <a:solidFill>
+            <a:srgbClr val="DB8F2A"/>
+          </a:solidFill>
+          <a:ln>
+            <a:noFill/>
+          </a:ln>
+        </p:spPr>
+        <p:style>
+          <a:lnRef idx="1">
+            <a:schemeClr val="accent1"/>
+          </a:lnRef>
+          <a:fillRef idx="3">
+            <a:schemeClr val="accent1"/>
+          </a:fillRef>
+          <a:effectRef idx="2">
+            <a:schemeClr val="accent1"/>
+          </a:effectRef>
+          <a:fontRef idx="minor">
+            <a:schemeClr val="lt1"/>
+          </a:fontRef>
+        </p:style>
+        <p:txBody>
+          <a:bodyPr rtlCol="0" anchor="ctr"/>
+          <a:lstStyle/>
+          <a:p>
+            <a:pPr algn="ctr"/>
+          </a:p>
+        </p:txBody>
+      </p:sp>
+      <p:sp>
+        <p:nvSpPr>
+          <p:cNvPr id="5" name="TextBox 4"/>
+          <p:cNvSpPr txBox="1"/>
+          <p:nvPr/>
+        </p:nvSpPr>
+        <p:spPr>
+          <a:xfrm>
+            <a:off x="777240" y="2286000"/>
+            <a:ext cx="10972800" cy="822960"/>
+          </a:xfrm>
+          <a:prstGeom prst="rect">
+            <a:avLst/>
+          </a:prstGeom>
+          <a:noFill/>
+        </p:spPr>
+        <p:txBody>
+          <a:bodyPr wrap="square">
+            <a:spAutoFit/>
+          </a:bodyPr>
+          <a:lstStyle/>
+          <a:p>
+            <a:pPr algn="l"/>
+            <a:r>
+              <a:rPr sz="4800" b="1">
+                <a:solidFill>
+                  <a:srgbClr val="1A1612"/>
+                </a:solidFill>
+                <a:latin typeface="Georgia"/>
+              </a:rPr>
+              <a:t>Thank you</a:t>
+            </a:r>
+          </a:p>
+        </p:txBody>
+      </p:sp>
+      <p:sp>
+        <p:nvSpPr>
+          <p:cNvPr id="6" name="TextBox 5"/>
+          <p:cNvSpPr txBox="1"/>
+          <p:nvPr/>
+        </p:nvSpPr>
+        <p:spPr>
+          <a:xfrm>
+            <a:off x="777240" y="3154680"/>
+            <a:ext cx="10515600" cy="640080"/>
+          </a:xfrm>
+          <a:prstGeom prst="rect">
+            <a:avLst/>
+          </a:prstGeom>
+          <a:noFill/>
+        </p:spPr>
+        <p:txBody>
+          <a:bodyPr wrap="square">
+            <a:spAutoFit/>
+          </a:bodyPr>
+          <a:lstStyle/>
+          <a:p>
+            <a:pPr algn="l"/>
+            <a:r>
+              <a:rPr sz="2200" b="1">
+                <a:solidFill>
+                  <a:srgbClr val="B8741C"/>
+                </a:solidFill>
+                <a:latin typeface="Calibri"/>
+              </a:rPr>
+              <a:t>Built and developed by Abhishek Mishra</a:t>
+            </a:r>
+          </a:p>
+        </p:txBody>
+      </p:sp>
+      <p:sp>
+        <p:nvSpPr>
+          <p:cNvPr id="7" name="TextBox 6"/>
+          <p:cNvSpPr txBox="1"/>
+          <p:nvPr/>
+        </p:nvSpPr>
+        <p:spPr>
+          <a:xfrm>
+            <a:off x="777240" y="3840480"/>
+            <a:ext cx="10515600" cy="640080"/>
+          </a:xfrm>
+          <a:prstGeom prst="rect">
+            <a:avLst/>
+          </a:prstGeom>
+          <a:noFill/>
+        </p:spPr>
+        <p:txBody>
+          <a:bodyPr wrap="square">
+            <a:spAutoFit/>
+          </a:bodyPr>
+          <a:lstStyle/>
+          <a:p>
+            <a:pPr algn="l"/>
+            <a:r>
+              <a:rPr sz="1800" b="0">
+                <a:solidFill>
+                  <a:srgbClr val="5E574E"/>
+                </a:solidFill>
+                <a:latin typeface="Calibri"/>
+              </a:rPr>
+              <a:t>Questions, ideas, or a live demo — open the app and try the script.</a:t>
+            </a:r>
+          </a:p>
+        </p:txBody>
+      </p:sp>
+      <p:sp>
+        <p:nvSpPr>
+          <p:cNvPr id="8" name="TextBox 7"/>
+          <p:cNvSpPr txBox="1"/>
+          <p:nvPr/>
+        </p:nvSpPr>
+        <p:spPr>
+          <a:xfrm>
+            <a:off x="777240" y="4846320"/>
+            <a:ext cx="10058400" cy="320040"/>
+          </a:xfrm>
+          <a:prstGeom prst="rect">
+            <a:avLst/>
+          </a:prstGeom>
+          <a:noFill/>
+        </p:spPr>
+        <p:txBody>
+          <a:bodyPr wrap="square">
+            <a:spAutoFit/>
+          </a:bodyPr>
+          <a:lstStyle/>
+          <a:p>
+            <a:pPr algn="l"/>
+            <a:r>
+              <a:rPr sz="1800" b="1">
+                <a:solidFill>
+                  <a:srgbClr val="1A1612"/>
+                </a:solidFill>
+                <a:latin typeface="Calibri"/>
+              </a:rPr>
+              <a:t>http://127.0.0.1:3000</a:t>
+            </a:r>
+          </a:p>
+        </p:txBody>
+      </p:sp>
+      <p:sp>
+        <p:nvSpPr>
+          <p:cNvPr id="9" name="TextBox 8"/>
+          <p:cNvSpPr txBox="1"/>
+          <p:nvPr/>
+        </p:nvSpPr>
+        <p:spPr>
+          <a:xfrm>
+            <a:off x="777240" y="5257800"/>
+            <a:ext cx="10058400" cy="320040"/>
+          </a:xfrm>
+          <a:prstGeom prst="rect">
+            <a:avLst/>
+          </a:prstGeom>
+          <a:noFill/>
+        </p:spPr>
+        <p:txBody>
+          <a:bodyPr wrap="square">
+            <a:spAutoFit/>
+          </a:bodyPr>
+          <a:lstStyle/>
+          <a:p>
+            <a:pPr algn="l"/>
+            <a:r>
+              <a:rPr sz="1600" b="0">
+                <a:solidFill>
+                  <a:srgbClr val="5E574E"/>
+                </a:solidFill>
+                <a:latin typeface="Calibri"/>
+              </a:rPr>
+              <a:t>Live: https://agentic-ai-d0cx.onrender.com</a:t>
             </a:r>
           </a:p>
         </p:txBody>
@@ -5247,7 +9555,7 @@
             <a:avLst/>
           </a:prstGeom>
           <a:solidFill>
-            <a:srgbClr val="F7F4EF"/>
+            <a:srgbClr val="F1F1F1"/>
           </a:solidFill>
           <a:ln>
             <a:noFill/>
@@ -5290,7 +9598,7 @@
             <a:avLst/>
           </a:prstGeom>
           <a:solidFill>
-            <a:srgbClr val="D97757"/>
+            <a:srgbClr val="DB8F2A"/>
           </a:solidFill>
           <a:ln>
             <a:noFill/>
@@ -5326,8 +9634,8 @@
         </p:nvSpPr>
         <p:spPr>
           <a:xfrm>
-            <a:off x="640080" y="365760"/>
-            <a:ext cx="10972800" cy="640080"/>
+            <a:off x="640080" y="292608"/>
+            <a:ext cx="10972800" cy="502920"/>
           </a:xfrm>
           <a:prstGeom prst="rect">
             <a:avLst/>
@@ -5342,27 +9650,234 @@
           <a:p>
             <a:pPr algn="l"/>
             <a:r>
-              <a:rPr sz="3200" b="1">
-                <a:solidFill>
-                  <a:srgbClr val="14120B"/>
+              <a:rPr sz="2800" b="1">
+                <a:solidFill>
+                  <a:srgbClr val="1A1612"/>
                 </a:solidFill>
                 <a:latin typeface="Georgia"/>
               </a:rPr>
-              <a:t>The idea</a:t>
-            </a:r>
-          </a:p>
-        </p:txBody>
-      </p:sp>
-      <p:sp>
-        <p:nvSpPr>
-          <p:cNvPr id="5" name="TextBox 4"/>
-          <p:cNvSpPr txBox="1"/>
-          <p:nvPr/>
-        </p:nvSpPr>
-        <p:spPr>
-          <a:xfrm>
-            <a:off x="731520" y="1280160"/>
-            <a:ext cx="10515600" cy="4846320"/>
+              <a:t>Chatbot vs Agentic AI</a:t>
+            </a:r>
+          </a:p>
+        </p:txBody>
+      </p:sp>
+      <p:sp>
+        <p:nvSpPr>
+          <p:cNvPr id="5" name="Rounded Rectangle 4"/>
+          <p:cNvSpPr/>
+          <p:nvPr/>
+        </p:nvSpPr>
+        <p:spPr>
+          <a:xfrm>
+            <a:off x="502920" y="960120"/>
+            <a:ext cx="5394960" cy="5303520"/>
+          </a:xfrm>
+          <a:prstGeom prst="roundRect">
+            <a:avLst>
+              <a:gd name="adj" fmla="val 8000"/>
+            </a:avLst>
+          </a:prstGeom>
+          <a:solidFill>
+            <a:srgbClr val="FFFFFF"/>
+          </a:solidFill>
+          <a:ln>
+            <a:solidFill>
+              <a:srgbClr val="D4C8B8"/>
+            </a:solidFill>
+          </a:ln>
+        </p:spPr>
+        <p:style>
+          <a:lnRef idx="1">
+            <a:schemeClr val="accent1"/>
+          </a:lnRef>
+          <a:fillRef idx="3">
+            <a:schemeClr val="accent1"/>
+          </a:fillRef>
+          <a:effectRef idx="2">
+            <a:schemeClr val="accent1"/>
+          </a:effectRef>
+          <a:fontRef idx="minor">
+            <a:schemeClr val="lt1"/>
+          </a:fontRef>
+        </p:style>
+        <p:txBody>
+          <a:bodyPr rtlCol="0" anchor="ctr"/>
+          <a:lstStyle/>
+          <a:p>
+            <a:pPr algn="ctr"/>
+          </a:p>
+        </p:txBody>
+      </p:sp>
+      <p:sp>
+        <p:nvSpPr>
+          <p:cNvPr id="6" name="Rounded Rectangle 5"/>
+          <p:cNvSpPr/>
+          <p:nvPr/>
+        </p:nvSpPr>
+        <p:spPr>
+          <a:xfrm>
+            <a:off x="6263640" y="960120"/>
+            <a:ext cx="5394960" cy="5303520"/>
+          </a:xfrm>
+          <a:prstGeom prst="roundRect">
+            <a:avLst>
+              <a:gd name="adj" fmla="val 8000"/>
+            </a:avLst>
+          </a:prstGeom>
+          <a:solidFill>
+            <a:srgbClr val="FFFFFF"/>
+          </a:solidFill>
+          <a:ln>
+            <a:solidFill>
+              <a:srgbClr val="D4C8B8"/>
+            </a:solidFill>
+          </a:ln>
+        </p:spPr>
+        <p:style>
+          <a:lnRef idx="1">
+            <a:schemeClr val="accent1"/>
+          </a:lnRef>
+          <a:fillRef idx="3">
+            <a:schemeClr val="accent1"/>
+          </a:fillRef>
+          <a:effectRef idx="2">
+            <a:schemeClr val="accent1"/>
+          </a:effectRef>
+          <a:fontRef idx="minor">
+            <a:schemeClr val="lt1"/>
+          </a:fontRef>
+        </p:style>
+        <p:txBody>
+          <a:bodyPr rtlCol="0" anchor="ctr"/>
+          <a:lstStyle/>
+          <a:p>
+            <a:pPr algn="ctr"/>
+          </a:p>
+        </p:txBody>
+      </p:sp>
+      <p:sp>
+        <p:nvSpPr>
+          <p:cNvPr id="7" name="Rectangle 6"/>
+          <p:cNvSpPr/>
+          <p:nvPr/>
+        </p:nvSpPr>
+        <p:spPr>
+          <a:xfrm>
+            <a:off x="6263640" y="960120"/>
+            <a:ext cx="5394960" cy="91440"/>
+          </a:xfrm>
+          <a:prstGeom prst="rect">
+            <a:avLst/>
+          </a:prstGeom>
+          <a:solidFill>
+            <a:srgbClr val="DB8F2A"/>
+          </a:solidFill>
+          <a:ln>
+            <a:noFill/>
+          </a:ln>
+        </p:spPr>
+        <p:style>
+          <a:lnRef idx="1">
+            <a:schemeClr val="accent1"/>
+          </a:lnRef>
+          <a:fillRef idx="3">
+            <a:schemeClr val="accent1"/>
+          </a:fillRef>
+          <a:effectRef idx="2">
+            <a:schemeClr val="accent1"/>
+          </a:effectRef>
+          <a:fontRef idx="minor">
+            <a:schemeClr val="lt1"/>
+          </a:fontRef>
+        </p:style>
+        <p:txBody>
+          <a:bodyPr rtlCol="0" anchor="ctr"/>
+          <a:lstStyle/>
+          <a:p>
+            <a:pPr algn="ctr"/>
+          </a:p>
+        </p:txBody>
+      </p:sp>
+      <p:sp>
+        <p:nvSpPr>
+          <p:cNvPr id="8" name="TextBox 7"/>
+          <p:cNvSpPr txBox="1"/>
+          <p:nvPr/>
+        </p:nvSpPr>
+        <p:spPr>
+          <a:xfrm>
+            <a:off x="777240" y="1143000"/>
+            <a:ext cx="4937760" cy="457200"/>
+          </a:xfrm>
+          <a:prstGeom prst="rect">
+            <a:avLst/>
+          </a:prstGeom>
+          <a:noFill/>
+        </p:spPr>
+        <p:txBody>
+          <a:bodyPr wrap="square">
+            <a:spAutoFit/>
+          </a:bodyPr>
+          <a:lstStyle/>
+          <a:p>
+            <a:pPr algn="l"/>
+            <a:r>
+              <a:rPr sz="2000" b="1">
+                <a:solidFill>
+                  <a:srgbClr val="5E574E"/>
+                </a:solidFill>
+                <a:latin typeface="Calibri"/>
+              </a:rPr>
+              <a:t>Normal chatbot</a:t>
+            </a:r>
+          </a:p>
+        </p:txBody>
+      </p:sp>
+      <p:sp>
+        <p:nvSpPr>
+          <p:cNvPr id="9" name="TextBox 8"/>
+          <p:cNvSpPr txBox="1"/>
+          <p:nvPr/>
+        </p:nvSpPr>
+        <p:spPr>
+          <a:xfrm>
+            <a:off x="6537960" y="1143000"/>
+            <a:ext cx="4937760" cy="457200"/>
+          </a:xfrm>
+          <a:prstGeom prst="rect">
+            <a:avLst/>
+          </a:prstGeom>
+          <a:noFill/>
+        </p:spPr>
+        <p:txBody>
+          <a:bodyPr wrap="square">
+            <a:spAutoFit/>
+          </a:bodyPr>
+          <a:lstStyle/>
+          <a:p>
+            <a:pPr algn="l"/>
+            <a:r>
+              <a:rPr sz="2000" b="1">
+                <a:solidFill>
+                  <a:srgbClr val="B8741C"/>
+                </a:solidFill>
+                <a:latin typeface="Calibri"/>
+              </a:rPr>
+              <a:t>This project — an agent</a:t>
+            </a:r>
+          </a:p>
+        </p:txBody>
+      </p:sp>
+      <p:sp>
+        <p:nvSpPr>
+          <p:cNvPr id="10" name="TextBox 9"/>
+          <p:cNvSpPr txBox="1"/>
+          <p:nvPr/>
+        </p:nvSpPr>
+        <p:spPr>
+          <a:xfrm>
+            <a:off x="777240" y="1691640"/>
+            <a:ext cx="4892040" cy="4297680"/>
           </a:xfrm>
           <a:prstGeom prst="rect">
             <a:avLst/>
@@ -5377,95 +9892,230 @@
           <a:p>
             <a:pPr>
               <a:spcAft>
-                <a:spcPts val="600"/>
+                <a:spcPts val="800"/>
               </a:spcAft>
             </a:pPr>
             <a:r>
-              <a:rPr sz="2200" b="0">
-                <a:solidFill>
-                  <a:srgbClr val="14120B"/>
-                </a:solidFill>
-                <a:latin typeface="Calibri"/>
-              </a:rPr>
-              <a:t>•  A normal chatbot only talks. An agent can act.</a:t>
+              <a:rPr sz="1600" b="0">
+                <a:solidFill>
+                  <a:srgbClr val="1A1612"/>
+                </a:solidFill>
+                <a:latin typeface="Calibri"/>
+              </a:rPr>
+              <a:t>•  User types → model replies with text</a:t>
             </a:r>
           </a:p>
           <a:p>
             <a:pPr>
               <a:spcAft>
-                <a:spcPts val="600"/>
+                <a:spcPts val="800"/>
               </a:spcAft>
             </a:pPr>
             <a:r>
-              <a:rPr sz="2200" b="0">
-                <a:solidFill>
-                  <a:srgbClr val="14120B"/>
-                </a:solidFill>
-                <a:latin typeface="Calibri"/>
-              </a:rPr>
-              <a:t>•  Agentic AI plans a step, calls a tool, reads the result, then answers.</a:t>
+              <a:rPr sz="1600" b="0">
+                <a:solidFill>
+                  <a:srgbClr val="1A1612"/>
+                </a:solidFill>
+                <a:latin typeface="Calibri"/>
+              </a:rPr>
+              <a:t>•  Cannot search live prices or weather</a:t>
             </a:r>
           </a:p>
           <a:p>
             <a:pPr>
               <a:spcAft>
-                <a:spcPts val="600"/>
+                <a:spcPts val="800"/>
               </a:spcAft>
             </a:pPr>
             <a:r>
-              <a:rPr sz="2200" b="0">
-                <a:solidFill>
-                  <a:srgbClr val="14120B"/>
-                </a:solidFill>
-                <a:latin typeface="Calibri"/>
-              </a:rPr>
-              <a:t>•  It can search the web, check weather, do math, look up GitHub, and more.</a:t>
+              <a:rPr sz="1600" b="0">
+                <a:solidFill>
+                  <a:srgbClr val="1A1612"/>
+                </a:solidFill>
+                <a:latin typeface="Calibri"/>
+              </a:rPr>
+              <a:t>•  Cannot do exact math or run code</a:t>
             </a:r>
           </a:p>
           <a:p>
             <a:pPr>
               <a:spcAft>
-                <a:spcPts val="600"/>
+                <a:spcPts val="800"/>
               </a:spcAft>
             </a:pPr>
             <a:r>
-              <a:rPr sz="2200" b="0">
-                <a:solidFill>
-                  <a:srgbClr val="14120B"/>
-                </a:solidFill>
-                <a:latin typeface="Calibri"/>
-              </a:rPr>
-              <a:t>•  The user stays in a Claude-like chat. The tools stay behind the scenes.</a:t>
+              <a:rPr sz="1600" b="0">
+                <a:solidFill>
+                  <a:srgbClr val="1A1612"/>
+                </a:solidFill>
+                <a:latin typeface="Calibri"/>
+              </a:rPr>
+              <a:t>•  Forgets your shop, files, and style next chat</a:t>
             </a:r>
           </a:p>
           <a:p>
             <a:pPr>
               <a:spcAft>
-                <a:spcPts val="600"/>
+                <a:spcPts val="800"/>
               </a:spcAft>
             </a:pPr>
             <a:r>
-              <a:rPr sz="2200" b="0">
-                <a:solidFill>
-                  <a:srgbClr val="14120B"/>
-                </a:solidFill>
-                <a:latin typeface="Calibri"/>
-              </a:rPr>
-              <a:t>•  Everything runs on your machine — no cloud app hosting required.</a:t>
-            </a:r>
-          </a:p>
-        </p:txBody>
-      </p:sp>
-      <p:sp>
-        <p:nvSpPr>
-          <p:cNvPr id="6" name="TextBox 5"/>
+              <a:rPr sz="1600" b="0">
+                <a:solidFill>
+                  <a:srgbClr val="1A1612"/>
+                </a:solidFill>
+                <a:latin typeface="Calibri"/>
+              </a:rPr>
+              <a:t>•  You copy-paste everything yourself</a:t>
+            </a:r>
+          </a:p>
+          <a:p>
+            <a:pPr>
+              <a:spcAft>
+                <a:spcPts val="800"/>
+              </a:spcAft>
+            </a:pPr>
+            <a:r>
+              <a:rPr sz="1600" b="0">
+                <a:solidFill>
+                  <a:srgbClr val="1A1612"/>
+                </a:solidFill>
+                <a:latin typeface="Calibri"/>
+              </a:rPr>
+              <a:t>•  Looks smart, but it cannot act</a:t>
+            </a:r>
+          </a:p>
+        </p:txBody>
+      </p:sp>
+      <p:sp>
+        <p:nvSpPr>
+          <p:cNvPr id="11" name="TextBox 10"/>
+          <p:cNvSpPr txBox="1"/>
+          <p:nvPr/>
+        </p:nvSpPr>
+        <p:spPr>
+          <a:xfrm>
+            <a:off x="6537960" y="1691640"/>
+            <a:ext cx="4892040" cy="4297680"/>
+          </a:xfrm>
+          <a:prstGeom prst="rect">
+            <a:avLst/>
+          </a:prstGeom>
+          <a:noFill/>
+        </p:spPr>
+        <p:txBody>
+          <a:bodyPr wrap="square">
+            <a:spAutoFit/>
+          </a:bodyPr>
+          <a:lstStyle/>
+          <a:p>
+            <a:pPr>
+              <a:spcAft>
+                <a:spcPts val="800"/>
+              </a:spcAft>
+            </a:pPr>
+            <a:r>
+              <a:rPr sz="1600" b="0">
+                <a:solidFill>
+                  <a:srgbClr val="1A1612"/>
+                </a:solidFill>
+                <a:latin typeface="Calibri"/>
+              </a:rPr>
+              <a:t>•  Thinks: answer now, or call a tool?</a:t>
+            </a:r>
+          </a:p>
+          <a:p>
+            <a:pPr>
+              <a:spcAft>
+                <a:spcPts val="800"/>
+              </a:spcAft>
+            </a:pPr>
+            <a:r>
+              <a:rPr sz="1600" b="0">
+                <a:solidFill>
+                  <a:srgbClr val="1A1612"/>
+                </a:solidFill>
+                <a:latin typeface="Calibri"/>
+              </a:rPr>
+              <a:t>•  Acts: search, weather, math, notes, Python</a:t>
+            </a:r>
+          </a:p>
+          <a:p>
+            <a:pPr>
+              <a:spcAft>
+                <a:spcPts val="800"/>
+              </a:spcAft>
+            </a:pPr>
+            <a:r>
+              <a:rPr sz="1600" b="0">
+                <a:solidFill>
+                  <a:srgbClr val="1A1612"/>
+                </a:solidFill>
+                <a:latin typeface="Calibri"/>
+              </a:rPr>
+              <a:t>•  Observes the tool result, then continues</a:t>
+            </a:r>
+          </a:p>
+          <a:p>
+            <a:pPr>
+              <a:spcAft>
+                <a:spcPts val="800"/>
+              </a:spcAft>
+            </a:pPr>
+            <a:r>
+              <a:rPr sz="1600" b="0">
+                <a:solidFill>
+                  <a:srgbClr val="1A1612"/>
+                </a:solidFill>
+                <a:latin typeface="Calibri"/>
+              </a:rPr>
+              <a:t>•  Reads PDFs, photos, and project files</a:t>
+            </a:r>
+          </a:p>
+          <a:p>
+            <a:pPr>
+              <a:spcAft>
+                <a:spcPts val="800"/>
+              </a:spcAft>
+            </a:pPr>
+            <a:r>
+              <a:rPr sz="1600" b="0">
+                <a:solidFill>
+                  <a:srgbClr val="1A1612"/>
+                </a:solidFill>
+                <a:latin typeface="Calibri"/>
+              </a:rPr>
+              <a:t>•  Remembers Teach notes and project instructions</a:t>
+            </a:r>
+          </a:p>
+          <a:p>
+            <a:pPr>
+              <a:spcAft>
+                <a:spcPts val="800"/>
+              </a:spcAft>
+            </a:pPr>
+            <a:r>
+              <a:rPr sz="1600" b="0">
+                <a:solidFill>
+                  <a:srgbClr val="1A1612"/>
+                </a:solidFill>
+                <a:latin typeface="Calibri"/>
+              </a:rPr>
+              <a:t>•  Shows the work in chat, Artifacts, and Notes</a:t>
+            </a:r>
+          </a:p>
+        </p:txBody>
+      </p:sp>
+      <p:sp>
+        <p:nvSpPr>
+          <p:cNvPr id="12" name="TextBox 11"/>
           <p:cNvSpPr txBox="1"/>
           <p:nvPr/>
         </p:nvSpPr>
         <p:spPr>
           <a:xfrm>
             <a:off x="548640" y="6510528"/>
-            <a:ext cx="7315200" cy="274320"/>
+            <a:ext cx="8229600" cy="274320"/>
           </a:xfrm>
           <a:prstGeom prst="rect">
             <a:avLst/>
@@ -5482,18 +10132,18 @@
             <a:r>
               <a:rPr sz="1200" b="0">
                 <a:solidFill>
-                  <a:srgbClr val="6F6B63"/>
-                </a:solidFill>
-                <a:latin typeface="Calibri"/>
-              </a:rPr>
-              <a:t>Agentic AI  ·  v1.4.0</a:t>
-            </a:r>
-          </a:p>
-        </p:txBody>
-      </p:sp>
-      <p:sp>
-        <p:nvSpPr>
-          <p:cNvPr id="7" name="TextBox 6"/>
+                  <a:srgbClr val="5E574E"/>
+                </a:solidFill>
+                <a:latin typeface="Calibri"/>
+              </a:rPr>
+              <a:t>Agentic AI  ·  v1.6.0  ·  Abhishek Mishra</a:t>
+            </a:r>
+          </a:p>
+        </p:txBody>
+      </p:sp>
+      <p:sp>
+        <p:nvSpPr>
+          <p:cNvPr id="13" name="TextBox 12"/>
           <p:cNvSpPr txBox="1"/>
           <p:nvPr/>
         </p:nvSpPr>
@@ -5517,11 +10167,11 @@
             <a:r>
               <a:rPr sz="1200" b="0">
                 <a:solidFill>
-                  <a:srgbClr val="6F6B63"/>
-                </a:solidFill>
-                <a:latin typeface="Calibri"/>
-              </a:rPr>
-              <a:t>3 / 14</a:t>
+                  <a:srgbClr val="5E574E"/>
+                </a:solidFill>
+                <a:latin typeface="Calibri"/>
+              </a:rPr>
+              <a:t>3 / 22</a:t>
             </a:r>
           </a:p>
         </p:txBody>
@@ -5559,7 +10209,7 @@
             <a:avLst/>
           </a:prstGeom>
           <a:solidFill>
-            <a:srgbClr val="F7F4EF"/>
+            <a:srgbClr val="F1F1F1"/>
           </a:solidFill>
           <a:ln>
             <a:noFill/>
@@ -5602,7 +10252,7 @@
             <a:avLst/>
           </a:prstGeom>
           <a:solidFill>
-            <a:srgbClr val="D97757"/>
+            <a:srgbClr val="DB8F2A"/>
           </a:solidFill>
           <a:ln>
             <a:noFill/>
@@ -5656,59 +10306,115 @@
             <a:r>
               <a:rPr sz="3200" b="1">
                 <a:solidFill>
-                  <a:srgbClr val="14120B"/>
+                  <a:srgbClr val="1A1612"/>
                 </a:solidFill>
                 <a:latin typeface="Georgia"/>
               </a:rPr>
-              <a:t>Architecture</a:t>
-            </a:r>
-          </a:p>
-        </p:txBody>
-      </p:sp>
-      <p:sp>
-        <p:nvSpPr>
-          <p:cNvPr id="5" name="Rounded Rectangle 4"/>
-          <p:cNvSpPr/>
-          <p:nvPr/>
-        </p:nvSpPr>
-        <p:spPr>
-          <a:xfrm>
-            <a:off x="640080" y="1325880"/>
-            <a:ext cx="3456432" cy="4480560"/>
-          </a:xfrm>
-          <a:prstGeom prst="roundRect">
-            <a:avLst>
-              <a:gd name="adj" fmla="val 8000"/>
-            </a:avLst>
-          </a:prstGeom>
-          <a:solidFill>
-            <a:srgbClr val="FFFCF8"/>
-          </a:solidFill>
-          <a:ln>
-            <a:solidFill>
-              <a:srgbClr val="E6E0D6"/>
-            </a:solidFill>
-          </a:ln>
-        </p:spPr>
-        <p:style>
-          <a:lnRef idx="1">
-            <a:schemeClr val="accent1"/>
-          </a:lnRef>
-          <a:fillRef idx="3">
-            <a:schemeClr val="accent1"/>
-          </a:fillRef>
-          <a:effectRef idx="2">
-            <a:schemeClr val="accent1"/>
-          </a:effectRef>
-          <a:fontRef idx="minor">
-            <a:schemeClr val="lt1"/>
-          </a:fontRef>
-        </p:style>
-        <p:txBody>
-          <a:bodyPr rtlCol="0" anchor="ctr"/>
-          <a:lstStyle/>
-          <a:p>
-            <a:pPr algn="ctr"/>
+              <a:t>The idea</a:t>
+            </a:r>
+          </a:p>
+        </p:txBody>
+      </p:sp>
+      <p:sp>
+        <p:nvSpPr>
+          <p:cNvPr id="5" name="TextBox 4"/>
+          <p:cNvSpPr txBox="1"/>
+          <p:nvPr/>
+        </p:nvSpPr>
+        <p:spPr>
+          <a:xfrm>
+            <a:off x="731520" y="1234440"/>
+            <a:ext cx="10607040" cy="5029200"/>
+          </a:xfrm>
+          <a:prstGeom prst="rect">
+            <a:avLst/>
+          </a:prstGeom>
+          <a:noFill/>
+        </p:spPr>
+        <p:txBody>
+          <a:bodyPr wrap="square">
+            <a:spAutoFit/>
+          </a:bodyPr>
+          <a:lstStyle/>
+          <a:p>
+            <a:pPr>
+              <a:spcAft>
+                <a:spcPts val="800"/>
+              </a:spcAft>
+            </a:pPr>
+            <a:r>
+              <a:rPr sz="2000" b="0">
+                <a:solidFill>
+                  <a:srgbClr val="1A1612"/>
+                </a:solidFill>
+                <a:latin typeface="Calibri"/>
+              </a:rPr>
+              <a:t>•  The model is not hidden inside LangGraph or CrewAI — the ReAct loop is our own Python.</a:t>
+            </a:r>
+          </a:p>
+          <a:p>
+            <a:pPr>
+              <a:spcAft>
+                <a:spcPts val="800"/>
+              </a:spcAft>
+            </a:pPr>
+            <a:r>
+              <a:rPr sz="2000" b="0">
+                <a:solidFill>
+                  <a:srgbClr val="1A1612"/>
+                </a:solidFill>
+                <a:latin typeface="Calibri"/>
+              </a:rPr>
+              <a:t>•  You can see Think → Act → Observe → Answer. That is the whole point of this learning project.</a:t>
+            </a:r>
+          </a:p>
+          <a:p>
+            <a:pPr>
+              <a:spcAft>
+                <a:spcPts val="800"/>
+              </a:spcAft>
+            </a:pPr>
+            <a:r>
+              <a:rPr sz="2000" b="0">
+                <a:solidFill>
+                  <a:srgbClr val="1A1612"/>
+                </a:solidFill>
+                <a:latin typeface="Calibri"/>
+              </a:rPr>
+              <a:t>•  The chat feels like a teammate: cream/gold UI, name greeting, voice, files, and a side panel for work.</a:t>
+            </a:r>
+          </a:p>
+          <a:p>
+            <a:pPr>
+              <a:spcAft>
+                <a:spcPts val="800"/>
+              </a:spcAft>
+            </a:pPr>
+            <a:r>
+              <a:rPr sz="2000" b="0">
+                <a:solidFill>
+                  <a:srgbClr val="1A1612"/>
+                </a:solidFill>
+                <a:latin typeface="Calibri"/>
+              </a:rPr>
+              <a:t>•  Tools stay behind the scenes. The user sees “Searching the web…” then a clear answer with sources.</a:t>
+            </a:r>
+          </a:p>
+          <a:p>
+            <a:pPr>
+              <a:spcAft>
+                <a:spcPts val="800"/>
+              </a:spcAft>
+            </a:pPr>
+            <a:r>
+              <a:rPr sz="2000" b="0">
+                <a:solidFill>
+                  <a:srgbClr val="1A1612"/>
+                </a:solidFill>
+                <a:latin typeface="Calibri"/>
+              </a:rPr>
+              <a:t>•  It runs on your machine (or one Docker host). The Groq key stays in .env — never shown in the UI.</a:t>
+            </a:r>
           </a:p>
         </p:txBody>
       </p:sp>
@@ -5720,8 +10426,8 @@
         </p:nvSpPr>
         <p:spPr>
           <a:xfrm>
-            <a:off x="896112" y="1554480"/>
-            <a:ext cx="2999232" cy="914400"/>
+            <a:off x="548640" y="6510528"/>
+            <a:ext cx="8229600" cy="274320"/>
           </a:xfrm>
           <a:prstGeom prst="rect">
             <a:avLst/>
@@ -5736,13 +10442,13 @@
           <a:p>
             <a:pPr algn="l"/>
             <a:r>
-              <a:rPr sz="2000" b="1">
-                <a:solidFill>
-                  <a:srgbClr val="8A331C"/>
-                </a:solidFill>
-                <a:latin typeface="Calibri"/>
-              </a:rPr>
-              <a:t>Frontend</a:t>
+              <a:rPr sz="1200" b="0">
+                <a:solidFill>
+                  <a:srgbClr val="5E574E"/>
+                </a:solidFill>
+                <a:latin typeface="Calibri"/>
+              </a:rPr>
+              <a:t>Agentic AI  ·  v1.6.0  ·  Abhishek Mishra</a:t>
             </a:r>
           </a:p>
         </p:txBody>
@@ -5750,319 +10456,6 @@
       <p:sp>
         <p:nvSpPr>
           <p:cNvPr id="7" name="TextBox 6"/>
-          <p:cNvSpPr txBox="1"/>
-          <p:nvPr/>
-        </p:nvSpPr>
-        <p:spPr>
-          <a:xfrm>
-            <a:off x="896112" y="2468880"/>
-            <a:ext cx="2999232" cy="3017520"/>
-          </a:xfrm>
-          <a:prstGeom prst="rect">
-            <a:avLst/>
-          </a:prstGeom>
-          <a:noFill/>
-        </p:spPr>
-        <p:txBody>
-          <a:bodyPr wrap="square">
-            <a:spAutoFit/>
-          </a:bodyPr>
-          <a:lstStyle/>
-          <a:p>
-            <a:pPr algn="l"/>
-            <a:r>
-              <a:rPr sz="1600" b="0">
-                <a:solidFill>
-                  <a:srgbClr val="14120B"/>
-                </a:solidFill>
-                <a:latin typeface="Calibri"/>
-              </a:rPr>
-              <a:t>Next.js 15 (App Router, React, TypeScript)
-Cream chat UI, login, recents, edit, voice, settings.
-Runs at
-127.0.0.1:3000</a:t>
-            </a:r>
-          </a:p>
-        </p:txBody>
-      </p:sp>
-      <p:sp>
-        <p:nvSpPr>
-          <p:cNvPr id="8" name="Rounded Rectangle 7"/>
-          <p:cNvSpPr/>
-          <p:nvPr/>
-        </p:nvSpPr>
-        <p:spPr>
-          <a:xfrm>
-            <a:off x="4352544" y="1325880"/>
-            <a:ext cx="3456432" cy="4480560"/>
-          </a:xfrm>
-          <a:prstGeom prst="roundRect">
-            <a:avLst>
-              <a:gd name="adj" fmla="val 8000"/>
-            </a:avLst>
-          </a:prstGeom>
-          <a:solidFill>
-            <a:srgbClr val="FFFCF8"/>
-          </a:solidFill>
-          <a:ln>
-            <a:solidFill>
-              <a:srgbClr val="E6E0D6"/>
-            </a:solidFill>
-          </a:ln>
-        </p:spPr>
-        <p:style>
-          <a:lnRef idx="1">
-            <a:schemeClr val="accent1"/>
-          </a:lnRef>
-          <a:fillRef idx="3">
-            <a:schemeClr val="accent1"/>
-          </a:fillRef>
-          <a:effectRef idx="2">
-            <a:schemeClr val="accent1"/>
-          </a:effectRef>
-          <a:fontRef idx="minor">
-            <a:schemeClr val="lt1"/>
-          </a:fontRef>
-        </p:style>
-        <p:txBody>
-          <a:bodyPr rtlCol="0" anchor="ctr"/>
-          <a:lstStyle/>
-          <a:p>
-            <a:pPr algn="ctr"/>
-          </a:p>
-        </p:txBody>
-      </p:sp>
-      <p:sp>
-        <p:nvSpPr>
-          <p:cNvPr id="9" name="TextBox 8"/>
-          <p:cNvSpPr txBox="1"/>
-          <p:nvPr/>
-        </p:nvSpPr>
-        <p:spPr>
-          <a:xfrm>
-            <a:off x="4608576" y="1554480"/>
-            <a:ext cx="2999232" cy="914400"/>
-          </a:xfrm>
-          <a:prstGeom prst="rect">
-            <a:avLst/>
-          </a:prstGeom>
-          <a:noFill/>
-        </p:spPr>
-        <p:txBody>
-          <a:bodyPr wrap="square">
-            <a:spAutoFit/>
-          </a:bodyPr>
-          <a:lstStyle/>
-          <a:p>
-            <a:pPr algn="l"/>
-            <a:r>
-              <a:rPr sz="2000" b="1">
-                <a:solidFill>
-                  <a:srgbClr val="8A331C"/>
-                </a:solidFill>
-                <a:latin typeface="Calibri"/>
-              </a:rPr>
-              <a:t>Backend</a:t>
-            </a:r>
-          </a:p>
-        </p:txBody>
-      </p:sp>
-      <p:sp>
-        <p:nvSpPr>
-          <p:cNvPr id="10" name="TextBox 9"/>
-          <p:cNvSpPr txBox="1"/>
-          <p:nvPr/>
-        </p:nvSpPr>
-        <p:spPr>
-          <a:xfrm>
-            <a:off x="4608576" y="2468880"/>
-            <a:ext cx="2999232" cy="3017520"/>
-          </a:xfrm>
-          <a:prstGeom prst="rect">
-            <a:avLst/>
-          </a:prstGeom>
-          <a:noFill/>
-        </p:spPr>
-        <p:txBody>
-          <a:bodyPr wrap="square">
-            <a:spAutoFit/>
-          </a:bodyPr>
-          <a:lstStyle/>
-          <a:p>
-            <a:pPr algn="l"/>
-            <a:r>
-              <a:rPr sz="1600" b="0">
-                <a:solidFill>
-                  <a:srgbClr val="14120B"/>
-                </a:solidFill>
-                <a:latin typeface="Calibri"/>
-              </a:rPr>
-              <a:t>FastAPI + Uvicorn
-Auth, sessions, chat stream (SSE), tool install, and Groq API key setup.
-Runs at
-127.0.0.1:7860</a:t>
-            </a:r>
-          </a:p>
-        </p:txBody>
-      </p:sp>
-      <p:sp>
-        <p:nvSpPr>
-          <p:cNvPr id="11" name="Rounded Rectangle 10"/>
-          <p:cNvSpPr/>
-          <p:nvPr/>
-        </p:nvSpPr>
-        <p:spPr>
-          <a:xfrm>
-            <a:off x="8065008" y="1325880"/>
-            <a:ext cx="3456432" cy="4480560"/>
-          </a:xfrm>
-          <a:prstGeom prst="roundRect">
-            <a:avLst>
-              <a:gd name="adj" fmla="val 8000"/>
-            </a:avLst>
-          </a:prstGeom>
-          <a:solidFill>
-            <a:srgbClr val="FFFCF8"/>
-          </a:solidFill>
-          <a:ln>
-            <a:solidFill>
-              <a:srgbClr val="E6E0D6"/>
-            </a:solidFill>
-          </a:ln>
-        </p:spPr>
-        <p:style>
-          <a:lnRef idx="1">
-            <a:schemeClr val="accent1"/>
-          </a:lnRef>
-          <a:fillRef idx="3">
-            <a:schemeClr val="accent1"/>
-          </a:fillRef>
-          <a:effectRef idx="2">
-            <a:schemeClr val="accent1"/>
-          </a:effectRef>
-          <a:fontRef idx="minor">
-            <a:schemeClr val="lt1"/>
-          </a:fontRef>
-        </p:style>
-        <p:txBody>
-          <a:bodyPr rtlCol="0" anchor="ctr"/>
-          <a:lstStyle/>
-          <a:p>
-            <a:pPr algn="ctr"/>
-          </a:p>
-        </p:txBody>
-      </p:sp>
-      <p:sp>
-        <p:nvSpPr>
-          <p:cNvPr id="12" name="TextBox 11"/>
-          <p:cNvSpPr txBox="1"/>
-          <p:nvPr/>
-        </p:nvSpPr>
-        <p:spPr>
-          <a:xfrm>
-            <a:off x="8321040" y="1554480"/>
-            <a:ext cx="2999232" cy="914400"/>
-          </a:xfrm>
-          <a:prstGeom prst="rect">
-            <a:avLst/>
-          </a:prstGeom>
-          <a:noFill/>
-        </p:spPr>
-        <p:txBody>
-          <a:bodyPr wrap="square">
-            <a:spAutoFit/>
-          </a:bodyPr>
-          <a:lstStyle/>
-          <a:p>
-            <a:pPr algn="l"/>
-            <a:r>
-              <a:rPr sz="2000" b="1">
-                <a:solidFill>
-                  <a:srgbClr val="8A331C"/>
-                </a:solidFill>
-                <a:latin typeface="Calibri"/>
-              </a:rPr>
-              <a:t>Agent core</a:t>
-            </a:r>
-          </a:p>
-        </p:txBody>
-      </p:sp>
-      <p:sp>
-        <p:nvSpPr>
-          <p:cNvPr id="13" name="TextBox 12"/>
-          <p:cNvSpPr txBox="1"/>
-          <p:nvPr/>
-        </p:nvSpPr>
-        <p:spPr>
-          <a:xfrm>
-            <a:off x="8321040" y="2468880"/>
-            <a:ext cx="2999232" cy="3017520"/>
-          </a:xfrm>
-          <a:prstGeom prst="rect">
-            <a:avLst/>
-          </a:prstGeom>
-          <a:noFill/>
-        </p:spPr>
-        <p:txBody>
-          <a:bodyPr wrap="square">
-            <a:spAutoFit/>
-          </a:bodyPr>
-          <a:lstStyle/>
-          <a:p>
-            <a:pPr algn="l"/>
-            <a:r>
-              <a:rPr sz="1600" b="0">
-                <a:solidFill>
-                  <a:srgbClr val="14120B"/>
-                </a:solidFill>
-                <a:latin typeface="Calibri"/>
-              </a:rPr>
-              <a:t>Custom ReAct loop
-(not LangGraph)
-LLM + tools + memory.
-Optional 2-agent crew: Researcher then Writer.</a:t>
-            </a:r>
-          </a:p>
-        </p:txBody>
-      </p:sp>
-      <p:sp>
-        <p:nvSpPr>
-          <p:cNvPr id="14" name="TextBox 13"/>
-          <p:cNvSpPr txBox="1"/>
-          <p:nvPr/>
-        </p:nvSpPr>
-        <p:spPr>
-          <a:xfrm>
-            <a:off x="548640" y="6510528"/>
-            <a:ext cx="7315200" cy="274320"/>
-          </a:xfrm>
-          <a:prstGeom prst="rect">
-            <a:avLst/>
-          </a:prstGeom>
-          <a:noFill/>
-        </p:spPr>
-        <p:txBody>
-          <a:bodyPr wrap="square">
-            <a:spAutoFit/>
-          </a:bodyPr>
-          <a:lstStyle/>
-          <a:p>
-            <a:pPr algn="l"/>
-            <a:r>
-              <a:rPr sz="1200" b="0">
-                <a:solidFill>
-                  <a:srgbClr val="6F6B63"/>
-                </a:solidFill>
-                <a:latin typeface="Calibri"/>
-              </a:rPr>
-              <a:t>Agentic AI  ·  v1.4.0</a:t>
-            </a:r>
-          </a:p>
-        </p:txBody>
-      </p:sp>
-      <p:sp>
-        <p:nvSpPr>
-          <p:cNvPr id="15" name="TextBox 14"/>
           <p:cNvSpPr txBox="1"/>
           <p:nvPr/>
         </p:nvSpPr>
@@ -6086,11 +10479,11 @@
             <a:r>
               <a:rPr sz="1200" b="0">
                 <a:solidFill>
-                  <a:srgbClr val="6F6B63"/>
-                </a:solidFill>
-                <a:latin typeface="Calibri"/>
-              </a:rPr>
-              <a:t>4 / 14</a:t>
+                  <a:srgbClr val="5E574E"/>
+                </a:solidFill>
+                <a:latin typeface="Calibri"/>
+              </a:rPr>
+              <a:t>4 / 22</a:t>
             </a:r>
           </a:p>
         </p:txBody>
@@ -6128,7 +10521,7 @@
             <a:avLst/>
           </a:prstGeom>
           <a:solidFill>
-            <a:srgbClr val="F7F4EF"/>
+            <a:srgbClr val="F1F1F1"/>
           </a:solidFill>
           <a:ln>
             <a:noFill/>
@@ -6171,7 +10564,7 @@
             <a:avLst/>
           </a:prstGeom>
           <a:solidFill>
-            <a:srgbClr val="D97757"/>
+            <a:srgbClr val="DB8F2A"/>
           </a:solidFill>
           <a:ln>
             <a:noFill/>
@@ -6225,11 +10618,11 @@
             <a:r>
               <a:rPr sz="3200" b="1">
                 <a:solidFill>
-                  <a:srgbClr val="14120B"/>
+                  <a:srgbClr val="1A1612"/>
                 </a:solidFill>
                 <a:latin typeface="Georgia"/>
               </a:rPr>
-              <a:t>User experience</a:t>
+              <a:t>Benefits</a:t>
             </a:r>
           </a:p>
         </p:txBody>
@@ -6242,8 +10635,8 @@
         </p:nvSpPr>
         <p:spPr>
           <a:xfrm>
-            <a:off x="731520" y="1280160"/>
-            <a:ext cx="10515600" cy="4846320"/>
+            <a:off x="731520" y="1234440"/>
+            <a:ext cx="10607040" cy="5029200"/>
           </a:xfrm>
           <a:prstGeom prst="rect">
             <a:avLst/>
@@ -6258,81 +10651,113 @@
           <a:p>
             <a:pPr>
               <a:spcAft>
-                <a:spcPts val="600"/>
+                <a:spcPts val="800"/>
               </a:spcAft>
             </a:pPr>
             <a:r>
-              <a:rPr sz="2200" b="0">
-                <a:solidFill>
-                  <a:srgbClr val="14120B"/>
-                </a:solidFill>
-                <a:latin typeface="Calibri"/>
-              </a:rPr>
-              <a:t>•  Login with name + email, or Google / GitHub OAuth.</a:t>
+              <a:rPr sz="1800" b="0">
+                <a:solidFill>
+                  <a:srgbClr val="1A1612"/>
+                </a:solidFill>
+                <a:latin typeface="Calibri"/>
+              </a:rPr>
+              <a:t>•  Faster answers with live facts — weather, gold, news — instead of guessing from training data.</a:t>
             </a:r>
           </a:p>
           <a:p>
             <a:pPr>
               <a:spcAft>
-                <a:spcPts val="600"/>
+                <a:spcPts val="800"/>
               </a:spcAft>
             </a:pPr>
             <a:r>
-              <a:rPr sz="2200" b="0">
-                <a:solidFill>
-                  <a:srgbClr val="14120B"/>
-                </a:solidFill>
-                <a:latin typeface="Calibri"/>
-              </a:rPr>
-              <a:t>•  Sidebar stays fixed. Chat on the right is what grows and scrolls.</a:t>
+              <a:rPr sz="1800" b="0">
+                <a:solidFill>
+                  <a:srgbClr val="1A1612"/>
+                </a:solidFill>
+                <a:latin typeface="Calibri"/>
+              </a:rPr>
+              <a:t>•  One place for a shop or class: standing instructions, PDFs, and chats live inside a Project.</a:t>
             </a:r>
           </a:p>
           <a:p>
             <a:pPr>
               <a:spcAft>
-                <a:spcPts val="600"/>
+                <a:spcPts val="800"/>
               </a:spcAft>
             </a:pPr>
             <a:r>
-              <a:rPr sz="2200" b="0">
-                <a:solidFill>
-                  <a:srgbClr val="14120B"/>
-                </a:solidFill>
-                <a:latin typeface="Calibri"/>
-              </a:rPr>
-              <a:t>•  Greeting uses the signed-in name: “How can I help you today, Abhishek?”</a:t>
+              <a:rPr sz="1800" b="0">
+                <a:solidFill>
+                  <a:srgbClr val="1A1612"/>
+                </a:solidFill>
+                <a:latin typeface="Calibri"/>
+              </a:rPr>
+              <a:t>•  You can teach it your name, tone, and facts without training a new neural model.</a:t>
             </a:r>
           </a:p>
           <a:p>
             <a:pPr>
               <a:spcAft>
-                <a:spcPts val="600"/>
+                <a:spcPts val="800"/>
               </a:spcAft>
             </a:pPr>
             <a:r>
-              <a:rPr sz="2200" b="0">
-                <a:solidFill>
-                  <a:srgbClr val="14120B"/>
-                </a:solidFill>
-                <a:latin typeface="Calibri"/>
-              </a:rPr>
-              <a:t>•  A simple “hello” gets a personal reply, like Claude — no tools needed.</a:t>
+              <a:rPr sz="1800" b="0">
+                <a:solidFill>
+                  <a:srgbClr val="1A1612"/>
+                </a:solidFill>
+                <a:latin typeface="Calibri"/>
+              </a:rPr>
+              <a:t>•  It can draft a webpage or graphic and open it in Artifacts — not just dump code in chat.</a:t>
             </a:r>
           </a:p>
           <a:p>
             <a:pPr>
               <a:spcAft>
-                <a:spcPts val="600"/>
+                <a:spcPts val="800"/>
               </a:spcAft>
             </a:pPr>
             <a:r>
-              <a:rPr sz="2200" b="0">
-                <a:solidFill>
-                  <a:srgbClr val="14120B"/>
-                </a:solidFill>
-                <a:latin typeface="Calibri"/>
-              </a:rPr>
-              <a:t>•  Recents, New chat, Settings (Ctrl+,), and a user menu live in the sidebar.</a:t>
+              <a:rPr sz="1800" b="0">
+                <a:solidFill>
+                  <a:srgbClr val="1A1612"/>
+                </a:solidFill>
+                <a:latin typeface="Calibri"/>
+              </a:rPr>
+              <a:t>•  Short Python runs in a locked sandbox, so numbers and scripts are checked, not invented.</a:t>
+            </a:r>
+          </a:p>
+          <a:p>
+            <a:pPr>
+              <a:spcAft>
+                <a:spcPts val="800"/>
+              </a:spcAft>
+            </a:pPr>
+            <a:r>
+              <a:rPr sz="1800" b="0">
+                <a:solidFill>
+                  <a:srgbClr val="1A1612"/>
+                </a:solidFill>
+                <a:latin typeface="Calibri"/>
+              </a:rPr>
+              <a:t>•  Hindi and Bhojpuri replies, voice in/out, so it works for people who prefer speaking.</a:t>
+            </a:r>
+          </a:p>
+          <a:p>
+            <a:pPr>
+              <a:spcAft>
+                <a:spcPts val="800"/>
+              </a:spcAft>
+            </a:pPr>
+            <a:r>
+              <a:rPr sz="1800" b="0">
+                <a:solidFill>
+                  <a:srgbClr val="1A1612"/>
+                </a:solidFill>
+                <a:latin typeface="Calibri"/>
+              </a:rPr>
+              <a:t>•  You learn real agent design: tools, memory, streaming, auth — not a black-box demo.</a:t>
             </a:r>
           </a:p>
         </p:txBody>
@@ -6346,7 +10771,7 @@
         <p:spPr>
           <a:xfrm>
             <a:off x="548640" y="6510528"/>
-            <a:ext cx="7315200" cy="274320"/>
+            <a:ext cx="8229600" cy="274320"/>
           </a:xfrm>
           <a:prstGeom prst="rect">
             <a:avLst/>
@@ -6363,11 +10788,11 @@
             <a:r>
               <a:rPr sz="1200" b="0">
                 <a:solidFill>
-                  <a:srgbClr val="6F6B63"/>
-                </a:solidFill>
-                <a:latin typeface="Calibri"/>
-              </a:rPr>
-              <a:t>Agentic AI  ·  v1.4.0</a:t>
+                  <a:srgbClr val="5E574E"/>
+                </a:solidFill>
+                <a:latin typeface="Calibri"/>
+              </a:rPr>
+              <a:t>Agentic AI  ·  v1.6.0  ·  Abhishek Mishra</a:t>
             </a:r>
           </a:p>
         </p:txBody>
@@ -6398,11 +10823,11 @@
             <a:r>
               <a:rPr sz="1200" b="0">
                 <a:solidFill>
-                  <a:srgbClr val="6F6B63"/>
-                </a:solidFill>
-                <a:latin typeface="Calibri"/>
-              </a:rPr>
-              <a:t>5 / 14</a:t>
+                  <a:srgbClr val="5E574E"/>
+                </a:solidFill>
+                <a:latin typeface="Calibri"/>
+              </a:rPr>
+              <a:t>5 / 22</a:t>
             </a:r>
           </a:p>
         </p:txBody>
@@ -6440,7 +10865,7 @@
             <a:avLst/>
           </a:prstGeom>
           <a:solidFill>
-            <a:srgbClr val="F7F4EF"/>
+            <a:srgbClr val="F1F1F1"/>
           </a:solidFill>
           <a:ln>
             <a:noFill/>
@@ -6483,7 +10908,7 @@
             <a:avLst/>
           </a:prstGeom>
           <a:solidFill>
-            <a:srgbClr val="D97757"/>
+            <a:srgbClr val="DB8F2A"/>
           </a:solidFill>
           <a:ln>
             <a:noFill/>
@@ -6519,8 +10944,8 @@
         </p:nvSpPr>
         <p:spPr>
           <a:xfrm>
-            <a:off x="640080" y="292608"/>
-            <a:ext cx="10972800" cy="502920"/>
+            <a:off x="640080" y="365760"/>
+            <a:ext cx="10972800" cy="640080"/>
           </a:xfrm>
           <a:prstGeom prst="rect">
             <a:avLst/>
@@ -6535,13 +10960,13 @@
           <a:p>
             <a:pPr algn="l"/>
             <a:r>
-              <a:rPr sz="2800" b="1">
-                <a:solidFill>
-                  <a:srgbClr val="14120B"/>
+              <a:rPr sz="3200" b="1">
+                <a:solidFill>
+                  <a:srgbClr val="1A1612"/>
                 </a:solidFill>
                 <a:latin typeface="Georgia"/>
               </a:rPr>
-              <a:t>Old version vs new version</a:t>
+              <a:t>Who it helps</a:t>
             </a:r>
           </a:p>
         </p:txBody>
@@ -6554,8 +10979,8 @@
         </p:nvSpPr>
         <p:spPr>
           <a:xfrm>
-            <a:off x="502920" y="960120"/>
-            <a:ext cx="5394960" cy="5303520"/>
+            <a:off x="640080" y="1280160"/>
+            <a:ext cx="3456432" cy="4572000"/>
           </a:xfrm>
           <a:prstGeom prst="roundRect">
             <a:avLst>
@@ -6563,11 +10988,11 @@
             </a:avLst>
           </a:prstGeom>
           <a:solidFill>
-            <a:srgbClr val="FFFCF8"/>
+            <a:srgbClr val="FFFFFF"/>
           </a:solidFill>
           <a:ln>
             <a:solidFill>
-              <a:srgbClr val="E6E0D6"/>
+              <a:srgbClr val="D4C8B8"/>
             </a:solidFill>
           </a:ln>
         </p:spPr>
@@ -6595,14 +11020,84 @@
       </p:sp>
       <p:sp>
         <p:nvSpPr>
-          <p:cNvPr id="6" name="Rounded Rectangle 5"/>
+          <p:cNvPr id="6" name="TextBox 5"/>
+          <p:cNvSpPr txBox="1"/>
+          <p:nvPr/>
+        </p:nvSpPr>
+        <p:spPr>
+          <a:xfrm>
+            <a:off x="896112" y="1508760"/>
+            <a:ext cx="2999232" cy="822960"/>
+          </a:xfrm>
+          <a:prstGeom prst="rect">
+            <a:avLst/>
+          </a:prstGeom>
+          <a:noFill/>
+        </p:spPr>
+        <p:txBody>
+          <a:bodyPr wrap="square">
+            <a:spAutoFit/>
+          </a:bodyPr>
+          <a:lstStyle/>
+          <a:p>
+            <a:pPr algn="l"/>
+            <a:r>
+              <a:rPr sz="1800" b="1">
+                <a:solidFill>
+                  <a:srgbClr val="B8741C"/>
+                </a:solidFill>
+                <a:latin typeface="Calibri"/>
+              </a:rPr>
+              <a:t>Student / builder</a:t>
+            </a:r>
+          </a:p>
+        </p:txBody>
+      </p:sp>
+      <p:sp>
+        <p:nvSpPr>
+          <p:cNvPr id="7" name="TextBox 6"/>
+          <p:cNvSpPr txBox="1"/>
+          <p:nvPr/>
+        </p:nvSpPr>
+        <p:spPr>
+          <a:xfrm>
+            <a:off x="896112" y="2331720"/>
+            <a:ext cx="2999232" cy="3200400"/>
+          </a:xfrm>
+          <a:prstGeom prst="rect">
+            <a:avLst/>
+          </a:prstGeom>
+          <a:noFill/>
+        </p:spPr>
+        <p:txBody>
+          <a:bodyPr wrap="square">
+            <a:spAutoFit/>
+          </a:bodyPr>
+          <a:lstStyle/>
+          <a:p>
+            <a:pPr algn="l"/>
+            <a:r>
+              <a:rPr sz="1500" b="0">
+                <a:solidFill>
+                  <a:srgbClr val="1A1612"/>
+                </a:solidFill>
+                <a:latin typeface="Calibri"/>
+              </a:rPr>
+              <a:t>See a real ReAct loop, add a tool, ship a UI. Better than only watching a framework tutorial.</a:t>
+            </a:r>
+          </a:p>
+        </p:txBody>
+      </p:sp>
+      <p:sp>
+        <p:nvSpPr>
+          <p:cNvPr id="8" name="Rounded Rectangle 7"/>
           <p:cNvSpPr/>
           <p:nvPr/>
         </p:nvSpPr>
         <p:spPr>
           <a:xfrm>
-            <a:off x="6263640" y="960120"/>
-            <a:ext cx="5394960" cy="5303520"/>
+            <a:off x="4352544" y="1280160"/>
+            <a:ext cx="3456432" cy="4572000"/>
           </a:xfrm>
           <a:prstGeom prst="roundRect">
             <a:avLst>
@@ -6610,11 +11105,11 @@
             </a:avLst>
           </a:prstGeom>
           <a:solidFill>
-            <a:srgbClr val="FFFCF8"/>
+            <a:srgbClr val="FFFFFF"/>
           </a:solidFill>
           <a:ln>
             <a:solidFill>
-              <a:srgbClr val="E6E0D6"/>
+              <a:srgbClr val="D4C8B8"/>
             </a:solidFill>
           </a:ln>
         </p:spPr>
@@ -6642,23 +11137,97 @@
       </p:sp>
       <p:sp>
         <p:nvSpPr>
-          <p:cNvPr id="7" name="Rectangle 6"/>
+          <p:cNvPr id="9" name="TextBox 8"/>
+          <p:cNvSpPr txBox="1"/>
+          <p:nvPr/>
+        </p:nvSpPr>
+        <p:spPr>
+          <a:xfrm>
+            <a:off x="4608576" y="1508760"/>
+            <a:ext cx="2999232" cy="822960"/>
+          </a:xfrm>
+          <a:prstGeom prst="rect">
+            <a:avLst/>
+          </a:prstGeom>
+          <a:noFill/>
+        </p:spPr>
+        <p:txBody>
+          <a:bodyPr wrap="square">
+            <a:spAutoFit/>
+          </a:bodyPr>
+          <a:lstStyle/>
+          <a:p>
+            <a:pPr algn="l"/>
+            <a:r>
+              <a:rPr sz="1800" b="1">
+                <a:solidFill>
+                  <a:srgbClr val="B8741C"/>
+                </a:solidFill>
+                <a:latin typeface="Calibri"/>
+              </a:rPr>
+              <a:t>Shop or small team</a:t>
+            </a:r>
+          </a:p>
+        </p:txBody>
+      </p:sp>
+      <p:sp>
+        <p:nvSpPr>
+          <p:cNvPr id="10" name="TextBox 9"/>
+          <p:cNvSpPr txBox="1"/>
+          <p:nvPr/>
+        </p:nvSpPr>
+        <p:spPr>
+          <a:xfrm>
+            <a:off x="4608576" y="2331720"/>
+            <a:ext cx="2999232" cy="3200400"/>
+          </a:xfrm>
+          <a:prstGeom prst="rect">
+            <a:avLst/>
+          </a:prstGeom>
+          <a:noFill/>
+        </p:spPr>
+        <p:txBody>
+          <a:bodyPr wrap="square">
+            <a:spAutoFit/>
+          </a:bodyPr>
+          <a:lstStyle/>
+          <a:p>
+            <a:pPr algn="l"/>
+            <a:r>
+              <a:rPr sz="1500" b="0">
+                <a:solidFill>
+                  <a:srgbClr val="1A1612"/>
+                </a:solidFill>
+                <a:latin typeface="Calibri"/>
+              </a:rPr>
+              <a:t>Teach brand facts, drop a price list PDF into a Project, ask in Hindi, export the chat.</a:t>
+            </a:r>
+          </a:p>
+        </p:txBody>
+      </p:sp>
+      <p:sp>
+        <p:nvSpPr>
+          <p:cNvPr id="11" name="Rounded Rectangle 10"/>
           <p:cNvSpPr/>
           <p:nvPr/>
         </p:nvSpPr>
         <p:spPr>
           <a:xfrm>
-            <a:off x="6263640" y="960120"/>
-            <a:ext cx="5394960" cy="91440"/>
-          </a:xfrm>
-          <a:prstGeom prst="rect">
-            <a:avLst/>
+            <a:off x="8065008" y="1280160"/>
+            <a:ext cx="3456432" cy="4572000"/>
+          </a:xfrm>
+          <a:prstGeom prst="roundRect">
+            <a:avLst>
+              <a:gd name="adj" fmla="val 8000"/>
+            </a:avLst>
           </a:prstGeom>
           <a:solidFill>
-            <a:srgbClr val="D97757"/>
+            <a:srgbClr val="FFFFFF"/>
           </a:solidFill>
           <a:ln>
-            <a:noFill/>
+            <a:solidFill>
+              <a:srgbClr val="D4C8B8"/>
+            </a:solidFill>
           </a:ln>
         </p:spPr>
         <p:style>
@@ -6685,14 +11254,14 @@
       </p:sp>
       <p:sp>
         <p:nvSpPr>
-          <p:cNvPr id="8" name="TextBox 7"/>
-          <p:cNvSpPr txBox="1"/>
-          <p:nvPr/>
-        </p:nvSpPr>
-        <p:spPr>
-          <a:xfrm>
-            <a:off x="777240" y="1143000"/>
-            <a:ext cx="4937760" cy="457200"/>
+          <p:cNvPr id="12" name="TextBox 11"/>
+          <p:cNvSpPr txBox="1"/>
+          <p:nvPr/>
+        </p:nvSpPr>
+        <p:spPr>
+          <a:xfrm>
+            <a:off x="8321040" y="1508760"/>
+            <a:ext cx="2999232" cy="822960"/>
           </a:xfrm>
           <a:prstGeom prst="rect">
             <a:avLst/>
@@ -6707,27 +11276,27 @@
           <a:p>
             <a:pPr algn="l"/>
             <a:r>
-              <a:rPr sz="2000" b="1">
-                <a:solidFill>
-                  <a:srgbClr val="6F6B63"/>
-                </a:solidFill>
-                <a:latin typeface="Calibri"/>
-              </a:rPr>
-              <a:t>v1.3.0 — already there</a:t>
-            </a:r>
-          </a:p>
-        </p:txBody>
-      </p:sp>
-      <p:sp>
-        <p:nvSpPr>
-          <p:cNvPr id="9" name="TextBox 8"/>
-          <p:cNvSpPr txBox="1"/>
-          <p:nvPr/>
-        </p:nvSpPr>
-        <p:spPr>
-          <a:xfrm>
-            <a:off x="6537960" y="1143000"/>
-            <a:ext cx="4937760" cy="457200"/>
+              <a:rPr sz="1800" b="1">
+                <a:solidFill>
+                  <a:srgbClr val="B8741C"/>
+                </a:solidFill>
+                <a:latin typeface="Calibri"/>
+              </a:rPr>
+              <a:t>Anyone who asks daily</a:t>
+            </a:r>
+          </a:p>
+        </p:txBody>
+      </p:sp>
+      <p:sp>
+        <p:nvSpPr>
+          <p:cNvPr id="13" name="TextBox 12"/>
+          <p:cNvSpPr txBox="1"/>
+          <p:nvPr/>
+        </p:nvSpPr>
+        <p:spPr>
+          <a:xfrm>
+            <a:off x="8321040" y="2331720"/>
+            <a:ext cx="2999232" cy="3200400"/>
           </a:xfrm>
           <a:prstGeom prst="rect">
             <a:avLst/>
@@ -6742,329 +11311,27 @@
           <a:p>
             <a:pPr algn="l"/>
             <a:r>
-              <a:rPr sz="2000" b="1">
-                <a:solidFill>
-                  <a:srgbClr val="8A331C"/>
-                </a:solidFill>
-                <a:latin typeface="Calibri"/>
-              </a:rPr>
-              <a:t>v1.4.0 — what we added</a:t>
-            </a:r>
-          </a:p>
-        </p:txBody>
-      </p:sp>
-      <p:sp>
-        <p:nvSpPr>
-          <p:cNvPr id="10" name="TextBox 9"/>
-          <p:cNvSpPr txBox="1"/>
-          <p:nvPr/>
-        </p:nvSpPr>
-        <p:spPr>
-          <a:xfrm>
-            <a:off x="777240" y="1691640"/>
-            <a:ext cx="4892040" cy="4297680"/>
-          </a:xfrm>
-          <a:prstGeom prst="rect">
-            <a:avLst/>
-          </a:prstGeom>
-          <a:noFill/>
-        </p:spPr>
-        <p:txBody>
-          <a:bodyPr wrap="square">
-            <a:spAutoFit/>
-          </a:bodyPr>
-          <a:lstStyle/>
-          <a:p>
-            <a:pPr>
-              <a:spcAft>
-                <a:spcPts val="600"/>
-              </a:spcAft>
-            </a:pPr>
-            <a:r>
-              <a:rPr sz="1600" b="0">
-                <a:solidFill>
-                  <a:srgbClr val="14120B"/>
-                </a:solidFill>
-                <a:latin typeface="Calibri"/>
-              </a:rPr>
-              <a:t>•  Claude-like cream chat UI (Next.js + FastAPI)</a:t>
-            </a:r>
-          </a:p>
-          <a:p>
-            <a:pPr>
-              <a:spcAft>
-                <a:spcPts val="600"/>
-              </a:spcAft>
-            </a:pPr>
-            <a:r>
-              <a:rPr sz="1600" b="0">
-                <a:solidFill>
-                  <a:srgbClr val="14120B"/>
-                </a:solidFill>
-                <a:latin typeface="Calibri"/>
-              </a:rPr>
-              <a:t>•  Login: name + email, Google, GitHub</a:t>
-            </a:r>
-          </a:p>
-          <a:p>
-            <a:pPr>
-              <a:spcAft>
-                <a:spcPts val="600"/>
-              </a:spcAft>
-            </a:pPr>
-            <a:r>
-              <a:rPr sz="1600" b="0">
-                <a:solidFill>
-                  <a:srgbClr val="14120B"/>
-                </a:solidFill>
-                <a:latin typeface="Calibri"/>
-              </a:rPr>
-              <a:t>•  ReAct agent with tools: search, weather, math, Wikipedia, GitHub</a:t>
-            </a:r>
-          </a:p>
-          <a:p>
-            <a:pPr>
-              <a:spcAft>
-                <a:spcPts val="600"/>
-              </a:spcAft>
-            </a:pPr>
-            <a:r>
-              <a:rPr sz="1600" b="0">
-                <a:solidFill>
-                  <a:srgbClr val="14120B"/>
-                </a:solidFill>
-                <a:latin typeface="Calibri"/>
-              </a:rPr>
-              <a:t>•  Single agent, or Researcher + Writer crew</a:t>
-            </a:r>
-          </a:p>
-          <a:p>
-            <a:pPr>
-              <a:spcAft>
-                <a:spcPts val="600"/>
-              </a:spcAft>
-            </a:pPr>
-            <a:r>
-              <a:rPr sz="1600" b="0">
-                <a:solidFill>
-                  <a:srgbClr val="14120B"/>
-                </a:solidFill>
-                <a:latin typeface="Calibri"/>
-              </a:rPr>
-              <a:t>•  Recents, Settings, named greeting (“hello, Abhishek”)</a:t>
-            </a:r>
-          </a:p>
-          <a:p>
-            <a:pPr>
-              <a:spcAft>
-                <a:spcPts val="600"/>
-              </a:spcAft>
-            </a:pPr>
-            <a:r>
-              <a:rPr sz="1600" b="0">
-                <a:solidFill>
-                  <a:srgbClr val="14120B"/>
-                </a:solidFill>
-                <a:latin typeface="Calibri"/>
-              </a:rPr>
-              <a:t>•  Type a question and send — that was the only input</a:t>
-            </a:r>
-          </a:p>
-          <a:p>
-            <a:pPr>
-              <a:spcAft>
-                <a:spcPts val="600"/>
-              </a:spcAft>
-            </a:pPr>
-            <a:r>
-              <a:rPr sz="1600" b="0">
-                <a:solidFill>
-                  <a:srgbClr val="14120B"/>
-                </a:solidFill>
-                <a:latin typeface="Calibri"/>
-              </a:rPr>
-              <a:t>•  No way to edit a sent message</a:t>
-            </a:r>
-          </a:p>
-          <a:p>
-            <a:pPr>
-              <a:spcAft>
-                <a:spcPts val="600"/>
-              </a:spcAft>
-            </a:pPr>
-            <a:r>
-              <a:rPr sz="1600" b="0">
-                <a:solidFill>
-                  <a:srgbClr val="14120B"/>
-                </a:solidFill>
-                <a:latin typeface="Calibri"/>
-              </a:rPr>
-              <a:t>•  No microphone, no read-aloud</a:t>
-            </a:r>
-          </a:p>
-        </p:txBody>
-      </p:sp>
-      <p:sp>
-        <p:nvSpPr>
-          <p:cNvPr id="11" name="TextBox 10"/>
-          <p:cNvSpPr txBox="1"/>
-          <p:nvPr/>
-        </p:nvSpPr>
-        <p:spPr>
-          <a:xfrm>
-            <a:off x="6537960" y="1691640"/>
-            <a:ext cx="4892040" cy="4297680"/>
-          </a:xfrm>
-          <a:prstGeom prst="rect">
-            <a:avLst/>
-          </a:prstGeom>
-          <a:noFill/>
-        </p:spPr>
-        <p:txBody>
-          <a:bodyPr wrap="square">
-            <a:spAutoFit/>
-          </a:bodyPr>
-          <a:lstStyle/>
-          <a:p>
-            <a:pPr>
-              <a:spcAft>
-                <a:spcPts val="600"/>
-              </a:spcAft>
-            </a:pPr>
-            <a:r>
-              <a:rPr sz="1600" b="0">
-                <a:solidFill>
-                  <a:srgbClr val="14120B"/>
-                </a:solidFill>
-                <a:latin typeface="Calibri"/>
-              </a:rPr>
-              <a:t>•  Everything from v1.3.0 is still there</a:t>
-            </a:r>
-          </a:p>
-          <a:p>
-            <a:pPr>
-              <a:spcAft>
-                <a:spcPts val="600"/>
-              </a:spcAft>
-            </a:pPr>
-            <a:r>
-              <a:rPr sz="1600" b="0">
-                <a:solidFill>
-                  <a:srgbClr val="14120B"/>
-                </a:solidFill>
-                <a:latin typeface="Calibri"/>
-              </a:rPr>
-              <a:t>•  Edit a sent message (pencil under the bubble)</a:t>
-            </a:r>
-          </a:p>
-          <a:p>
-            <a:pPr>
-              <a:spcAft>
-                <a:spcPts val="600"/>
-              </a:spcAft>
-            </a:pPr>
-            <a:r>
-              <a:rPr sz="1600" b="0">
-                <a:solidFill>
-                  <a:srgbClr val="14120B"/>
-                </a:solidFill>
-                <a:latin typeface="Calibri"/>
-              </a:rPr>
-              <a:t>•  Save &amp; retry: old answer is dropped, new search runs</a:t>
-            </a:r>
-          </a:p>
-          <a:p>
-            <a:pPr>
-              <a:spcAft>
-                <a:spcPts val="600"/>
-              </a:spcAft>
-            </a:pPr>
-            <a:r>
-              <a:rPr sz="1600" b="0">
-                <a:solidFill>
-                  <a:srgbClr val="14120B"/>
-                </a:solidFill>
-                <a:latin typeface="Calibri"/>
-              </a:rPr>
-              <a:t>•  Microphone in the chat box — speak the question</a:t>
-            </a:r>
-          </a:p>
-          <a:p>
-            <a:pPr>
-              <a:spcAft>
-                <a:spcPts val="600"/>
-              </a:spcAft>
-            </a:pPr>
-            <a:r>
-              <a:rPr sz="1600" b="0">
-                <a:solidFill>
-                  <a:srgbClr val="14120B"/>
-                </a:solidFill>
-                <a:latin typeface="Calibri"/>
-              </a:rPr>
-              <a:t>•  Speaker on answers — hear the reply</a:t>
-            </a:r>
-          </a:p>
-          <a:p>
-            <a:pPr>
-              <a:spcAft>
-                <a:spcPts val="600"/>
-              </a:spcAft>
-            </a:pPr>
-            <a:r>
-              <a:rPr sz="1600" b="0">
-                <a:solidFill>
-                  <a:srgbClr val="14120B"/>
-                </a:solidFill>
-                <a:latin typeface="Calibri"/>
-              </a:rPr>
-              <a:t>•  English / Hindi follows the language menu</a:t>
-            </a:r>
-          </a:p>
-          <a:p>
-            <a:pPr>
-              <a:spcAft>
-                <a:spcPts val="600"/>
-              </a:spcAft>
-            </a:pPr>
-            <a:r>
-              <a:rPr sz="1600" b="0">
-                <a:solidFill>
-                  <a:srgbClr val="14120B"/>
-                </a:solidFill>
-                <a:latin typeface="Calibri"/>
-              </a:rPr>
-              <a:t>•  Settings: send after speaking, read answers aloud</a:t>
-            </a:r>
-          </a:p>
-          <a:p>
-            <a:pPr>
-              <a:spcAft>
-                <a:spcPts val="600"/>
-              </a:spcAft>
-            </a:pPr>
-            <a:r>
-              <a:rPr sz="1600" b="0">
-                <a:solidFill>
-                  <a:srgbClr val="14120B"/>
-                </a:solidFill>
-                <a:latin typeface="Calibri"/>
-              </a:rPr>
-              <a:t>•  App version badge now shows v1.4.0</a:t>
-            </a:r>
-          </a:p>
-        </p:txBody>
-      </p:sp>
-      <p:sp>
-        <p:nvSpPr>
-          <p:cNvPr id="12" name="TextBox 11"/>
+              <a:rPr sz="1500" b="0">
+                <a:solidFill>
+                  <a:srgbClr val="1A1612"/>
+                </a:solidFill>
+                <a:latin typeface="Calibri"/>
+              </a:rPr>
+              <a:t>Weather, math, GitHub lookup, “make me a landing page”, “save this as a note”.</a:t>
+            </a:r>
+          </a:p>
+        </p:txBody>
+      </p:sp>
+      <p:sp>
+        <p:nvSpPr>
+          <p:cNvPr id="14" name="TextBox 13"/>
           <p:cNvSpPr txBox="1"/>
           <p:nvPr/>
         </p:nvSpPr>
         <p:spPr>
           <a:xfrm>
             <a:off x="548640" y="6510528"/>
-            <a:ext cx="7315200" cy="274320"/>
+            <a:ext cx="8229600" cy="274320"/>
           </a:xfrm>
           <a:prstGeom prst="rect">
             <a:avLst/>
@@ -7081,18 +11348,18 @@
             <a:r>
               <a:rPr sz="1200" b="0">
                 <a:solidFill>
-                  <a:srgbClr val="6F6B63"/>
-                </a:solidFill>
-                <a:latin typeface="Calibri"/>
-              </a:rPr>
-              <a:t>Agentic AI  ·  v1.4.0</a:t>
-            </a:r>
-          </a:p>
-        </p:txBody>
-      </p:sp>
-      <p:sp>
-        <p:nvSpPr>
-          <p:cNvPr id="13" name="TextBox 12"/>
+                  <a:srgbClr val="5E574E"/>
+                </a:solidFill>
+                <a:latin typeface="Calibri"/>
+              </a:rPr>
+              <a:t>Agentic AI  ·  v1.6.0  ·  Abhishek Mishra</a:t>
+            </a:r>
+          </a:p>
+        </p:txBody>
+      </p:sp>
+      <p:sp>
+        <p:nvSpPr>
+          <p:cNvPr id="15" name="TextBox 14"/>
           <p:cNvSpPr txBox="1"/>
           <p:nvPr/>
         </p:nvSpPr>
@@ -7116,11 +11383,11 @@
             <a:r>
               <a:rPr sz="1200" b="0">
                 <a:solidFill>
-                  <a:srgbClr val="6F6B63"/>
-                </a:solidFill>
-                <a:latin typeface="Calibri"/>
-              </a:rPr>
-              <a:t>6 / 14</a:t>
+                  <a:srgbClr val="5E574E"/>
+                </a:solidFill>
+                <a:latin typeface="Calibri"/>
+              </a:rPr>
+              <a:t>6 / 22</a:t>
             </a:r>
           </a:p>
         </p:txBody>
@@ -7158,7 +11425,7 @@
             <a:avLst/>
           </a:prstGeom>
           <a:solidFill>
-            <a:srgbClr val="F7F4EF"/>
+            <a:srgbClr val="F1F1F1"/>
           </a:solidFill>
           <a:ln>
             <a:noFill/>
@@ -7201,7 +11468,7 @@
             <a:avLst/>
           </a:prstGeom>
           <a:solidFill>
-            <a:srgbClr val="D97757"/>
+            <a:srgbClr val="DB8F2A"/>
           </a:solidFill>
           <a:ln>
             <a:noFill/>
@@ -7255,11 +11522,11 @@
             <a:r>
               <a:rPr sz="3200" b="1">
                 <a:solidFill>
-                  <a:srgbClr val="14120B"/>
+                  <a:srgbClr val="1A1612"/>
                 </a:solidFill>
                 <a:latin typeface="Georgia"/>
               </a:rPr>
-              <a:t>What’s new in v1.4.0</a:t>
+              <a:t>Architecture</a:t>
             </a:r>
           </a:p>
         </p:txBody>
@@ -7272,8 +11539,8 @@
         </p:nvSpPr>
         <p:spPr>
           <a:xfrm>
-            <a:off x="640080" y="1325880"/>
-            <a:ext cx="3456432" cy="4480560"/>
+            <a:off x="640080" y="1280160"/>
+            <a:ext cx="3456432" cy="4572000"/>
           </a:xfrm>
           <a:prstGeom prst="roundRect">
             <a:avLst>
@@ -7281,11 +11548,11 @@
             </a:avLst>
           </a:prstGeom>
           <a:solidFill>
-            <a:srgbClr val="FFFCF8"/>
+            <a:srgbClr val="FFFFFF"/>
           </a:solidFill>
           <a:ln>
             <a:solidFill>
-              <a:srgbClr val="E6E0D6"/>
+              <a:srgbClr val="D4C8B8"/>
             </a:solidFill>
           </a:ln>
         </p:spPr>
@@ -7319,8 +11586,8 @@
         </p:nvSpPr>
         <p:spPr>
           <a:xfrm>
-            <a:off x="896112" y="1554480"/>
-            <a:ext cx="2999232" cy="914400"/>
+            <a:off x="896112" y="1508760"/>
+            <a:ext cx="2999232" cy="822960"/>
           </a:xfrm>
           <a:prstGeom prst="rect">
             <a:avLst/>
@@ -7335,13 +11602,13 @@
           <a:p>
             <a:pPr algn="l"/>
             <a:r>
-              <a:rPr sz="2000" b="1">
-                <a:solidFill>
-                  <a:srgbClr val="8A331C"/>
-                </a:solidFill>
-                <a:latin typeface="Calibri"/>
-              </a:rPr>
-              <a:t>Edit a sent message</a:t>
+              <a:rPr sz="1800" b="1">
+                <a:solidFill>
+                  <a:srgbClr val="B8741C"/>
+                </a:solidFill>
+                <a:latin typeface="Calibri"/>
+              </a:rPr>
+              <a:t>Frontend</a:t>
             </a:r>
           </a:p>
         </p:txBody>
@@ -7354,8 +11621,8 @@
         </p:nvSpPr>
         <p:spPr>
           <a:xfrm>
-            <a:off x="896112" y="2468880"/>
-            <a:ext cx="2999232" cy="3017520"/>
+            <a:off x="896112" y="2331720"/>
+            <a:ext cx="2999232" cy="3200400"/>
           </a:xfrm>
           <a:prstGeom prst="rect">
             <a:avLst/>
@@ -7370,14 +11637,16 @@
           <a:p>
             <a:pPr algn="l"/>
             <a:r>
-              <a:rPr sz="1600" b="0">
-                <a:solidFill>
-                  <a:srgbClr val="14120B"/>
-                </a:solidFill>
-                <a:latin typeface="Calibri"/>
-              </a:rPr>
-              <a:t>Pencil under your bubble. Change the question, then Enter or Save &amp; retry.
-The old reply is dropped. The agent searches again with the new text.</a:t>
+              <a:rPr sz="1500" b="0">
+                <a:solidFill>
+                  <a:srgbClr val="1A1612"/>
+                </a:solidFill>
+                <a:latin typeface="Calibri"/>
+              </a:rPr>
+              <a:t>Next.js 15 · React · TypeScript
+Chat, sidebar, Artifacts, Settings, Projects, Notes.
+http://127.0.0.1:3000
+Proxies /api to Python so cookies and SSE streaming work.</a:t>
             </a:r>
           </a:p>
         </p:txBody>
@@ -7390,8 +11659,8 @@
         </p:nvSpPr>
         <p:spPr>
           <a:xfrm>
-            <a:off x="4352544" y="1325880"/>
-            <a:ext cx="3456432" cy="4480560"/>
+            <a:off x="4352544" y="1280160"/>
+            <a:ext cx="3456432" cy="4572000"/>
           </a:xfrm>
           <a:prstGeom prst="roundRect">
             <a:avLst>
@@ -7399,11 +11668,11 @@
             </a:avLst>
           </a:prstGeom>
           <a:solidFill>
-            <a:srgbClr val="FFFCF8"/>
+            <a:srgbClr val="FFFFFF"/>
           </a:solidFill>
           <a:ln>
             <a:solidFill>
-              <a:srgbClr val="E6E0D6"/>
+              <a:srgbClr val="D4C8B8"/>
             </a:solidFill>
           </a:ln>
         </p:spPr>
@@ -7437,8 +11706,8 @@
         </p:nvSpPr>
         <p:spPr>
           <a:xfrm>
-            <a:off x="4608576" y="1554480"/>
-            <a:ext cx="2999232" cy="914400"/>
+            <a:off x="4608576" y="1508760"/>
+            <a:ext cx="2999232" cy="822960"/>
           </a:xfrm>
           <a:prstGeom prst="rect">
             <a:avLst/>
@@ -7453,13 +11722,13 @@
           <a:p>
             <a:pPr algn="l"/>
             <a:r>
-              <a:rPr sz="2000" b="1">
-                <a:solidFill>
-                  <a:srgbClr val="8A331C"/>
-                </a:solidFill>
-                <a:latin typeface="Calibri"/>
-              </a:rPr>
-              <a:t>Voice in</a:t>
+              <a:rPr sz="1800" b="1">
+                <a:solidFill>
+                  <a:srgbClr val="B8741C"/>
+                </a:solidFill>
+                <a:latin typeface="Calibri"/>
+              </a:rPr>
+              <a:t>Backend</a:t>
             </a:r>
           </a:p>
         </p:txBody>
@@ -7472,8 +11741,8 @@
         </p:nvSpPr>
         <p:spPr>
           <a:xfrm>
-            <a:off x="4608576" y="2468880"/>
-            <a:ext cx="2999232" cy="3017520"/>
+            <a:off x="4608576" y="2331720"/>
+            <a:ext cx="2999232" cy="3200400"/>
           </a:xfrm>
           <a:prstGeom prst="rect">
             <a:avLst/>
@@ -7488,14 +11757,15 @@
           <a:p>
             <a:pPr algn="l"/>
             <a:r>
-              <a:rPr sz="1600" b="0">
-                <a:solidFill>
-                  <a:srgbClr val="14120B"/>
-                </a:solidFill>
-                <a:latin typeface="Calibri"/>
-              </a:rPr>
-              <a:t>Microphone in the chat box. Speak your question (Chrome or Edge).
-Language follows English / Hindi in the sidebar. Optional auto-send when you stop.</a:t>
+              <a:rPr sz="1500" b="0">
+                <a:solidFill>
+                  <a:srgbClr val="1A1612"/>
+                </a:solidFill>
+                <a:latin typeface="Calibri"/>
+              </a:rPr>
+              <a:t>FastAPI + Uvicorn
+Login, chat stream, extract files, Teach, notes APIs, tool install.
+http://127.0.0.1:7860</a:t>
             </a:r>
           </a:p>
         </p:txBody>
@@ -7508,8 +11778,8 @@
         </p:nvSpPr>
         <p:spPr>
           <a:xfrm>
-            <a:off x="8065008" y="1325880"/>
-            <a:ext cx="3456432" cy="4480560"/>
+            <a:off x="8065008" y="1280160"/>
+            <a:ext cx="3456432" cy="4572000"/>
           </a:xfrm>
           <a:prstGeom prst="roundRect">
             <a:avLst>
@@ -7517,11 +11787,11 @@
             </a:avLst>
           </a:prstGeom>
           <a:solidFill>
-            <a:srgbClr val="FFFCF8"/>
+            <a:srgbClr val="FFFFFF"/>
           </a:solidFill>
           <a:ln>
             <a:solidFill>
-              <a:srgbClr val="E6E0D6"/>
+              <a:srgbClr val="D4C8B8"/>
             </a:solidFill>
           </a:ln>
         </p:spPr>
@@ -7555,8 +11825,8 @@
         </p:nvSpPr>
         <p:spPr>
           <a:xfrm>
-            <a:off x="8321040" y="1554480"/>
-            <a:ext cx="2999232" cy="914400"/>
+            <a:off x="8321040" y="1508760"/>
+            <a:ext cx="2999232" cy="822960"/>
           </a:xfrm>
           <a:prstGeom prst="rect">
             <a:avLst/>
@@ -7571,13 +11841,13 @@
           <a:p>
             <a:pPr algn="l"/>
             <a:r>
-              <a:rPr sz="2000" b="1">
-                <a:solidFill>
-                  <a:srgbClr val="8A331C"/>
-                </a:solidFill>
-                <a:latin typeface="Calibri"/>
-              </a:rPr>
-              <a:t>Voice out</a:t>
+              <a:rPr sz="1800" b="1">
+                <a:solidFill>
+                  <a:srgbClr val="B8741C"/>
+                </a:solidFill>
+                <a:latin typeface="Calibri"/>
+              </a:rPr>
+              <a:t>Agent core</a:t>
             </a:r>
           </a:p>
         </p:txBody>
@@ -7590,8 +11860,8 @@
         </p:nvSpPr>
         <p:spPr>
           <a:xfrm>
-            <a:off x="8321040" y="2468880"/>
-            <a:ext cx="2999232" cy="3017520"/>
+            <a:off x="8321040" y="2331720"/>
+            <a:ext cx="2999232" cy="3200400"/>
           </a:xfrm>
           <a:prstGeom prst="rect">
             <a:avLst/>
@@ -7606,14 +11876,17 @@
           <a:p>
             <a:pPr algn="l"/>
             <a:r>
-              <a:rPr sz="1600" b="0">
-                <a:solidFill>
-                  <a:srgbClr val="14120B"/>
-                </a:solidFill>
-                <a:latin typeface="Calibri"/>
-              </a:rPr>
-              <a:t>Speaker on each answer to hear it.
-Settings → Read answers aloud if you want every reply spoken automatically.</a:t>
+              <a:rPr sz="1500" b="0">
+                <a:solidFill>
+                  <a:srgbClr val="1A1612"/>
+                </a:solidFill>
+                <a:latin typeface="Calibri"/>
+              </a:rPr>
+              <a:t>Custom ReAct Agent
+(not LangGraph)
+LLM + tools + memory.
+Optional crew: Researcher then Writer.
+Sandbox for short Python.</a:t>
             </a:r>
           </a:p>
         </p:txBody>
@@ -7627,7 +11900,7 @@
         <p:spPr>
           <a:xfrm>
             <a:off x="548640" y="6510528"/>
-            <a:ext cx="7315200" cy="274320"/>
+            <a:ext cx="8229600" cy="274320"/>
           </a:xfrm>
           <a:prstGeom prst="rect">
             <a:avLst/>
@@ -7644,11 +11917,11 @@
             <a:r>
               <a:rPr sz="1200" b="0">
                 <a:solidFill>
-                  <a:srgbClr val="6F6B63"/>
-                </a:solidFill>
-                <a:latin typeface="Calibri"/>
-              </a:rPr>
-              <a:t>Agentic AI  ·  v1.4.0</a:t>
+                  <a:srgbClr val="5E574E"/>
+                </a:solidFill>
+                <a:latin typeface="Calibri"/>
+              </a:rPr>
+              <a:t>Agentic AI  ·  v1.6.0  ·  Abhishek Mishra</a:t>
             </a:r>
           </a:p>
         </p:txBody>
@@ -7679,11 +11952,11 @@
             <a:r>
               <a:rPr sz="1200" b="0">
                 <a:solidFill>
-                  <a:srgbClr val="6F6B63"/>
-                </a:solidFill>
-                <a:latin typeface="Calibri"/>
-              </a:rPr>
-              <a:t>7 / 14</a:t>
+                  <a:srgbClr val="5E574E"/>
+                </a:solidFill>
+                <a:latin typeface="Calibri"/>
+              </a:rPr>
+              <a:t>7 / 22</a:t>
             </a:r>
           </a:p>
         </p:txBody>
@@ -7721,7 +11994,7 @@
             <a:avLst/>
           </a:prstGeom>
           <a:solidFill>
-            <a:srgbClr val="F7F4EF"/>
+            <a:srgbClr val="F1F1F1"/>
           </a:solidFill>
           <a:ln>
             <a:noFill/>
@@ -7764,7 +12037,7 @@
             <a:avLst/>
           </a:prstGeom>
           <a:solidFill>
-            <a:srgbClr val="D97757"/>
+            <a:srgbClr val="DB8F2A"/>
           </a:solidFill>
           <a:ln>
             <a:noFill/>
@@ -7818,11 +12091,11 @@
             <a:r>
               <a:rPr sz="3200" b="1">
                 <a:solidFill>
-                  <a:srgbClr val="14120B"/>
+                  <a:srgbClr val="1A1612"/>
                 </a:solidFill>
                 <a:latin typeface="Georgia"/>
               </a:rPr>
-              <a:t>Two ways to work</a:t>
+              <a:t>Tech stack</a:t>
             </a:r>
           </a:p>
         </p:txBody>
@@ -7835,8 +12108,8 @@
         </p:nvSpPr>
         <p:spPr>
           <a:xfrm>
-            <a:off x="731520" y="1280160"/>
-            <a:ext cx="10515600" cy="4846320"/>
+            <a:off x="731520" y="1234440"/>
+            <a:ext cx="10607040" cy="5029200"/>
           </a:xfrm>
           <a:prstGeom prst="rect">
             <a:avLst/>
@@ -7851,81 +12124,113 @@
           <a:p>
             <a:pPr>
               <a:spcAft>
-                <a:spcPts val="600"/>
+                <a:spcPts val="800"/>
               </a:spcAft>
             </a:pPr>
             <a:r>
-              <a:rPr sz="2200" b="0">
-                <a:solidFill>
-                  <a:srgbClr val="14120B"/>
-                </a:solidFill>
-                <a:latin typeface="Calibri"/>
-              </a:rPr>
-              <a:t>•  Single agent — one assistant for quick questions, weather, prices, and math.</a:t>
+              <a:rPr sz="1800" b="0">
+                <a:solidFill>
+                  <a:srgbClr val="1A1612"/>
+                </a:solidFill>
+                <a:latin typeface="Calibri"/>
+              </a:rPr>
+              <a:t>•  LLM: Groq openai/gpt-oss-120b (OpenAI-compatible API). Also OpenAI, OpenRouter, or Ollama.</a:t>
             </a:r>
           </a:p>
           <a:p>
             <a:pPr>
               <a:spcAft>
-                <a:spcPts val="600"/>
+                <a:spcPts val="800"/>
               </a:spcAft>
             </a:pPr>
             <a:r>
-              <a:rPr sz="2200" b="0">
-                <a:solidFill>
-                  <a:srgbClr val="14120B"/>
-                </a:solidFill>
-                <a:latin typeface="Calibri"/>
-              </a:rPr>
-              <a:t>•  Researcher + Writer — first agent gathers facts, second agent writes the answer.</a:t>
+              <a:rPr sz="1800" b="0">
+                <a:solidFill>
+                  <a:srgbClr val="1A1612"/>
+                </a:solidFill>
+                <a:latin typeface="Calibri"/>
+              </a:rPr>
+              <a:t>•  Vision: Groq qwen/qwen3.6-27b — reads photos from gallery or camera.</a:t>
             </a:r>
           </a:p>
           <a:p>
             <a:pPr>
               <a:spcAft>
-                <a:spcPts val="600"/>
+                <a:spcPts val="800"/>
               </a:spcAft>
             </a:pPr>
             <a:r>
-              <a:rPr sz="2200" b="0">
-                <a:solidFill>
-                  <a:srgbClr val="14120B"/>
-                </a:solidFill>
-                <a:latin typeface="Calibri"/>
-              </a:rPr>
-              <a:t>•  Switch modes from the sidebar dropdown before you send a message.</a:t>
+              <a:rPr sz="1800" b="0">
+                <a:solidFill>
+                  <a:srgbClr val="1A1612"/>
+                </a:solidFill>
+                <a:latin typeface="Calibri"/>
+              </a:rPr>
+              <a:t>•  Python 3.10+  ·  FastAPI  ·  Uvicorn  ·  httpx  ·  itsdangerous  ·  pypdf  ·  python-multipart</a:t>
             </a:r>
           </a:p>
           <a:p>
             <a:pPr>
               <a:spcAft>
-                <a:spcPts val="600"/>
+                <a:spcPts val="800"/>
               </a:spcAft>
             </a:pPr>
             <a:r>
-              <a:rPr sz="2200" b="0">
-                <a:solidFill>
-                  <a:srgbClr val="14120B"/>
-                </a:solidFill>
-                <a:latin typeface="Calibri"/>
-              </a:rPr>
-              <a:t>•  Show thinking: live status such as “Searching the web…” while tools run.</a:t>
+              <a:rPr sz="1800" b="0">
+                <a:solidFill>
+                  <a:srgbClr val="1A1612"/>
+                </a:solidFill>
+                <a:latin typeface="Calibri"/>
+              </a:rPr>
+              <a:t>•  Next.js 15  ·  React 19  ·  TypeScript  ·  marked for chat markdown</a:t>
             </a:r>
           </a:p>
           <a:p>
             <a:pPr>
               <a:spcAft>
-                <a:spcPts val="600"/>
+                <a:spcPts val="800"/>
               </a:spcAft>
             </a:pPr>
             <a:r>
-              <a:rPr sz="2200" b="0">
-                <a:solidFill>
-                  <a:srgbClr val="14120B"/>
-                </a:solidFill>
-                <a:latin typeface="Calibri"/>
-              </a:rPr>
-              <a:t>•  Enter to send, voice, temperature, and max tool steps are all in Settings.</a:t>
+              <a:rPr sz="1800" b="0">
+                <a:solidFill>
+                  <a:srgbClr val="1A1612"/>
+                </a:solidFill>
+                <a:latin typeface="Calibri"/>
+              </a:rPr>
+              <a:t>•  Search: DuckDuckGo (ddgs). Weather: wttr.in. Notes saved as .md on disk.</a:t>
+            </a:r>
+          </a:p>
+          <a:p>
+            <a:pPr>
+              <a:spcAft>
+                <a:spcPts val="800"/>
+              </a:spcAft>
+            </a:pPr>
+            <a:r>
+              <a:rPr sz="1800" b="0">
+                <a:solidFill>
+                  <a:srgbClr val="1A1612"/>
+                </a:solidFill>
+                <a:latin typeface="Calibri"/>
+              </a:rPr>
+              <a:t>•  UI: cream sidebar #dacebe, chat paper #f1f1f1, gold accent #db8f2a, Fraunces + Figtree.</a:t>
+            </a:r>
+          </a:p>
+          <a:p>
+            <a:pPr>
+              <a:spcAft>
+                <a:spcPts val="800"/>
+              </a:spcAft>
+            </a:pPr>
+            <a:r>
+              <a:rPr sz="1800" b="0">
+                <a:solidFill>
+                  <a:srgbClr val="1A1612"/>
+                </a:solidFill>
+                <a:latin typeface="Calibri"/>
+              </a:rPr>
+              <a:t>•  Deploy: one Docker image on Render or Hugging Face Spaces. Vercel alone cannot run the Python API.</a:t>
             </a:r>
           </a:p>
         </p:txBody>
@@ -7939,7 +12244,7 @@
         <p:spPr>
           <a:xfrm>
             <a:off x="548640" y="6510528"/>
-            <a:ext cx="7315200" cy="274320"/>
+            <a:ext cx="8229600" cy="274320"/>
           </a:xfrm>
           <a:prstGeom prst="rect">
             <a:avLst/>
@@ -7956,11 +12261,11 @@
             <a:r>
               <a:rPr sz="1200" b="0">
                 <a:solidFill>
-                  <a:srgbClr val="6F6B63"/>
-                </a:solidFill>
-                <a:latin typeface="Calibri"/>
-              </a:rPr>
-              <a:t>Agentic AI  ·  v1.4.0</a:t>
+                  <a:srgbClr val="5E574E"/>
+                </a:solidFill>
+                <a:latin typeface="Calibri"/>
+              </a:rPr>
+              <a:t>Agentic AI  ·  v1.6.0  ·  Abhishek Mishra</a:t>
             </a:r>
           </a:p>
         </p:txBody>
@@ -7991,11 +12296,11 @@
             <a:r>
               <a:rPr sz="1200" b="0">
                 <a:solidFill>
-                  <a:srgbClr val="6F6B63"/>
-                </a:solidFill>
-                <a:latin typeface="Calibri"/>
-              </a:rPr>
-              <a:t>8 / 14</a:t>
+                  <a:srgbClr val="5E574E"/>
+                </a:solidFill>
+                <a:latin typeface="Calibri"/>
+              </a:rPr>
+              <a:t>8 / 22</a:t>
             </a:r>
           </a:p>
         </p:txBody>
@@ -8033,7 +12338,7 @@
             <a:avLst/>
           </a:prstGeom>
           <a:solidFill>
-            <a:srgbClr val="F7F4EF"/>
+            <a:srgbClr val="F1F1F1"/>
           </a:solidFill>
           <a:ln>
             <a:noFill/>
@@ -8076,7 +12381,7 @@
             <a:avLst/>
           </a:prstGeom>
           <a:solidFill>
-            <a:srgbClr val="D97757"/>
+            <a:srgbClr val="DB8F2A"/>
           </a:solidFill>
           <a:ln>
             <a:noFill/>
@@ -8130,59 +12435,163 @@
             <a:r>
               <a:rPr sz="3200" b="1">
                 <a:solidFill>
-                  <a:srgbClr val="14120B"/>
+                  <a:srgbClr val="1A1612"/>
                 </a:solidFill>
                 <a:latin typeface="Georgia"/>
               </a:rPr>
-              <a:t>Tools</a:t>
-            </a:r>
-          </a:p>
-        </p:txBody>
-      </p:sp>
-      <p:sp>
-        <p:nvSpPr>
-          <p:cNvPr id="5" name="Rounded Rectangle 4"/>
-          <p:cNvSpPr/>
-          <p:nvPr/>
-        </p:nvSpPr>
-        <p:spPr>
-          <a:xfrm>
-            <a:off x="640080" y="1280160"/>
-            <a:ext cx="10881360" cy="1371600"/>
-          </a:xfrm>
-          <a:prstGeom prst="roundRect">
-            <a:avLst>
-              <a:gd name="adj" fmla="val 8000"/>
-            </a:avLst>
-          </a:prstGeom>
-          <a:solidFill>
-            <a:srgbClr val="FFFCF8"/>
-          </a:solidFill>
-          <a:ln>
-            <a:solidFill>
-              <a:srgbClr val="E6E0D6"/>
-            </a:solidFill>
-          </a:ln>
-        </p:spPr>
-        <p:style>
-          <a:lnRef idx="1">
-            <a:schemeClr val="accent1"/>
-          </a:lnRef>
-          <a:fillRef idx="3">
-            <a:schemeClr val="accent1"/>
-          </a:fillRef>
-          <a:effectRef idx="2">
-            <a:schemeClr val="accent1"/>
-          </a:effectRef>
-          <a:fontRef idx="minor">
-            <a:schemeClr val="lt1"/>
-          </a:fontRef>
-        </p:style>
-        <p:txBody>
-          <a:bodyPr rtlCol="0" anchor="ctr"/>
-          <a:lstStyle/>
-          <a:p>
-            <a:pPr algn="ctr"/>
+              <a:t>Feature map — what v1.6.0 can do</a:t>
+            </a:r>
+          </a:p>
+        </p:txBody>
+      </p:sp>
+      <p:sp>
+        <p:nvSpPr>
+          <p:cNvPr id="5" name="TextBox 4"/>
+          <p:cNvSpPr txBox="1"/>
+          <p:nvPr/>
+        </p:nvSpPr>
+        <p:spPr>
+          <a:xfrm>
+            <a:off x="731520" y="1234440"/>
+            <a:ext cx="10607040" cy="5029200"/>
+          </a:xfrm>
+          <a:prstGeom prst="rect">
+            <a:avLst/>
+          </a:prstGeom>
+          <a:noFill/>
+        </p:spPr>
+        <p:txBody>
+          <a:bodyPr wrap="square">
+            <a:spAutoFit/>
+          </a:bodyPr>
+          <a:lstStyle/>
+          <a:p>
+            <a:pPr>
+              <a:spcAft>
+                <a:spcPts val="800"/>
+              </a:spcAft>
+            </a:pPr>
+            <a:r>
+              <a:rPr sz="1800" b="0">
+                <a:solidFill>
+                  <a:srgbClr val="1A1612"/>
+                </a:solidFill>
+                <a:latin typeface="Calibri"/>
+              </a:rPr>
+              <a:t>•  Chat: markdown, Recents search, edit a sent message, Retry, Export chat as .md</a:t>
+            </a:r>
+          </a:p>
+          <a:p>
+            <a:pPr>
+              <a:spcAft>
+                <a:spcPts val="800"/>
+              </a:spcAft>
+            </a:pPr>
+            <a:r>
+              <a:rPr sz="1800" b="0">
+                <a:solidFill>
+                  <a:srgbClr val="1A1612"/>
+                </a:solidFill>
+                <a:latin typeface="Calibri"/>
+              </a:rPr>
+              <a:t>•  Voice: microphone in, speaker out, English / Hindi / Bhojpuri</a:t>
+            </a:r>
+          </a:p>
+          <a:p>
+            <a:pPr>
+              <a:spcAft>
+                <a:spcPts val="800"/>
+              </a:spcAft>
+            </a:pPr>
+            <a:r>
+              <a:rPr sz="1800" b="0">
+                <a:solidFill>
+                  <a:srgbClr val="1A1612"/>
+                </a:solidFill>
+                <a:latin typeface="Calibri"/>
+              </a:rPr>
+              <a:t>•  Files: PDF, Word, txt, md, csv, json — plus photos and camera</a:t>
+            </a:r>
+          </a:p>
+          <a:p>
+            <a:pPr>
+              <a:spcAft>
+                <a:spcPts val="800"/>
+              </a:spcAft>
+            </a:pPr>
+            <a:r>
+              <a:rPr sz="1800" b="0">
+                <a:solidFill>
+                  <a:srgbClr val="1A1612"/>
+                </a:solidFill>
+                <a:latin typeface="Calibri"/>
+              </a:rPr>
+              <a:t>•  Teach: instructions, facts, and up to 5 training files on every chat (memory, not GPU training)</a:t>
+            </a:r>
+          </a:p>
+          <a:p>
+            <a:pPr>
+              <a:spcAft>
+                <a:spcPts val="800"/>
+              </a:spcAft>
+            </a:pPr>
+            <a:r>
+              <a:rPr sz="1800" b="0">
+                <a:solidFill>
+                  <a:srgbClr val="1A1612"/>
+                </a:solidFill>
+                <a:latin typeface="Calibri"/>
+              </a:rPr>
+              <a:t>•  Projects: name, standing instructions, files, and chats grouped together</a:t>
+            </a:r>
+          </a:p>
+          <a:p>
+            <a:pPr>
+              <a:spcAft>
+                <a:spcPts val="800"/>
+              </a:spcAft>
+            </a:pPr>
+            <a:r>
+              <a:rPr sz="1800" b="0">
+                <a:solidFill>
+                  <a:srgbClr val="1A1612"/>
+                </a:solidFill>
+                <a:latin typeface="Calibri"/>
+              </a:rPr>
+              <a:t>•  Notes viewer: agent saves markdown; you open, download, or delete it in the app</a:t>
+            </a:r>
+          </a:p>
+          <a:p>
+            <a:pPr>
+              <a:spcAft>
+                <a:spcPts val="800"/>
+              </a:spcAft>
+            </a:pPr>
+            <a:r>
+              <a:rPr sz="1800" b="0">
+                <a:solidFill>
+                  <a:srgbClr val="1A1612"/>
+                </a:solidFill>
+                <a:latin typeface="Calibri"/>
+              </a:rPr>
+              <a:t>•  Artifacts: HTML / SVG / markdown / code opens in a side pane</a:t>
+            </a:r>
+          </a:p>
+          <a:p>
+            <a:pPr>
+              <a:spcAft>
+                <a:spcPts val="800"/>
+              </a:spcAft>
+            </a:pPr>
+            <a:r>
+              <a:rPr sz="1800" b="0">
+                <a:solidFill>
+                  <a:srgbClr val="1A1612"/>
+                </a:solidFill>
+                <a:latin typeface="Calibri"/>
+              </a:rPr>
+              <a:t>•  Code sandbox: short Python, no network, no files, 6 second limit</a:t>
+            </a:r>
           </a:p>
         </p:txBody>
       </p:sp>
@@ -8194,8 +12603,8 @@
         </p:nvSpPr>
         <p:spPr>
           <a:xfrm>
-            <a:off x="914400" y="1481328"/>
-            <a:ext cx="10332720" cy="411480"/>
+            <a:off x="548640" y="6510528"/>
+            <a:ext cx="8229600" cy="274320"/>
           </a:xfrm>
           <a:prstGeom prst="rect">
             <a:avLst/>
@@ -8210,13 +12619,13 @@
           <a:p>
             <a:pPr algn="l"/>
             <a:r>
-              <a:rPr sz="2000" b="1">
-                <a:solidFill>
-                  <a:srgbClr val="8A331C"/>
-                </a:solidFill>
-                <a:latin typeface="Calibri"/>
-              </a:rPr>
-              <a:t>Core (ready by default)</a:t>
+              <a:rPr sz="1200" b="0">
+                <a:solidFill>
+                  <a:srgbClr val="5E574E"/>
+                </a:solidFill>
+                <a:latin typeface="Calibri"/>
+              </a:rPr>
+              <a:t>Agentic AI  ·  v1.6.0  ·  Abhishek Mishra</a:t>
             </a:r>
           </a:p>
         </p:txBody>
@@ -8224,313 +12633,6 @@
       <p:sp>
         <p:nvSpPr>
           <p:cNvPr id="7" name="TextBox 6"/>
-          <p:cNvSpPr txBox="1"/>
-          <p:nvPr/>
-        </p:nvSpPr>
-        <p:spPr>
-          <a:xfrm>
-            <a:off x="914400" y="1920240"/>
-            <a:ext cx="10332720" cy="548640"/>
-          </a:xfrm>
-          <a:prstGeom prst="rect">
-            <a:avLst/>
-          </a:prstGeom>
-          <a:noFill/>
-        </p:spPr>
-        <p:txBody>
-          <a:bodyPr wrap="square">
-            <a:spAutoFit/>
-          </a:bodyPr>
-          <a:lstStyle/>
-          <a:p>
-            <a:pPr algn="l"/>
-            <a:r>
-              <a:rPr sz="1800" b="0">
-                <a:solidFill>
-                  <a:srgbClr val="14120B"/>
-                </a:solidFill>
-                <a:latin typeface="Calibri"/>
-              </a:rPr>
-              <a:t>Web Search  ·  Wikipedia  ·  Weather
-Calculator  ·  Clock  ·  Notes</a:t>
-            </a:r>
-          </a:p>
-        </p:txBody>
-      </p:sp>
-      <p:sp>
-        <p:nvSpPr>
-          <p:cNvPr id="8" name="Rounded Rectangle 7"/>
-          <p:cNvSpPr/>
-          <p:nvPr/>
-        </p:nvSpPr>
-        <p:spPr>
-          <a:xfrm>
-            <a:off x="640080" y="2834640"/>
-            <a:ext cx="10881360" cy="1371600"/>
-          </a:xfrm>
-          <a:prstGeom prst="roundRect">
-            <a:avLst>
-              <a:gd name="adj" fmla="val 8000"/>
-            </a:avLst>
-          </a:prstGeom>
-          <a:solidFill>
-            <a:srgbClr val="FFFCF8"/>
-          </a:solidFill>
-          <a:ln>
-            <a:solidFill>
-              <a:srgbClr val="E6E0D6"/>
-            </a:solidFill>
-          </a:ln>
-        </p:spPr>
-        <p:style>
-          <a:lnRef idx="1">
-            <a:schemeClr val="accent1"/>
-          </a:lnRef>
-          <a:fillRef idx="3">
-            <a:schemeClr val="accent1"/>
-          </a:fillRef>
-          <a:effectRef idx="2">
-            <a:schemeClr val="accent1"/>
-          </a:effectRef>
-          <a:fontRef idx="minor">
-            <a:schemeClr val="lt1"/>
-          </a:fontRef>
-        </p:style>
-        <p:txBody>
-          <a:bodyPr rtlCol="0" anchor="ctr"/>
-          <a:lstStyle/>
-          <a:p>
-            <a:pPr algn="ctr"/>
-          </a:p>
-        </p:txBody>
-      </p:sp>
-      <p:sp>
-        <p:nvSpPr>
-          <p:cNvPr id="9" name="TextBox 8"/>
-          <p:cNvSpPr txBox="1"/>
-          <p:nvPr/>
-        </p:nvSpPr>
-        <p:spPr>
-          <a:xfrm>
-            <a:off x="914400" y="3035808"/>
-            <a:ext cx="10332720" cy="411480"/>
-          </a:xfrm>
-          <a:prstGeom prst="rect">
-            <a:avLst/>
-          </a:prstGeom>
-          <a:noFill/>
-        </p:spPr>
-        <p:txBody>
-          <a:bodyPr wrap="square">
-            <a:spAutoFit/>
-          </a:bodyPr>
-          <a:lstStyle/>
-          <a:p>
-            <a:pPr algn="l"/>
-            <a:r>
-              <a:rPr sz="2000" b="1">
-                <a:solidFill>
-                  <a:srgbClr val="8A331C"/>
-                </a:solidFill>
-                <a:latin typeface="Calibri"/>
-              </a:rPr>
-              <a:t>Install when you need them</a:t>
-            </a:r>
-          </a:p>
-        </p:txBody>
-      </p:sp>
-      <p:sp>
-        <p:nvSpPr>
-          <p:cNvPr id="10" name="TextBox 9"/>
-          <p:cNvSpPr txBox="1"/>
-          <p:nvPr/>
-        </p:nvSpPr>
-        <p:spPr>
-          <a:xfrm>
-            <a:off x="914400" y="3474720"/>
-            <a:ext cx="10332720" cy="548640"/>
-          </a:xfrm>
-          <a:prstGeom prst="rect">
-            <a:avLst/>
-          </a:prstGeom>
-          <a:noFill/>
-        </p:spPr>
-        <p:txBody>
-          <a:bodyPr wrap="square">
-            <a:spAutoFit/>
-          </a:bodyPr>
-          <a:lstStyle/>
-          <a:p>
-            <a:pPr algn="l"/>
-            <a:r>
-              <a:rPr sz="1800" b="0">
-                <a:solidFill>
-                  <a:srgbClr val="14120B"/>
-                </a:solidFill>
-                <a:latin typeface="Calibri"/>
-              </a:rPr>
-              <a:t>GitHub lookup  ·  Dice  ·  Unit Convert
-Text Stats  ·  UUID  ·  Random Pick</a:t>
-            </a:r>
-          </a:p>
-        </p:txBody>
-      </p:sp>
-      <p:sp>
-        <p:nvSpPr>
-          <p:cNvPr id="11" name="Rounded Rectangle 10"/>
-          <p:cNvSpPr/>
-          <p:nvPr/>
-        </p:nvSpPr>
-        <p:spPr>
-          <a:xfrm>
-            <a:off x="640080" y="4389120"/>
-            <a:ext cx="10881360" cy="1371600"/>
-          </a:xfrm>
-          <a:prstGeom prst="roundRect">
-            <a:avLst>
-              <a:gd name="adj" fmla="val 8000"/>
-            </a:avLst>
-          </a:prstGeom>
-          <a:solidFill>
-            <a:srgbClr val="FFFCF8"/>
-          </a:solidFill>
-          <a:ln>
-            <a:solidFill>
-              <a:srgbClr val="E6E0D6"/>
-            </a:solidFill>
-          </a:ln>
-        </p:spPr>
-        <p:style>
-          <a:lnRef idx="1">
-            <a:schemeClr val="accent1"/>
-          </a:lnRef>
-          <a:fillRef idx="3">
-            <a:schemeClr val="accent1"/>
-          </a:fillRef>
-          <a:effectRef idx="2">
-            <a:schemeClr val="accent1"/>
-          </a:effectRef>
-          <a:fontRef idx="minor">
-            <a:schemeClr val="lt1"/>
-          </a:fontRef>
-        </p:style>
-        <p:txBody>
-          <a:bodyPr rtlCol="0" anchor="ctr"/>
-          <a:lstStyle/>
-          <a:p>
-            <a:pPr algn="ctr"/>
-          </a:p>
-        </p:txBody>
-      </p:sp>
-      <p:sp>
-        <p:nvSpPr>
-          <p:cNvPr id="12" name="TextBox 11"/>
-          <p:cNvSpPr txBox="1"/>
-          <p:nvPr/>
-        </p:nvSpPr>
-        <p:spPr>
-          <a:xfrm>
-            <a:off x="914400" y="4590288"/>
-            <a:ext cx="10332720" cy="411480"/>
-          </a:xfrm>
-          <a:prstGeom prst="rect">
-            <a:avLst/>
-          </a:prstGeom>
-          <a:noFill/>
-        </p:spPr>
-        <p:txBody>
-          <a:bodyPr wrap="square">
-            <a:spAutoFit/>
-          </a:bodyPr>
-          <a:lstStyle/>
-          <a:p>
-            <a:pPr algn="l"/>
-            <a:r>
-              <a:rPr sz="2000" b="1">
-                <a:solidFill>
-                  <a:srgbClr val="8A331C"/>
-                </a:solidFill>
-                <a:latin typeface="Calibri"/>
-              </a:rPr>
-              <a:t>How they feel</a:t>
-            </a:r>
-          </a:p>
-        </p:txBody>
-      </p:sp>
-      <p:sp>
-        <p:nvSpPr>
-          <p:cNvPr id="13" name="TextBox 12"/>
-          <p:cNvSpPr txBox="1"/>
-          <p:nvPr/>
-        </p:nvSpPr>
-        <p:spPr>
-          <a:xfrm>
-            <a:off x="914400" y="5029200"/>
-            <a:ext cx="10332720" cy="548640"/>
-          </a:xfrm>
-          <a:prstGeom prst="rect">
-            <a:avLst/>
-          </a:prstGeom>
-          <a:noFill/>
-        </p:spPr>
-        <p:txBody>
-          <a:bodyPr wrap="square">
-            <a:spAutoFit/>
-          </a:bodyPr>
-          <a:lstStyle/>
-          <a:p>
-            <a:pPr algn="l"/>
-            <a:r>
-              <a:rPr sz="1800" b="0">
-                <a:solidFill>
-                  <a:srgbClr val="14120B"/>
-                </a:solidFill>
-                <a:latin typeface="Calibri"/>
-              </a:rPr>
-              <a:t>Install / Uninstall in Settings → Tools.
-The agent only uses what is installed.</a:t>
-            </a:r>
-          </a:p>
-        </p:txBody>
-      </p:sp>
-      <p:sp>
-        <p:nvSpPr>
-          <p:cNvPr id="14" name="TextBox 13"/>
-          <p:cNvSpPr txBox="1"/>
-          <p:nvPr/>
-        </p:nvSpPr>
-        <p:spPr>
-          <a:xfrm>
-            <a:off x="548640" y="6510528"/>
-            <a:ext cx="7315200" cy="274320"/>
-          </a:xfrm>
-          <a:prstGeom prst="rect">
-            <a:avLst/>
-          </a:prstGeom>
-          <a:noFill/>
-        </p:spPr>
-        <p:txBody>
-          <a:bodyPr wrap="square">
-            <a:spAutoFit/>
-          </a:bodyPr>
-          <a:lstStyle/>
-          <a:p>
-            <a:pPr algn="l"/>
-            <a:r>
-              <a:rPr sz="1200" b="0">
-                <a:solidFill>
-                  <a:srgbClr val="6F6B63"/>
-                </a:solidFill>
-                <a:latin typeface="Calibri"/>
-              </a:rPr>
-              <a:t>Agentic AI  ·  v1.4.0</a:t>
-            </a:r>
-          </a:p>
-        </p:txBody>
-      </p:sp>
-      <p:sp>
-        <p:nvSpPr>
-          <p:cNvPr id="15" name="TextBox 14"/>
           <p:cNvSpPr txBox="1"/>
           <p:nvPr/>
         </p:nvSpPr>
@@ -8554,11 +12656,11 @@
             <a:r>
               <a:rPr sz="1200" b="0">
                 <a:solidFill>
-                  <a:srgbClr val="6F6B63"/>
-                </a:solidFill>
-                <a:latin typeface="Calibri"/>
-              </a:rPr>
-              <a:t>9 / 14</a:t>
+                  <a:srgbClr val="5E574E"/>
+                </a:solidFill>
+                <a:latin typeface="Calibri"/>
+              </a:rPr>
+              <a:t>9 / 22</a:t>
             </a:r>
           </a:p>
         </p:txBody>
